--- a/slides/ch05-short-workplace-messages.pptx
+++ b/slides/ch05-short-workplace-messages.pptx
@@ -27,6 +27,25 @@
     <p:sldId id="275" r:id="rId27"/>
     <p:sldId id="276" r:id="rId28"/>
     <p:sldId id="277" r:id="rId29"/>
+    <p:sldId id="278" r:id="rId30"/>
+    <p:sldId id="279" r:id="rId31"/>
+    <p:sldId id="280" r:id="rId32"/>
+    <p:sldId id="281" r:id="rId33"/>
+    <p:sldId id="282" r:id="rId34"/>
+    <p:sldId id="283" r:id="rId35"/>
+    <p:sldId id="284" r:id="rId36"/>
+    <p:sldId id="285" r:id="rId37"/>
+    <p:sldId id="286" r:id="rId38"/>
+    <p:sldId id="287" r:id="rId39"/>
+    <p:sldId id="288" r:id="rId40"/>
+    <p:sldId id="289" r:id="rId41"/>
+    <p:sldId id="290" r:id="rId42"/>
+    <p:sldId id="291" r:id="rId43"/>
+    <p:sldId id="292" r:id="rId44"/>
+    <p:sldId id="293" r:id="rId45"/>
+    <p:sldId id="294" r:id="rId46"/>
+    <p:sldId id="295" r:id="rId47"/>
+    <p:sldId id="296" r:id="rId48"/>
   </p:sldIdLst>
   <p:sldSz cx="12191695" cy="6858000" type="screen4x3"/>
   <p:notesSz cx="6858000" cy="9144000"/>
@@ -1223,7 +1242,7 @@
           <a:lstStyle/>
           <a:p>
             <a:r>
-              <a:t>Recap.</a:t>
+              <a:t>Section 5: the memo. Not nostalgia — a distinct tool for policy, record, and anything that must outlive an inbox.</a:t>
             </a:r>
           </a:p>
         </p:txBody>
@@ -1363,7 +1382,7 @@
           <a:lstStyle/>
           <a:p>
             <a:r>
-              <a:t>Closing frame.</a:t>
+              <a:t>The memo survived because email is a delivery channel, not an archive. Anything with a shelf life belongs in a document.</a:t>
             </a:r>
           </a:p>
         </p:txBody>
@@ -1433,7 +1452,7 @@
           <a:lstStyle/>
           <a:p>
             <a:r>
-              <a:t>Async-ready.</a:t>
+              <a:t>Format walk-through. The subject line rules from Section 1 apply verbatim — 'Parking Permit Renewal Due June 15,' not 'Parking.'</a:t>
             </a:r>
           </a:p>
         </p:txBody>
@@ -1503,7 +1522,497 @@
           <a:lstStyle/>
           <a:p>
             <a:r>
-              <a:t>Delivery-neutral closing.</a:t>
+              <a:t>The single highest-frequency 'manage up' document. The honest 'Slipping:' line builds more trust than a month of 'all good.'</a:t>
+            </a:r>
+          </a:p>
+        </p:txBody>
+      </p:sp>
+      <p:sp>
+        <p:nvSpPr>
+          <p:cNvPr id="4" name="Slide Number Placeholder 3"/>
+          <p:cNvSpPr>
+            <a:spLocks noGrp="1"/>
+          </p:cNvSpPr>
+          <p:nvPr>
+            <p:ph type="sldNum" idx="5" sz="quarter"/>
+          </p:nvPr>
+        </p:nvSpPr>
+        <p:spPr/>
+      </p:sp>
+    </p:spTree>
+  </p:cSld>
+  <p:clrMapOvr>
+    <a:masterClrMapping/>
+  </p:clrMapOvr>
+</p:notes>
+</file>
+
+<file path=ppt/notesSlides/notesSlide23.xml><?xml version="1.0" encoding="utf-8"?>
+<p:notes xmlns:a="http://schemas.openxmlformats.org/drawingml/2006/main" xmlns:p="http://schemas.openxmlformats.org/presentationml/2006/main" xmlns:r="http://schemas.openxmlformats.org/officeDocument/2006/relationships">
+  <p:cSld>
+    <p:spTree>
+      <p:nvGrpSpPr>
+        <p:cNvPr id="1" name=""/>
+        <p:cNvGrpSpPr/>
+        <p:nvPr/>
+      </p:nvGrpSpPr>
+      <p:grpSpPr>
+        <a:xfrm>
+          <a:off x="0" y="0"/>
+          <a:ext cx="0" cy="0"/>
+          <a:chOff x="0" y="0"/>
+          <a:chExt cx="0" cy="0"/>
+        </a:xfrm>
+      </p:grpSpPr>
+      <p:sp>
+        <p:nvSpPr>
+          <p:cNvPr id="2" name="Slide Image Placeholder 1"/>
+          <p:cNvSpPr>
+            <a:spLocks noGrp="1"/>
+          </p:cNvSpPr>
+          <p:nvPr>
+            <p:ph type="sldImg" idx="2"/>
+          </p:nvPr>
+        </p:nvSpPr>
+        <p:spPr/>
+      </p:sp>
+      <p:sp>
+        <p:nvSpPr>
+          <p:cNvPr id="3" name="Notes Placeholder 2"/>
+          <p:cNvSpPr>
+            <a:spLocks noGrp="1"/>
+          </p:cNvSpPr>
+          <p:nvPr>
+            <p:ph type="body" idx="3" sz="quarter"/>
+          </p:nvPr>
+        </p:nvSpPr>
+        <p:spPr/>
+        <p:txBody>
+          <a:bodyPr/>
+          <a:lstStyle/>
+          <a:p>
+            <a:r>
+              <a:t>Section 6: calendar communication. A meeting is three written artifacts wrapped around a conversation.</a:t>
+            </a:r>
+          </a:p>
+        </p:txBody>
+      </p:sp>
+      <p:sp>
+        <p:nvSpPr>
+          <p:cNvPr id="4" name="Slide Number Placeholder 3"/>
+          <p:cNvSpPr>
+            <a:spLocks noGrp="1"/>
+          </p:cNvSpPr>
+          <p:nvPr>
+            <p:ph type="sldNum" idx="5" sz="quarter"/>
+          </p:nvPr>
+        </p:nvSpPr>
+        <p:spPr/>
+      </p:sp>
+    </p:spTree>
+  </p:cSld>
+  <p:clrMapOvr>
+    <a:masterClrMapping/>
+  </p:clrMapOvr>
+</p:notes>
+</file>
+
+<file path=ppt/notesSlides/notesSlide24.xml><?xml version="1.0" encoding="utf-8"?>
+<p:notes xmlns:a="http://schemas.openxmlformats.org/drawingml/2006/main" xmlns:p="http://schemas.openxmlformats.org/presentationml/2006/main" xmlns:r="http://schemas.openxmlformats.org/officeDocument/2006/relationships">
+  <p:cSld>
+    <p:spTree>
+      <p:nvGrpSpPr>
+        <p:cNvPr id="1" name=""/>
+        <p:cNvGrpSpPr/>
+        <p:nvPr/>
+      </p:nvGrpSpPr>
+      <p:grpSpPr>
+        <a:xfrm>
+          <a:off x="0" y="0"/>
+          <a:ext cx="0" cy="0"/>
+          <a:chOff x="0" y="0"/>
+          <a:chExt cx="0" cy="0"/>
+        </a:xfrm>
+      </p:grpSpPr>
+      <p:sp>
+        <p:nvSpPr>
+          <p:cNvPr id="2" name="Slide Image Placeholder 1"/>
+          <p:cNvSpPr>
+            <a:spLocks noGrp="1"/>
+          </p:cNvSpPr>
+          <p:nvPr>
+            <p:ph type="sldImg" idx="2"/>
+          </p:nvPr>
+        </p:nvSpPr>
+        <p:spPr/>
+      </p:sp>
+      <p:sp>
+        <p:nvSpPr>
+          <p:cNvPr id="3" name="Notes Placeholder 2"/>
+          <p:cNvSpPr>
+            <a:spLocks noGrp="1"/>
+          </p:cNvSpPr>
+          <p:nvPr>
+            <p:ph type="body" idx="3" sz="quarter"/>
+          </p:nvPr>
+        </p:nvSpPr>
+        <p:spPr/>
+        <p:txBody>
+          <a:bodyPr/>
+          <a:lstStyle/>
+          <a:p>
+            <a:r>
+              <a:t>The invite is a persuasive message: it asks people to spend their scarcest resource. The cost math slide later makes this concrete.</a:t>
+            </a:r>
+          </a:p>
+        </p:txBody>
+      </p:sp>
+      <p:sp>
+        <p:nvSpPr>
+          <p:cNvPr id="4" name="Slide Number Placeholder 3"/>
+          <p:cNvSpPr>
+            <a:spLocks noGrp="1"/>
+          </p:cNvSpPr>
+          <p:nvPr>
+            <p:ph type="sldNum" idx="5" sz="quarter"/>
+          </p:nvPr>
+        </p:nvSpPr>
+        <p:spPr/>
+      </p:sp>
+    </p:spTree>
+  </p:cSld>
+  <p:clrMapOvr>
+    <a:masterClrMapping/>
+  </p:clrMapOvr>
+</p:notes>
+</file>
+
+<file path=ppt/notesSlides/notesSlide25.xml><?xml version="1.0" encoding="utf-8"?>
+<p:notes xmlns:a="http://schemas.openxmlformats.org/drawingml/2006/main" xmlns:p="http://schemas.openxmlformats.org/presentationml/2006/main" xmlns:r="http://schemas.openxmlformats.org/officeDocument/2006/relationships">
+  <p:cSld>
+    <p:spTree>
+      <p:nvGrpSpPr>
+        <p:cNvPr id="1" name=""/>
+        <p:cNvGrpSpPr/>
+        <p:nvPr/>
+      </p:nvGrpSpPr>
+      <p:grpSpPr>
+        <a:xfrm>
+          <a:off x="0" y="0"/>
+          <a:ext cx="0" cy="0"/>
+          <a:chOff x="0" y="0"/>
+          <a:chExt cx="0" cy="0"/>
+        </a:xfrm>
+      </p:grpSpPr>
+      <p:sp>
+        <p:nvSpPr>
+          <p:cNvPr id="2" name="Slide Image Placeholder 1"/>
+          <p:cNvSpPr>
+            <a:spLocks noGrp="1"/>
+          </p:cNvSpPr>
+          <p:nvPr>
+            <p:ph type="sldImg" idx="2"/>
+          </p:nvPr>
+        </p:nvSpPr>
+        <p:spPr/>
+      </p:sp>
+      <p:sp>
+        <p:nvSpPr>
+          <p:cNvPr id="3" name="Notes Placeholder 2"/>
+          <p:cNvSpPr>
+            <a:spLocks noGrp="1"/>
+          </p:cNvSpPr>
+          <p:nvPr>
+            <p:ph type="body" idx="3" sz="quarter"/>
+          </p:nvPr>
+        </p:nvSpPr>
+        <p:spPr/>
+        <p:txBody>
+          <a:bodyPr/>
+          <a:lstStyle/>
+          <a:p>
+            <a:r>
+              <a:t>Agendas fail when items are nouns instead of outcomes. 'Budget' can absorb an hour; 'approve the two changed budget lines' takes eight minutes.</a:t>
+            </a:r>
+          </a:p>
+        </p:txBody>
+      </p:sp>
+      <p:sp>
+        <p:nvSpPr>
+          <p:cNvPr id="4" name="Slide Number Placeholder 3"/>
+          <p:cNvSpPr>
+            <a:spLocks noGrp="1"/>
+          </p:cNvSpPr>
+          <p:nvPr>
+            <p:ph type="sldNum" idx="5" sz="quarter"/>
+          </p:nvPr>
+        </p:nvSpPr>
+        <p:spPr/>
+      </p:sp>
+    </p:spTree>
+  </p:cSld>
+  <p:clrMapOvr>
+    <a:masterClrMapping/>
+  </p:clrMapOvr>
+</p:notes>
+</file>
+
+<file path=ppt/notesSlides/notesSlide26.xml><?xml version="1.0" encoding="utf-8"?>
+<p:notes xmlns:a="http://schemas.openxmlformats.org/drawingml/2006/main" xmlns:p="http://schemas.openxmlformats.org/presentationml/2006/main" xmlns:r="http://schemas.openxmlformats.org/officeDocument/2006/relationships">
+  <p:cSld>
+    <p:spTree>
+      <p:nvGrpSpPr>
+        <p:cNvPr id="1" name=""/>
+        <p:cNvGrpSpPr/>
+        <p:nvPr/>
+      </p:nvGrpSpPr>
+      <p:grpSpPr>
+        <a:xfrm>
+          <a:off x="0" y="0"/>
+          <a:ext cx="0" cy="0"/>
+          <a:chOff x="0" y="0"/>
+          <a:chExt cx="0" cy="0"/>
+        </a:xfrm>
+      </p:grpSpPr>
+      <p:sp>
+        <p:nvSpPr>
+          <p:cNvPr id="2" name="Slide Image Placeholder 1"/>
+          <p:cNvSpPr>
+            <a:spLocks noGrp="1"/>
+          </p:cNvSpPr>
+          <p:nvPr>
+            <p:ph type="sldImg" idx="2"/>
+          </p:nvPr>
+        </p:nvSpPr>
+        <p:spPr/>
+      </p:sp>
+      <p:sp>
+        <p:nvSpPr>
+          <p:cNvPr id="3" name="Notes Placeholder 2"/>
+          <p:cNvSpPr>
+            <a:spLocks noGrp="1"/>
+          </p:cNvSpPr>
+          <p:nvPr>
+            <p:ph type="body" idx="3" sz="quarter"/>
+          </p:nvPr>
+        </p:nvSpPr>
+        <p:spPr/>
+        <p:txBody>
+          <a:bodyPr/>
+          <a:lstStyle/>
+          <a:p>
+            <a:r>
+              <a:t>This is the chat-graduation rule applied to meetings: spoken decisions become written records or they evaporate. Chapter 9 develops formal minutes.</a:t>
+            </a:r>
+          </a:p>
+        </p:txBody>
+      </p:sp>
+      <p:sp>
+        <p:nvSpPr>
+          <p:cNvPr id="4" name="Slide Number Placeholder 3"/>
+          <p:cNvSpPr>
+            <a:spLocks noGrp="1"/>
+          </p:cNvSpPr>
+          <p:nvPr>
+            <p:ph type="sldNum" idx="5" sz="quarter"/>
+          </p:nvPr>
+        </p:nvSpPr>
+        <p:spPr/>
+      </p:sp>
+    </p:spTree>
+  </p:cSld>
+  <p:clrMapOvr>
+    <a:masterClrMapping/>
+  </p:clrMapOvr>
+</p:notes>
+</file>
+
+<file path=ppt/notesSlides/notesSlide27.xml><?xml version="1.0" encoding="utf-8"?>
+<p:notes xmlns:a="http://schemas.openxmlformats.org/drawingml/2006/main" xmlns:p="http://schemas.openxmlformats.org/presentationml/2006/main" xmlns:r="http://schemas.openxmlformats.org/officeDocument/2006/relationships">
+  <p:cSld>
+    <p:spTree>
+      <p:nvGrpSpPr>
+        <p:cNvPr id="1" name=""/>
+        <p:cNvGrpSpPr/>
+        <p:nvPr/>
+      </p:nvGrpSpPr>
+      <p:grpSpPr>
+        <a:xfrm>
+          <a:off x="0" y="0"/>
+          <a:ext cx="0" cy="0"/>
+          <a:chOff x="0" y="0"/>
+          <a:chExt cx="0" cy="0"/>
+        </a:xfrm>
+      </p:grpSpPr>
+      <p:sp>
+        <p:nvSpPr>
+          <p:cNvPr id="2" name="Slide Image Placeholder 1"/>
+          <p:cNvSpPr>
+            <a:spLocks noGrp="1"/>
+          </p:cNvSpPr>
+          <p:nvPr>
+            <p:ph type="sldImg" idx="2"/>
+          </p:nvPr>
+        </p:nvSpPr>
+        <p:spPr/>
+      </p:sp>
+      <p:sp>
+        <p:nvSpPr>
+          <p:cNvPr id="3" name="Notes Placeholder 2"/>
+          <p:cNvSpPr>
+            <a:spLocks noGrp="1"/>
+          </p:cNvSpPr>
+          <p:nvPr>
+            <p:ph type="body" idx="3" sz="quarter"/>
+          </p:nvPr>
+        </p:nvSpPr>
+        <p:spPr/>
+        <p:txBody>
+          <a:bodyPr/>
+          <a:lstStyle/>
+          <a:p>
+            <a:r>
+              <a:t>Not anti-meeting — anti-broadcast-meeting. Real-time belongs to conflict, complexity, and connection (Chapter 1's rich-channel rule).</a:t>
+            </a:r>
+          </a:p>
+        </p:txBody>
+      </p:sp>
+      <p:sp>
+        <p:nvSpPr>
+          <p:cNvPr id="4" name="Slide Number Placeholder 3"/>
+          <p:cNvSpPr>
+            <a:spLocks noGrp="1"/>
+          </p:cNvSpPr>
+          <p:nvPr>
+            <p:ph type="sldNum" idx="5" sz="quarter"/>
+          </p:nvPr>
+        </p:nvSpPr>
+        <p:spPr/>
+      </p:sp>
+    </p:spTree>
+  </p:cSld>
+  <p:clrMapOvr>
+    <a:masterClrMapping/>
+  </p:clrMapOvr>
+</p:notes>
+</file>
+
+<file path=ppt/notesSlides/notesSlide28.xml><?xml version="1.0" encoding="utf-8"?>
+<p:notes xmlns:a="http://schemas.openxmlformats.org/drawingml/2006/main" xmlns:p="http://schemas.openxmlformats.org/presentationml/2006/main" xmlns:r="http://schemas.openxmlformats.org/officeDocument/2006/relationships">
+  <p:cSld>
+    <p:spTree>
+      <p:nvGrpSpPr>
+        <p:cNvPr id="1" name=""/>
+        <p:cNvGrpSpPr/>
+        <p:nvPr/>
+      </p:nvGrpSpPr>
+      <p:grpSpPr>
+        <a:xfrm>
+          <a:off x="0" y="0"/>
+          <a:ext cx="0" cy="0"/>
+          <a:chOff x="0" y="0"/>
+          <a:chExt cx="0" cy="0"/>
+        </a:xfrm>
+      </p:grpSpPr>
+      <p:sp>
+        <p:nvSpPr>
+          <p:cNvPr id="2" name="Slide Image Placeholder 1"/>
+          <p:cNvSpPr>
+            <a:spLocks noGrp="1"/>
+          </p:cNvSpPr>
+          <p:nvPr>
+            <p:ph type="sldImg" idx="2"/>
+          </p:nvPr>
+        </p:nvSpPr>
+        <p:spPr/>
+      </p:sp>
+      <p:sp>
+        <p:nvSpPr>
+          <p:cNvPr id="3" name="Notes Placeholder 2"/>
+          <p:cNvSpPr>
+            <a:spLocks noGrp="1"/>
+          </p:cNvSpPr>
+          <p:nvPr>
+            <p:ph type="body" idx="3" sz="quarter"/>
+          </p:nvPr>
+        </p:nvSpPr>
+        <p:spPr/>
+        <p:txBody>
+          <a:bodyPr/>
+          <a:lstStyle/>
+          <a:p>
+            <a:r>
+              <a:t>Section 7: collaboration platforms — comments, suggestions, versions.</a:t>
+            </a:r>
+          </a:p>
+        </p:txBody>
+      </p:sp>
+      <p:sp>
+        <p:nvSpPr>
+          <p:cNvPr id="4" name="Slide Number Placeholder 3"/>
+          <p:cNvSpPr>
+            <a:spLocks noGrp="1"/>
+          </p:cNvSpPr>
+          <p:nvPr>
+            <p:ph type="sldNum" idx="5" sz="quarter"/>
+          </p:nvPr>
+        </p:nvSpPr>
+        <p:spPr/>
+      </p:sp>
+    </p:spTree>
+  </p:cSld>
+  <p:clrMapOvr>
+    <a:masterClrMapping/>
+  </p:clrMapOvr>
+</p:notes>
+</file>
+
+<file path=ppt/notesSlides/notesSlide29.xml><?xml version="1.0" encoding="utf-8"?>
+<p:notes xmlns:a="http://schemas.openxmlformats.org/drawingml/2006/main" xmlns:p="http://schemas.openxmlformats.org/presentationml/2006/main" xmlns:r="http://schemas.openxmlformats.org/officeDocument/2006/relationships">
+  <p:cSld>
+    <p:spTree>
+      <p:nvGrpSpPr>
+        <p:cNvPr id="1" name=""/>
+        <p:cNvGrpSpPr/>
+        <p:nvPr/>
+      </p:nvGrpSpPr>
+      <p:grpSpPr>
+        <a:xfrm>
+          <a:off x="0" y="0"/>
+          <a:ext cx="0" cy="0"/>
+          <a:chOff x="0" y="0"/>
+          <a:chExt cx="0" cy="0"/>
+        </a:xfrm>
+      </p:grpSpPr>
+      <p:sp>
+        <p:nvSpPr>
+          <p:cNvPr id="2" name="Slide Image Placeholder 1"/>
+          <p:cNvSpPr>
+            <a:spLocks noGrp="1"/>
+          </p:cNvSpPr>
+          <p:nvPr>
+            <p:ph type="sldImg" idx="2"/>
+          </p:nvPr>
+        </p:nvSpPr>
+        <p:spPr/>
+      </p:sp>
+      <p:sp>
+        <p:nvSpPr>
+          <p:cNvPr id="3" name="Notes Placeholder 2"/>
+          <p:cNvSpPr>
+            <a:spLocks noGrp="1"/>
+          </p:cNvSpPr>
+          <p:nvPr>
+            <p:ph type="body" idx="3" sz="quarter"/>
+          </p:nvPr>
+        </p:nvSpPr>
+        <p:spPr/>
+        <p:txBody>
+          <a:bodyPr/>
+          <a:lstStyle/>
+          <a:p>
+            <a:r>
+              <a:t>Comment threads are permanent, visible-to-all writing. The margin of a shared doc is a public room, not a private note.</a:t>
             </a:r>
           </a:p>
         </p:txBody>
@@ -1598,6 +2107,706 @@
 </p:notes>
 </file>
 
+<file path=ppt/notesSlides/notesSlide30.xml><?xml version="1.0" encoding="utf-8"?>
+<p:notes xmlns:a="http://schemas.openxmlformats.org/drawingml/2006/main" xmlns:p="http://schemas.openxmlformats.org/presentationml/2006/main" xmlns:r="http://schemas.openxmlformats.org/officeDocument/2006/relationships">
+  <p:cSld>
+    <p:spTree>
+      <p:nvGrpSpPr>
+        <p:cNvPr id="1" name=""/>
+        <p:cNvGrpSpPr/>
+        <p:nvPr/>
+      </p:nvGrpSpPr>
+      <p:grpSpPr>
+        <a:xfrm>
+          <a:off x="0" y="0"/>
+          <a:ext cx="0" cy="0"/>
+          <a:chOff x="0" y="0"/>
+          <a:chExt cx="0" cy="0"/>
+        </a:xfrm>
+      </p:grpSpPr>
+      <p:sp>
+        <p:nvSpPr>
+          <p:cNvPr id="2" name="Slide Image Placeholder 1"/>
+          <p:cNvSpPr>
+            <a:spLocks noGrp="1"/>
+          </p:cNvSpPr>
+          <p:nvPr>
+            <p:ph type="sldImg" idx="2"/>
+          </p:nvPr>
+        </p:nvSpPr>
+        <p:spPr/>
+      </p:sp>
+      <p:sp>
+        <p:nvSpPr>
+          <p:cNvPr id="3" name="Notes Placeholder 2"/>
+          <p:cNvSpPr>
+            <a:spLocks noGrp="1"/>
+          </p:cNvSpPr>
+          <p:nvPr>
+            <p:ph type="body" idx="3" sz="quarter"/>
+          </p:nvPr>
+        </p:nvSpPr>
+        <p:spPr/>
+        <p:txBody>
+          <a:bodyPr/>
+          <a:lstStyle/>
+          <a:p>
+            <a:r>
+              <a:t>Cloud platforms made copies unnecessary — version chaos today is a habit problem, not a tooling problem. The 'as-submitted' snapshot ties to Chapter 10's versioning discipline.</a:t>
+            </a:r>
+          </a:p>
+        </p:txBody>
+      </p:sp>
+      <p:sp>
+        <p:nvSpPr>
+          <p:cNvPr id="4" name="Slide Number Placeholder 3"/>
+          <p:cNvSpPr>
+            <a:spLocks noGrp="1"/>
+          </p:cNvSpPr>
+          <p:nvPr>
+            <p:ph type="sldNum" idx="5" sz="quarter"/>
+          </p:nvPr>
+        </p:nvSpPr>
+        <p:spPr/>
+      </p:sp>
+    </p:spTree>
+  </p:cSld>
+  <p:clrMapOvr>
+    <a:masterClrMapping/>
+  </p:clrMapOvr>
+</p:notes>
+</file>
+
+<file path=ppt/notesSlides/notesSlide31.xml><?xml version="1.0" encoding="utf-8"?>
+<p:notes xmlns:a="http://schemas.openxmlformats.org/drawingml/2006/main" xmlns:p="http://schemas.openxmlformats.org/presentationml/2006/main" xmlns:r="http://schemas.openxmlformats.org/officeDocument/2006/relationships">
+  <p:cSld>
+    <p:spTree>
+      <p:nvGrpSpPr>
+        <p:cNvPr id="1" name=""/>
+        <p:cNvGrpSpPr/>
+        <p:nvPr/>
+      </p:nvGrpSpPr>
+      <p:grpSpPr>
+        <a:xfrm>
+          <a:off x="0" y="0"/>
+          <a:ext cx="0" cy="0"/>
+          <a:chOff x="0" y="0"/>
+          <a:chExt cx="0" cy="0"/>
+        </a:xfrm>
+      </p:grpSpPr>
+      <p:sp>
+        <p:nvSpPr>
+          <p:cNvPr id="2" name="Slide Image Placeholder 1"/>
+          <p:cNvSpPr>
+            <a:spLocks noGrp="1"/>
+          </p:cNvSpPr>
+          <p:nvPr>
+            <p:ph type="sldImg" idx="2"/>
+          </p:nvPr>
+        </p:nvSpPr>
+        <p:spPr/>
+      </p:sp>
+      <p:sp>
+        <p:nvSpPr>
+          <p:cNvPr id="3" name="Notes Placeholder 2"/>
+          <p:cNvSpPr>
+            <a:spLocks noGrp="1"/>
+          </p:cNvSpPr>
+          <p:nvPr>
+            <p:ph type="body" idx="3" sz="quarter"/>
+          </p:nvPr>
+        </p:nvSpPr>
+        <p:spPr/>
+        <p:txBody>
+          <a:bodyPr/>
+          <a:lstStyle/>
+          <a:p>
+            <a:r>
+              <a:t>Availability signaling is boundary-keeping made polite and searchable. Ties to response-time norms from Section 2.</a:t>
+            </a:r>
+          </a:p>
+        </p:txBody>
+      </p:sp>
+      <p:sp>
+        <p:nvSpPr>
+          <p:cNvPr id="4" name="Slide Number Placeholder 3"/>
+          <p:cNvSpPr>
+            <a:spLocks noGrp="1"/>
+          </p:cNvSpPr>
+          <p:nvPr>
+            <p:ph type="sldNum" idx="5" sz="quarter"/>
+          </p:nvPr>
+        </p:nvSpPr>
+        <p:spPr/>
+      </p:sp>
+    </p:spTree>
+  </p:cSld>
+  <p:clrMapOvr>
+    <a:masterClrMapping/>
+  </p:clrMapOvr>
+</p:notes>
+</file>
+
+<file path=ppt/notesSlides/notesSlide32.xml><?xml version="1.0" encoding="utf-8"?>
+<p:notes xmlns:a="http://schemas.openxmlformats.org/drawingml/2006/main" xmlns:p="http://schemas.openxmlformats.org/presentationml/2006/main" xmlns:r="http://schemas.openxmlformats.org/officeDocument/2006/relationships">
+  <p:cSld>
+    <p:spTree>
+      <p:nvGrpSpPr>
+        <p:cNvPr id="1" name=""/>
+        <p:cNvGrpSpPr/>
+        <p:nvPr/>
+      </p:nvGrpSpPr>
+      <p:grpSpPr>
+        <a:xfrm>
+          <a:off x="0" y="0"/>
+          <a:ext cx="0" cy="0"/>
+          <a:chOff x="0" y="0"/>
+          <a:chExt cx="0" cy="0"/>
+        </a:xfrm>
+      </p:grpSpPr>
+      <p:sp>
+        <p:nvSpPr>
+          <p:cNvPr id="2" name="Slide Image Placeholder 1"/>
+          <p:cNvSpPr>
+            <a:spLocks noGrp="1"/>
+          </p:cNvSpPr>
+          <p:nvPr>
+            <p:ph type="sldImg" idx="2"/>
+          </p:nvPr>
+        </p:nvSpPr>
+        <p:spPr/>
+      </p:sp>
+      <p:sp>
+        <p:nvSpPr>
+          <p:cNvPr id="3" name="Notes Placeholder 2"/>
+          <p:cNvSpPr>
+            <a:spLocks noGrp="1"/>
+          </p:cNvSpPr>
+          <p:nvPr>
+            <p:ph type="body" idx="3" sz="quarter"/>
+          </p:nvPr>
+        </p:nvSpPr>
+        <p:spPr/>
+        <p:txBody>
+          <a:bodyPr/>
+          <a:lstStyle/>
+          <a:p>
+            <a:r>
+              <a:t>Section 8: wikis, internal posts, video messages — where knowledge lives after the thread scrolls away.</a:t>
+            </a:r>
+          </a:p>
+        </p:txBody>
+      </p:sp>
+      <p:sp>
+        <p:nvSpPr>
+          <p:cNvPr id="4" name="Slide Number Placeholder 3"/>
+          <p:cNvSpPr>
+            <a:spLocks noGrp="1"/>
+          </p:cNvSpPr>
+          <p:nvPr>
+            <p:ph type="sldNum" idx="5" sz="quarter"/>
+          </p:nvPr>
+        </p:nvSpPr>
+        <p:spPr/>
+      </p:sp>
+    </p:spTree>
+  </p:cSld>
+  <p:clrMapOvr>
+    <a:masterClrMapping/>
+  </p:clrMapOvr>
+</p:notes>
+</file>
+
+<file path=ppt/notesSlides/notesSlide33.xml><?xml version="1.0" encoding="utf-8"?>
+<p:notes xmlns:a="http://schemas.openxmlformats.org/drawingml/2006/main" xmlns:p="http://schemas.openxmlformats.org/presentationml/2006/main" xmlns:r="http://schemas.openxmlformats.org/officeDocument/2006/relationships">
+  <p:cSld>
+    <p:spTree>
+      <p:nvGrpSpPr>
+        <p:cNvPr id="1" name=""/>
+        <p:cNvGrpSpPr/>
+        <p:nvPr/>
+      </p:nvGrpSpPr>
+      <p:grpSpPr>
+        <a:xfrm>
+          <a:off x="0" y="0"/>
+          <a:ext cx="0" cy="0"/>
+          <a:chOff x="0" y="0"/>
+          <a:chExt cx="0" cy="0"/>
+        </a:xfrm>
+      </p:grpSpPr>
+      <p:sp>
+        <p:nvSpPr>
+          <p:cNvPr id="2" name="Slide Image Placeholder 1"/>
+          <p:cNvSpPr>
+            <a:spLocks noGrp="1"/>
+          </p:cNvSpPr>
+          <p:nvPr>
+            <p:ph type="sldImg" idx="2"/>
+          </p:nvPr>
+        </p:nvSpPr>
+        <p:spPr/>
+      </p:sp>
+      <p:sp>
+        <p:nvSpPr>
+          <p:cNvPr id="3" name="Notes Placeholder 2"/>
+          <p:cNvSpPr>
+            <a:spLocks noGrp="1"/>
+          </p:cNvSpPr>
+          <p:nvPr>
+            <p:ph type="body" idx="3" sz="quarter"/>
+          </p:nvPr>
+        </p:nvSpPr>
+        <p:spPr/>
+        <p:txBody>
+          <a:bodyPr/>
+          <a:lstStyle/>
+          <a:p>
+            <a:r>
+              <a:t>New axis introduced: shelf life. Chat is minutes, email is weeks, the wiki is years. Writers who put long-shelf-life content in short-shelf-life channels doom the team to re-asking.</a:t>
+            </a:r>
+          </a:p>
+        </p:txBody>
+      </p:sp>
+      <p:sp>
+        <p:nvSpPr>
+          <p:cNvPr id="4" name="Slide Number Placeholder 3"/>
+          <p:cNvSpPr>
+            <a:spLocks noGrp="1"/>
+          </p:cNvSpPr>
+          <p:nvPr>
+            <p:ph type="sldNum" idx="5" sz="quarter"/>
+          </p:nvPr>
+        </p:nvSpPr>
+        <p:spPr/>
+      </p:sp>
+    </p:spTree>
+  </p:cSld>
+  <p:clrMapOvr>
+    <a:masterClrMapping/>
+  </p:clrMapOvr>
+</p:notes>
+</file>
+
+<file path=ppt/notesSlides/notesSlide34.xml><?xml version="1.0" encoding="utf-8"?>
+<p:notes xmlns:a="http://schemas.openxmlformats.org/drawingml/2006/main" xmlns:p="http://schemas.openxmlformats.org/presentationml/2006/main" xmlns:r="http://schemas.openxmlformats.org/officeDocument/2006/relationships">
+  <p:cSld>
+    <p:spTree>
+      <p:nvGrpSpPr>
+        <p:cNvPr id="1" name=""/>
+        <p:cNvGrpSpPr/>
+        <p:nvPr/>
+      </p:nvGrpSpPr>
+      <p:grpSpPr>
+        <a:xfrm>
+          <a:off x="0" y="0"/>
+          <a:ext cx="0" cy="0"/>
+          <a:chOff x="0" y="0"/>
+          <a:chExt cx="0" cy="0"/>
+        </a:xfrm>
+      </p:grpSpPr>
+      <p:sp>
+        <p:nvSpPr>
+          <p:cNvPr id="2" name="Slide Image Placeholder 1"/>
+          <p:cNvSpPr>
+            <a:spLocks noGrp="1"/>
+          </p:cNvSpPr>
+          <p:nvPr>
+            <p:ph type="sldImg" idx="2"/>
+          </p:nvPr>
+        </p:nvSpPr>
+        <p:spPr/>
+      </p:sp>
+      <p:sp>
+        <p:nvSpPr>
+          <p:cNvPr id="3" name="Notes Placeholder 2"/>
+          <p:cNvSpPr>
+            <a:spLocks noGrp="1"/>
+          </p:cNvSpPr>
+          <p:nvPr>
+            <p:ph type="body" idx="3" sz="quarter"/>
+          </p:nvPr>
+        </p:nvSpPr>
+        <p:spPr/>
+        <p:txBody>
+          <a:bodyPr/>
+          <a:lstStyle/>
+          <a:p>
+            <a:r>
+              <a:t>The wiki is where Chapter 3's structure rules meet an audience of future strangers. Findability beats elegance.</a:t>
+            </a:r>
+          </a:p>
+        </p:txBody>
+      </p:sp>
+      <p:sp>
+        <p:nvSpPr>
+          <p:cNvPr id="4" name="Slide Number Placeholder 3"/>
+          <p:cNvSpPr>
+            <a:spLocks noGrp="1"/>
+          </p:cNvSpPr>
+          <p:nvPr>
+            <p:ph type="sldNum" idx="5" sz="quarter"/>
+          </p:nvPr>
+        </p:nvSpPr>
+        <p:spPr/>
+      </p:sp>
+    </p:spTree>
+  </p:cSld>
+  <p:clrMapOvr>
+    <a:masterClrMapping/>
+  </p:clrMapOvr>
+</p:notes>
+</file>
+
+<file path=ppt/notesSlides/notesSlide35.xml><?xml version="1.0" encoding="utf-8"?>
+<p:notes xmlns:a="http://schemas.openxmlformats.org/drawingml/2006/main" xmlns:p="http://schemas.openxmlformats.org/presentationml/2006/main" xmlns:r="http://schemas.openxmlformats.org/officeDocument/2006/relationships">
+  <p:cSld>
+    <p:spTree>
+      <p:nvGrpSpPr>
+        <p:cNvPr id="1" name=""/>
+        <p:cNvGrpSpPr/>
+        <p:nvPr/>
+      </p:nvGrpSpPr>
+      <p:grpSpPr>
+        <a:xfrm>
+          <a:off x="0" y="0"/>
+          <a:ext cx="0" cy="0"/>
+          <a:chOff x="0" y="0"/>
+          <a:chExt cx="0" cy="0"/>
+        </a:xfrm>
+      </p:grpSpPr>
+      <p:sp>
+        <p:nvSpPr>
+          <p:cNvPr id="2" name="Slide Image Placeholder 1"/>
+          <p:cNvSpPr>
+            <a:spLocks noGrp="1"/>
+          </p:cNvSpPr>
+          <p:nvPr>
+            <p:ph type="sldImg" idx="2"/>
+          </p:nvPr>
+        </p:nvSpPr>
+        <p:spPr/>
+      </p:sp>
+      <p:sp>
+        <p:nvSpPr>
+          <p:cNvPr id="3" name="Notes Placeholder 2"/>
+          <p:cNvSpPr>
+            <a:spLocks noGrp="1"/>
+          </p:cNvSpPr>
+          <p:nvPr>
+            <p:ph type="body" idx="3" sz="quarter"/>
+          </p:nvPr>
+        </p:nvSpPr>
+        <p:spPr/>
+        <p:txBody>
+          <a:bodyPr/>
+          <a:lstStyle/>
+          <a:p>
+            <a:r>
+              <a:t>Video is rich but opaque to search; text is lean but permanent and quotable. The pairing pattern — video for tone, text summary for record — gets both.</a:t>
+            </a:r>
+          </a:p>
+        </p:txBody>
+      </p:sp>
+      <p:sp>
+        <p:nvSpPr>
+          <p:cNvPr id="4" name="Slide Number Placeholder 3"/>
+          <p:cNvSpPr>
+            <a:spLocks noGrp="1"/>
+          </p:cNvSpPr>
+          <p:nvPr>
+            <p:ph type="sldNum" idx="5" sz="quarter"/>
+          </p:nvPr>
+        </p:nvSpPr>
+        <p:spPr/>
+      </p:sp>
+    </p:spTree>
+  </p:cSld>
+  <p:clrMapOvr>
+    <a:masterClrMapping/>
+  </p:clrMapOvr>
+</p:notes>
+</file>
+
+<file path=ppt/notesSlides/notesSlide36.xml><?xml version="1.0" encoding="utf-8"?>
+<p:notes xmlns:a="http://schemas.openxmlformats.org/drawingml/2006/main" xmlns:p="http://schemas.openxmlformats.org/presentationml/2006/main" xmlns:r="http://schemas.openxmlformats.org/officeDocument/2006/relationships">
+  <p:cSld>
+    <p:spTree>
+      <p:nvGrpSpPr>
+        <p:cNvPr id="1" name=""/>
+        <p:cNvGrpSpPr/>
+        <p:nvPr/>
+      </p:nvGrpSpPr>
+      <p:grpSpPr>
+        <a:xfrm>
+          <a:off x="0" y="0"/>
+          <a:ext cx="0" cy="0"/>
+          <a:chOff x="0" y="0"/>
+          <a:chExt cx="0" cy="0"/>
+        </a:xfrm>
+      </p:grpSpPr>
+      <p:sp>
+        <p:nvSpPr>
+          <p:cNvPr id="2" name="Slide Image Placeholder 1"/>
+          <p:cNvSpPr>
+            <a:spLocks noGrp="1"/>
+          </p:cNvSpPr>
+          <p:nvPr>
+            <p:ph type="sldImg" idx="2"/>
+          </p:nvPr>
+        </p:nvSpPr>
+        <p:spPr/>
+      </p:sp>
+      <p:sp>
+        <p:nvSpPr>
+          <p:cNvPr id="3" name="Notes Placeholder 2"/>
+          <p:cNvSpPr>
+            <a:spLocks noGrp="1"/>
+          </p:cNvSpPr>
+          <p:nvPr>
+            <p:ph type="body" idx="3" sz="quarter"/>
+          </p:nvPr>
+        </p:nvSpPr>
+        <p:spPr/>
+        <p:txBody>
+          <a:bodyPr/>
+          <a:lstStyle/>
+          <a:p>
+            <a:r>
+              <a:t>Direct setup for the email-signature assignment. The signature is letterhead: identification, not decoration.</a:t>
+            </a:r>
+          </a:p>
+        </p:txBody>
+      </p:sp>
+      <p:sp>
+        <p:nvSpPr>
+          <p:cNvPr id="4" name="Slide Number Placeholder 3"/>
+          <p:cNvSpPr>
+            <a:spLocks noGrp="1"/>
+          </p:cNvSpPr>
+          <p:nvPr>
+            <p:ph type="sldNum" idx="5" sz="quarter"/>
+          </p:nvPr>
+        </p:nvSpPr>
+        <p:spPr/>
+      </p:sp>
+    </p:spTree>
+  </p:cSld>
+  <p:clrMapOvr>
+    <a:masterClrMapping/>
+  </p:clrMapOvr>
+</p:notes>
+</file>
+
+<file path=ppt/notesSlides/notesSlide37.xml><?xml version="1.0" encoding="utf-8"?>
+<p:notes xmlns:a="http://schemas.openxmlformats.org/drawingml/2006/main" xmlns:p="http://schemas.openxmlformats.org/presentationml/2006/main" xmlns:r="http://schemas.openxmlformats.org/officeDocument/2006/relationships">
+  <p:cSld>
+    <p:spTree>
+      <p:nvGrpSpPr>
+        <p:cNvPr id="1" name=""/>
+        <p:cNvGrpSpPr/>
+        <p:nvPr/>
+      </p:nvGrpSpPr>
+      <p:grpSpPr>
+        <a:xfrm>
+          <a:off x="0" y="0"/>
+          <a:ext cx="0" cy="0"/>
+          <a:chOff x="0" y="0"/>
+          <a:chExt cx="0" cy="0"/>
+        </a:xfrm>
+      </p:grpSpPr>
+      <p:sp>
+        <p:nvSpPr>
+          <p:cNvPr id="2" name="Slide Image Placeholder 1"/>
+          <p:cNvSpPr>
+            <a:spLocks noGrp="1"/>
+          </p:cNvSpPr>
+          <p:nvPr>
+            <p:ph type="sldImg" idx="2"/>
+          </p:nvPr>
+        </p:nvSpPr>
+        <p:spPr/>
+      </p:sp>
+      <p:sp>
+        <p:nvSpPr>
+          <p:cNvPr id="3" name="Notes Placeholder 2"/>
+          <p:cNvSpPr>
+            <a:spLocks noGrp="1"/>
+          </p:cNvSpPr>
+          <p:nvPr>
+            <p:ph type="body" idx="3" sz="quarter"/>
+          </p:nvPr>
+        </p:nvSpPr>
+        <p:spPr/>
+        <p:txBody>
+          <a:bodyPr/>
+          <a:lstStyle/>
+          <a:p>
+            <a:r>
+              <a:t>Gloria Mark's UC Irvine work on interruption recovery — cite as approximate, the point is the order of magnitude. This arms students with the 'why' behind batching and focus blocks.</a:t>
+            </a:r>
+          </a:p>
+        </p:txBody>
+      </p:sp>
+      <p:sp>
+        <p:nvSpPr>
+          <p:cNvPr id="4" name="Slide Number Placeholder 3"/>
+          <p:cNvSpPr>
+            <a:spLocks noGrp="1"/>
+          </p:cNvSpPr>
+          <p:nvPr>
+            <p:ph type="sldNum" idx="5" sz="quarter"/>
+          </p:nvPr>
+        </p:nvSpPr>
+        <p:spPr/>
+      </p:sp>
+    </p:spTree>
+  </p:cSld>
+  <p:clrMapOvr>
+    <a:masterClrMapping/>
+  </p:clrMapOvr>
+</p:notes>
+</file>
+
+<file path=ppt/notesSlides/notesSlide38.xml><?xml version="1.0" encoding="utf-8"?>
+<p:notes xmlns:a="http://schemas.openxmlformats.org/drawingml/2006/main" xmlns:p="http://schemas.openxmlformats.org/presentationml/2006/main" xmlns:r="http://schemas.openxmlformats.org/officeDocument/2006/relationships">
+  <p:cSld>
+    <p:spTree>
+      <p:nvGrpSpPr>
+        <p:cNvPr id="1" name=""/>
+        <p:cNvGrpSpPr/>
+        <p:nvPr/>
+      </p:nvGrpSpPr>
+      <p:grpSpPr>
+        <a:xfrm>
+          <a:off x="0" y="0"/>
+          <a:ext cx="0" cy="0"/>
+          <a:chOff x="0" y="0"/>
+          <a:chExt cx="0" cy="0"/>
+        </a:xfrm>
+      </p:grpSpPr>
+      <p:sp>
+        <p:nvSpPr>
+          <p:cNvPr id="2" name="Slide Image Placeholder 1"/>
+          <p:cNvSpPr>
+            <a:spLocks noGrp="1"/>
+          </p:cNvSpPr>
+          <p:nvPr>
+            <p:ph type="sldImg" idx="2"/>
+          </p:nvPr>
+        </p:nvSpPr>
+        <p:spPr/>
+      </p:sp>
+      <p:sp>
+        <p:nvSpPr>
+          <p:cNvPr id="3" name="Notes Placeholder 2"/>
+          <p:cNvSpPr>
+            <a:spLocks noGrp="1"/>
+          </p:cNvSpPr>
+          <p:nvPr>
+            <p:ph type="body" idx="3" sz="quarter"/>
+          </p:nvPr>
+        </p:nvSpPr>
+        <p:spPr/>
+        <p:txBody>
+          <a:bodyPr/>
+          <a:lstStyle/>
+          <a:p>
+            <a:r>
+              <a:t>Recap.</a:t>
+            </a:r>
+          </a:p>
+        </p:txBody>
+      </p:sp>
+      <p:sp>
+        <p:nvSpPr>
+          <p:cNvPr id="4" name="Slide Number Placeholder 3"/>
+          <p:cNvSpPr>
+            <a:spLocks noGrp="1"/>
+          </p:cNvSpPr>
+          <p:nvPr>
+            <p:ph type="sldNum" idx="5" sz="quarter"/>
+          </p:nvPr>
+        </p:nvSpPr>
+        <p:spPr/>
+      </p:sp>
+    </p:spTree>
+  </p:cSld>
+  <p:clrMapOvr>
+    <a:masterClrMapping/>
+  </p:clrMapOvr>
+</p:notes>
+</file>
+
+<file path=ppt/notesSlides/notesSlide39.xml><?xml version="1.0" encoding="utf-8"?>
+<p:notes xmlns:a="http://schemas.openxmlformats.org/drawingml/2006/main" xmlns:p="http://schemas.openxmlformats.org/presentationml/2006/main" xmlns:r="http://schemas.openxmlformats.org/officeDocument/2006/relationships">
+  <p:cSld>
+    <p:spTree>
+      <p:nvGrpSpPr>
+        <p:cNvPr id="1" name=""/>
+        <p:cNvGrpSpPr/>
+        <p:nvPr/>
+      </p:nvGrpSpPr>
+      <p:grpSpPr>
+        <a:xfrm>
+          <a:off x="0" y="0"/>
+          <a:ext cx="0" cy="0"/>
+          <a:chOff x="0" y="0"/>
+          <a:chExt cx="0" cy="0"/>
+        </a:xfrm>
+      </p:grpSpPr>
+      <p:sp>
+        <p:nvSpPr>
+          <p:cNvPr id="2" name="Slide Image Placeholder 1"/>
+          <p:cNvSpPr>
+            <a:spLocks noGrp="1"/>
+          </p:cNvSpPr>
+          <p:nvPr>
+            <p:ph type="sldImg" idx="2"/>
+          </p:nvPr>
+        </p:nvSpPr>
+        <p:spPr/>
+      </p:sp>
+      <p:sp>
+        <p:nvSpPr>
+          <p:cNvPr id="3" name="Notes Placeholder 2"/>
+          <p:cNvSpPr>
+            <a:spLocks noGrp="1"/>
+          </p:cNvSpPr>
+          <p:nvPr>
+            <p:ph type="body" idx="3" sz="quarter"/>
+          </p:nvPr>
+        </p:nvSpPr>
+        <p:spPr/>
+        <p:txBody>
+          <a:bodyPr/>
+          <a:lstStyle/>
+          <a:p>
+            <a:r>
+              <a:t>Closing frame.</a:t>
+            </a:r>
+          </a:p>
+        </p:txBody>
+      </p:sp>
+      <p:sp>
+        <p:nvSpPr>
+          <p:cNvPr id="4" name="Slide Number Placeholder 3"/>
+          <p:cNvSpPr>
+            <a:spLocks noGrp="1"/>
+          </p:cNvSpPr>
+          <p:nvPr>
+            <p:ph type="sldNum" idx="5" sz="quarter"/>
+          </p:nvPr>
+        </p:nvSpPr>
+        <p:spPr/>
+      </p:sp>
+    </p:spTree>
+  </p:cSld>
+  <p:clrMapOvr>
+    <a:masterClrMapping/>
+  </p:clrMapOvr>
+</p:notes>
+</file>
+
 <file path=ppt/notesSlides/notesSlide4.xml><?xml version="1.0" encoding="utf-8"?>
 <p:notes xmlns:a="http://schemas.openxmlformats.org/drawingml/2006/main" xmlns:p="http://schemas.openxmlformats.org/presentationml/2006/main" xmlns:r="http://schemas.openxmlformats.org/officeDocument/2006/relationships">
   <p:cSld>
@@ -1644,6 +2853,146 @@
           <a:p>
             <a:r>
               <a:t>Section 1.</a:t>
+            </a:r>
+          </a:p>
+        </p:txBody>
+      </p:sp>
+      <p:sp>
+        <p:nvSpPr>
+          <p:cNvPr id="4" name="Slide Number Placeholder 3"/>
+          <p:cNvSpPr>
+            <a:spLocks noGrp="1"/>
+          </p:cNvSpPr>
+          <p:nvPr>
+            <p:ph type="sldNum" idx="5" sz="quarter"/>
+          </p:nvPr>
+        </p:nvSpPr>
+        <p:spPr/>
+      </p:sp>
+    </p:spTree>
+  </p:cSld>
+  <p:clrMapOvr>
+    <a:masterClrMapping/>
+  </p:clrMapOvr>
+</p:notes>
+</file>
+
+<file path=ppt/notesSlides/notesSlide40.xml><?xml version="1.0" encoding="utf-8"?>
+<p:notes xmlns:a="http://schemas.openxmlformats.org/drawingml/2006/main" xmlns:p="http://schemas.openxmlformats.org/presentationml/2006/main" xmlns:r="http://schemas.openxmlformats.org/officeDocument/2006/relationships">
+  <p:cSld>
+    <p:spTree>
+      <p:nvGrpSpPr>
+        <p:cNvPr id="1" name=""/>
+        <p:cNvGrpSpPr/>
+        <p:nvPr/>
+      </p:nvGrpSpPr>
+      <p:grpSpPr>
+        <a:xfrm>
+          <a:off x="0" y="0"/>
+          <a:ext cx="0" cy="0"/>
+          <a:chOff x="0" y="0"/>
+          <a:chExt cx="0" cy="0"/>
+        </a:xfrm>
+      </p:grpSpPr>
+      <p:sp>
+        <p:nvSpPr>
+          <p:cNvPr id="2" name="Slide Image Placeholder 1"/>
+          <p:cNvSpPr>
+            <a:spLocks noGrp="1"/>
+          </p:cNvSpPr>
+          <p:nvPr>
+            <p:ph type="sldImg" idx="2"/>
+          </p:nvPr>
+        </p:nvSpPr>
+        <p:spPr/>
+      </p:sp>
+      <p:sp>
+        <p:nvSpPr>
+          <p:cNvPr id="3" name="Notes Placeholder 2"/>
+          <p:cNvSpPr>
+            <a:spLocks noGrp="1"/>
+          </p:cNvSpPr>
+          <p:nvPr>
+            <p:ph type="body" idx="3" sz="quarter"/>
+          </p:nvPr>
+        </p:nvSpPr>
+        <p:spPr/>
+        <p:txBody>
+          <a:bodyPr/>
+          <a:lstStyle/>
+          <a:p>
+            <a:r>
+              <a:t>Async-ready.</a:t>
+            </a:r>
+          </a:p>
+        </p:txBody>
+      </p:sp>
+      <p:sp>
+        <p:nvSpPr>
+          <p:cNvPr id="4" name="Slide Number Placeholder 3"/>
+          <p:cNvSpPr>
+            <a:spLocks noGrp="1"/>
+          </p:cNvSpPr>
+          <p:nvPr>
+            <p:ph type="sldNum" idx="5" sz="quarter"/>
+          </p:nvPr>
+        </p:nvSpPr>
+        <p:spPr/>
+      </p:sp>
+    </p:spTree>
+  </p:cSld>
+  <p:clrMapOvr>
+    <a:masterClrMapping/>
+  </p:clrMapOvr>
+</p:notes>
+</file>
+
+<file path=ppt/notesSlides/notesSlide41.xml><?xml version="1.0" encoding="utf-8"?>
+<p:notes xmlns:a="http://schemas.openxmlformats.org/drawingml/2006/main" xmlns:p="http://schemas.openxmlformats.org/presentationml/2006/main" xmlns:r="http://schemas.openxmlformats.org/officeDocument/2006/relationships">
+  <p:cSld>
+    <p:spTree>
+      <p:nvGrpSpPr>
+        <p:cNvPr id="1" name=""/>
+        <p:cNvGrpSpPr/>
+        <p:nvPr/>
+      </p:nvGrpSpPr>
+      <p:grpSpPr>
+        <a:xfrm>
+          <a:off x="0" y="0"/>
+          <a:ext cx="0" cy="0"/>
+          <a:chOff x="0" y="0"/>
+          <a:chExt cx="0" cy="0"/>
+        </a:xfrm>
+      </p:grpSpPr>
+      <p:sp>
+        <p:nvSpPr>
+          <p:cNvPr id="2" name="Slide Image Placeholder 1"/>
+          <p:cNvSpPr>
+            <a:spLocks noGrp="1"/>
+          </p:cNvSpPr>
+          <p:nvPr>
+            <p:ph type="sldImg" idx="2"/>
+          </p:nvPr>
+        </p:nvSpPr>
+        <p:spPr/>
+      </p:sp>
+      <p:sp>
+        <p:nvSpPr>
+          <p:cNvPr id="3" name="Notes Placeholder 2"/>
+          <p:cNvSpPr>
+            <a:spLocks noGrp="1"/>
+          </p:cNvSpPr>
+          <p:nvPr>
+            <p:ph type="body" idx="3" sz="quarter"/>
+          </p:nvPr>
+        </p:nvSpPr>
+        <p:spPr/>
+        <p:txBody>
+          <a:bodyPr/>
+          <a:lstStyle/>
+          <a:p>
+            <a:r>
+              <a:t>Delivery-neutral closing.</a:t>
             </a:r>
           </a:p>
         </p:txBody>
@@ -8078,7 +9427,7 @@
     <p:bg>
       <p:bgPr>
         <a:solidFill>
-          <a:srgbClr val="FFFFFF"/>
+          <a:srgbClr val="0E4D33"/>
         </a:solidFill>
         <a:effectLst/>
       </p:bgPr>
@@ -8092,7 +9441,7 @@
       <p:grpSpPr/>
       <p:sp>
         <p:nvSpPr>
-          <p:cNvPr id="2" name="Title 1" descr="Slide title: Key takeaways"/>
+          <p:cNvPr id="2" name="Title 1" descr="Slide title: Memos and internal documents"/>
           <p:cNvSpPr>
             <a:spLocks noGrp="1"/>
           </p:cNvSpPr>
@@ -8102,8 +9451,8 @@
         </p:nvSpPr>
         <p:spPr>
           <a:xfrm>
-            <a:off x="502920" y="411480"/>
-            <a:ext cx="11155680" cy="914400"/>
+            <a:off x="822960" y="2834640"/>
+            <a:ext cx="10515600" cy="914400"/>
           </a:xfrm>
         </p:spPr>
         <p:txBody>
@@ -8112,149 +9461,27 @@
           <a:p>
             <a:pPr algn="l"/>
             <a:r>
-              <a:rPr sz="3200" b="1">
-                <a:solidFill>
-                  <a:srgbClr val="0E4D33"/>
+              <a:rPr sz="4000" b="1">
+                <a:solidFill>
+                  <a:srgbClr val="FFFFFF"/>
                 </a:solidFill>
                 <a:latin typeface="Cambria"/>
               </a:rPr>
-              <a:t>Key takeaways</a:t>
-            </a:r>
-          </a:p>
-        </p:txBody>
-      </p:sp>
-      <p:sp>
-        <p:nvSpPr>
-          <p:cNvPr id="3" name="TextBox 2" descr="Footer: BADM 225 · Chapter 5"/>
+              <a:t>Memos and internal documents</a:t>
+            </a:r>
+          </a:p>
+        </p:txBody>
+      </p:sp>
+      <p:sp>
+        <p:nvSpPr>
+          <p:cNvPr id="3" name="TextBox 2" descr="Section number 05"/>
           <p:cNvSpPr txBox="1"/>
           <p:nvPr/>
         </p:nvSpPr>
         <p:spPr>
           <a:xfrm>
-            <a:off x="502920" y="6446520"/>
-            <a:ext cx="5486400" cy="320040"/>
-          </a:xfrm>
-          <a:prstGeom prst="rect">
-            <a:avLst/>
-          </a:prstGeom>
-          <a:noFill/>
-        </p:spPr>
-        <p:txBody>
-          <a:bodyPr wrap="none">
-            <a:spAutoFit/>
-          </a:bodyPr>
-          <a:lstStyle/>
-          <a:p>
-            <a:r>
-              <a:rPr sz="1000">
-                <a:solidFill>
-                  <a:srgbClr val="5E6B64"/>
-                </a:solidFill>
-                <a:latin typeface="Calibri"/>
-              </a:rPr>
-              <a:t>BADM 225 · Chapter 5</a:t>
-            </a:r>
-          </a:p>
-        </p:txBody>
-      </p:sp>
-      <p:sp>
-        <p:nvSpPr>
-          <p:cNvPr id="4" name="TextBox 3" descr="Slide number 19"/>
-          <p:cNvSpPr txBox="1"/>
-          <p:nvPr/>
-        </p:nvSpPr>
-        <p:spPr>
-          <a:xfrm>
-            <a:off x="11247120" y="6446520"/>
-            <a:ext cx="640080" cy="320040"/>
-          </a:xfrm>
-          <a:prstGeom prst="rect">
-            <a:avLst/>
-          </a:prstGeom>
-          <a:noFill/>
-        </p:spPr>
-        <p:txBody>
-          <a:bodyPr wrap="none">
-            <a:spAutoFit/>
-          </a:bodyPr>
-          <a:lstStyle/>
-          <a:p>
-            <a:pPr algn="r"/>
-            <a:r>
-              <a:rPr sz="1000">
-                <a:solidFill>
-                  <a:srgbClr val="5E6B64"/>
-                </a:solidFill>
-                <a:latin typeface="Calibri"/>
-              </a:rPr>
-              <a:t>19</a:t>
-            </a:r>
-          </a:p>
-        </p:txBody>
-      </p:sp>
-      <p:sp>
-        <p:nvSpPr>
-          <p:cNvPr id="5" name="Oval 4" descr="Checkmark"/>
-          <p:cNvSpPr/>
-          <p:nvPr/>
-        </p:nvSpPr>
-        <p:spPr>
-          <a:xfrm>
-            <a:off x="640080" y="1572768"/>
-            <a:ext cx="420624" cy="420624"/>
-          </a:xfrm>
-          <a:prstGeom prst="ellipse">
-            <a:avLst/>
-          </a:prstGeom>
-          <a:solidFill>
-            <a:srgbClr val="0E4D33"/>
-          </a:solidFill>
-          <a:ln>
-            <a:noFill/>
-          </a:ln>
-          <a:effectLst/>
-        </p:spPr>
-        <p:style>
-          <a:lnRef idx="1">
-            <a:schemeClr val="accent1"/>
-          </a:lnRef>
-          <a:fillRef idx="3">
-            <a:schemeClr val="accent1"/>
-          </a:fillRef>
-          <a:effectRef idx="2">
-            <a:schemeClr val="accent1"/>
-          </a:effectRef>
-          <a:fontRef idx="minor">
-            <a:schemeClr val="lt1"/>
-          </a:fontRef>
-        </p:style>
-        <p:txBody>
-          <a:bodyPr rtlCol="0" anchor="ctr" lIns="0" rIns="0" tIns="0" bIns="0"/>
-          <a:lstStyle/>
-          <a:p>
-            <a:pPr algn="ctr"/>
-            <a:r>
-              <a:rPr sz="1100" b="1">
-                <a:solidFill>
-                  <a:srgbClr val="FFFFFF"/>
-                </a:solidFill>
-                <a:latin typeface="Calibri"/>
-              </a:rPr>
-              <a:t>✓</a:t>
-            </a:r>
-          </a:p>
-        </p:txBody>
-      </p:sp>
-      <p:sp>
-        <p:nvSpPr>
-          <p:cNvPr id="6" name="TextBox 5" descr="Takeaway 1"/>
-          <p:cNvSpPr txBox="1"/>
-          <p:nvPr/>
-        </p:nvSpPr>
-        <p:spPr>
-          <a:xfrm>
-            <a:off x="1325880" y="1554480"/>
-            <a:ext cx="10332720" cy="640080"/>
+            <a:off x="822960" y="1188720"/>
+            <a:ext cx="2743200" cy="1463040"/>
           </a:xfrm>
           <a:prstGeom prst="rect">
             <a:avLst/>
@@ -8273,80 +9500,27 @@
               </a:spcAft>
             </a:pPr>
             <a:r>
-              <a:rPr sz="1550" b="0" i="0">
-                <a:solidFill>
-                  <a:srgbClr val="212A26"/>
-                </a:solidFill>
-                <a:latin typeface="Calibri"/>
-              </a:rPr>
-              <a:t>The subject line is the message's job; sentence one delivers it; the dated ask ends it.</a:t>
-            </a:r>
-          </a:p>
-        </p:txBody>
-      </p:sp>
-      <p:sp>
-        <p:nvSpPr>
-          <p:cNvPr id="7" name="Oval 6" descr="Checkmark"/>
-          <p:cNvSpPr/>
-          <p:nvPr/>
-        </p:nvSpPr>
-        <p:spPr>
-          <a:xfrm>
-            <a:off x="640080" y="2212848"/>
-            <a:ext cx="420624" cy="420624"/>
-          </a:xfrm>
-          <a:prstGeom prst="ellipse">
-            <a:avLst/>
-          </a:prstGeom>
-          <a:solidFill>
-            <a:srgbClr val="0E4D33"/>
-          </a:solidFill>
-          <a:ln>
-            <a:noFill/>
-          </a:ln>
-          <a:effectLst/>
-        </p:spPr>
-        <p:style>
-          <a:lnRef idx="1">
-            <a:schemeClr val="accent1"/>
-          </a:lnRef>
-          <a:fillRef idx="3">
-            <a:schemeClr val="accent1"/>
-          </a:fillRef>
-          <a:effectRef idx="2">
-            <a:schemeClr val="accent1"/>
-          </a:effectRef>
-          <a:fontRef idx="minor">
-            <a:schemeClr val="lt1"/>
-          </a:fontRef>
-        </p:style>
-        <p:txBody>
-          <a:bodyPr rtlCol="0" anchor="ctr" lIns="0" rIns="0" tIns="0" bIns="0"/>
-          <a:lstStyle/>
-          <a:p>
-            <a:pPr algn="ctr"/>
-            <a:r>
-              <a:rPr sz="1100" b="1">
-                <a:solidFill>
-                  <a:srgbClr val="FFFFFF"/>
-                </a:solidFill>
-                <a:latin typeface="Calibri"/>
-              </a:rPr>
-              <a:t>✓</a:t>
-            </a:r>
-          </a:p>
-        </p:txBody>
-      </p:sp>
-      <p:sp>
-        <p:nvSpPr>
-          <p:cNvPr id="8" name="TextBox 7" descr="Takeaway 2"/>
+              <a:rPr sz="8000" b="1" i="0">
+                <a:solidFill>
+                  <a:srgbClr val="C9931A"/>
+                </a:solidFill>
+                <a:latin typeface="Cambria"/>
+              </a:rPr>
+              <a:t>05</a:t>
+            </a:r>
+          </a:p>
+        </p:txBody>
+      </p:sp>
+      <p:sp>
+        <p:nvSpPr>
+          <p:cNvPr id="4" name="TextBox 3" descr="Section note"/>
           <p:cNvSpPr txBox="1"/>
           <p:nvPr/>
         </p:nvSpPr>
         <p:spPr>
           <a:xfrm>
-            <a:off x="1325880" y="2194560"/>
-            <a:ext cx="10332720" cy="640080"/>
+            <a:off x="822960" y="4023360"/>
+            <a:ext cx="9601200" cy="1097280"/>
           </a:xfrm>
           <a:prstGeom prst="rect">
             <a:avLst/>
@@ -8365,80 +9539,27 @@
               </a:spcAft>
             </a:pPr>
             <a:r>
-              <a:rPr sz="1550" b="0" i="0">
-                <a:solidFill>
-                  <a:srgbClr val="212A26"/>
-                </a:solidFill>
-                <a:latin typeface="Calibri"/>
-              </a:rPr>
-              <a:t>One screen for routine mail — longer content becomes an attachment with a cover note.</a:t>
-            </a:r>
-          </a:p>
-        </p:txBody>
-      </p:sp>
-      <p:sp>
-        <p:nvSpPr>
-          <p:cNvPr id="9" name="Oval 8" descr="Checkmark"/>
-          <p:cNvSpPr/>
-          <p:nvPr/>
-        </p:nvSpPr>
-        <p:spPr>
-          <a:xfrm>
-            <a:off x="640080" y="2852928"/>
-            <a:ext cx="420624" cy="420624"/>
-          </a:xfrm>
-          <a:prstGeom prst="ellipse">
-            <a:avLst/>
-          </a:prstGeom>
-          <a:solidFill>
-            <a:srgbClr val="0E4D33"/>
-          </a:solidFill>
-          <a:ln>
-            <a:noFill/>
-          </a:ln>
-          <a:effectLst/>
-        </p:spPr>
-        <p:style>
-          <a:lnRef idx="1">
-            <a:schemeClr val="accent1"/>
-          </a:lnRef>
-          <a:fillRef idx="3">
-            <a:schemeClr val="accent1"/>
-          </a:fillRef>
-          <a:effectRef idx="2">
-            <a:schemeClr val="accent1"/>
-          </a:effectRef>
-          <a:fontRef idx="minor">
-            <a:schemeClr val="lt1"/>
-          </a:fontRef>
-        </p:style>
-        <p:txBody>
-          <a:bodyPr rtlCol="0" anchor="ctr" lIns="0" rIns="0" tIns="0" bIns="0"/>
-          <a:lstStyle/>
-          <a:p>
-            <a:pPr algn="ctr"/>
-            <a:r>
-              <a:rPr sz="1100" b="1">
-                <a:solidFill>
-                  <a:srgbClr val="FFFFFF"/>
-                </a:solidFill>
-                <a:latin typeface="Calibri"/>
-              </a:rPr>
-              <a:t>✓</a:t>
-            </a:r>
-          </a:p>
-        </p:txBody>
-      </p:sp>
-      <p:sp>
-        <p:nvSpPr>
-          <p:cNvPr id="10" name="TextBox 9" descr="Takeaway 3"/>
+              <a:rPr sz="1700" b="0" i="0">
+                <a:solidFill>
+                  <a:srgbClr val="EAF1EB"/>
+                </a:solidFill>
+                <a:latin typeface="Calibri"/>
+              </a:rPr>
+              <a:t>Email's older sibling still has a job — knowing which job is the skill.</a:t>
+            </a:r>
+          </a:p>
+        </p:txBody>
+      </p:sp>
+      <p:sp>
+        <p:nvSpPr>
+          <p:cNvPr id="5" name="TextBox 4" descr="Footer: BADM 225 · Chapter 5"/>
           <p:cNvSpPr txBox="1"/>
           <p:nvPr/>
         </p:nvSpPr>
         <p:spPr>
           <a:xfrm>
-            <a:off x="1325880" y="2834640"/>
-            <a:ext cx="10332720" cy="640080"/>
+            <a:off x="502920" y="6446520"/>
+            <a:ext cx="5486400" cy="320040"/>
           </a:xfrm>
           <a:prstGeom prst="rect">
             <a:avLst/>
@@ -8446,91 +9567,33 @@
           <a:noFill/>
         </p:spPr>
         <p:txBody>
-          <a:bodyPr wrap="square">
+          <a:bodyPr wrap="none">
             <a:spAutoFit/>
           </a:bodyPr>
           <a:lstStyle/>
           <a:p>
-            <a:pPr algn="l">
-              <a:spcAft>
-                <a:spcPts val="800"/>
-              </a:spcAft>
-            </a:pPr>
-            <a:r>
-              <a:rPr sz="1550" b="0" i="0">
-                <a:solidFill>
-                  <a:srgbClr val="212A26"/>
-                </a:solidFill>
-                <a:latin typeface="Calibri"/>
-              </a:rPr>
-              <a:t>Reply-all only when every name needs every word; To acts, CC knows; new topic, new thread.</a:t>
-            </a:r>
-          </a:p>
-        </p:txBody>
-      </p:sp>
-      <p:sp>
-        <p:nvSpPr>
-          <p:cNvPr id="11" name="Oval 10" descr="Checkmark"/>
-          <p:cNvSpPr/>
-          <p:nvPr/>
-        </p:nvSpPr>
-        <p:spPr>
-          <a:xfrm>
-            <a:off x="640080" y="3493008"/>
-            <a:ext cx="420624" cy="420624"/>
-          </a:xfrm>
-          <a:prstGeom prst="ellipse">
-            <a:avLst/>
-          </a:prstGeom>
-          <a:solidFill>
-            <a:srgbClr val="0E4D33"/>
-          </a:solidFill>
-          <a:ln>
-            <a:noFill/>
-          </a:ln>
-          <a:effectLst/>
-        </p:spPr>
-        <p:style>
-          <a:lnRef idx="1">
-            <a:schemeClr val="accent1"/>
-          </a:lnRef>
-          <a:fillRef idx="3">
-            <a:schemeClr val="accent1"/>
-          </a:fillRef>
-          <a:effectRef idx="2">
-            <a:schemeClr val="accent1"/>
-          </a:effectRef>
-          <a:fontRef idx="minor">
-            <a:schemeClr val="lt1"/>
-          </a:fontRef>
-        </p:style>
-        <p:txBody>
-          <a:bodyPr rtlCol="0" anchor="ctr" lIns="0" rIns="0" tIns="0" bIns="0"/>
-          <a:lstStyle/>
-          <a:p>
-            <a:pPr algn="ctr"/>
-            <a:r>
-              <a:rPr sz="1100" b="1">
-                <a:solidFill>
-                  <a:srgbClr val="FFFFFF"/>
-                </a:solidFill>
-                <a:latin typeface="Calibri"/>
-              </a:rPr>
-              <a:t>✓</a:t>
-            </a:r>
-          </a:p>
-        </p:txBody>
-      </p:sp>
-      <p:sp>
-        <p:nvSpPr>
-          <p:cNvPr id="12" name="TextBox 11" descr="Takeaway 4"/>
+            <a:r>
+              <a:rPr sz="1000">
+                <a:solidFill>
+                  <a:srgbClr val="5E6B64"/>
+                </a:solidFill>
+                <a:latin typeface="Calibri"/>
+              </a:rPr>
+              <a:t>BADM 225 · Chapter 5</a:t>
+            </a:r>
+          </a:p>
+        </p:txBody>
+      </p:sp>
+      <p:sp>
+        <p:nvSpPr>
+          <p:cNvPr id="6" name="TextBox 5" descr="Slide number 19"/>
           <p:cNvSpPr txBox="1"/>
           <p:nvPr/>
         </p:nvSpPr>
         <p:spPr>
           <a:xfrm>
-            <a:off x="1325880" y="3474720"/>
-            <a:ext cx="10332720" cy="640080"/>
+            <a:off x="11247120" y="6446520"/>
+            <a:ext cx="640080" cy="320040"/>
           </a:xfrm>
           <a:prstGeom prst="rect">
             <a:avLst/>
@@ -8538,265 +9601,20 @@
           <a:noFill/>
         </p:spPr>
         <p:txBody>
-          <a:bodyPr wrap="square">
+          <a:bodyPr wrap="none">
             <a:spAutoFit/>
           </a:bodyPr>
           <a:lstStyle/>
           <a:p>
-            <a:pPr algn="l">
-              <a:spcAft>
-                <a:spcPts val="800"/>
-              </a:spcAft>
-            </a:pPr>
-            <a:r>
-              <a:rPr sz="1550" b="0" i="0">
-                <a:solidFill>
-                  <a:srgbClr val="212A26"/>
-                </a:solidFill>
-                <a:latin typeface="Calibri"/>
-              </a:rPr>
-              <a:t>Chat coordinates, email records; decisions graduate. Texts are invitation-only logistics.</a:t>
-            </a:r>
-          </a:p>
-        </p:txBody>
-      </p:sp>
-      <p:sp>
-        <p:nvSpPr>
-          <p:cNvPr id="13" name="Oval 12" descr="Checkmark"/>
-          <p:cNvSpPr/>
-          <p:nvPr/>
-        </p:nvSpPr>
-        <p:spPr>
-          <a:xfrm>
-            <a:off x="640080" y="4133088"/>
-            <a:ext cx="420624" cy="420624"/>
-          </a:xfrm>
-          <a:prstGeom prst="ellipse">
-            <a:avLst/>
-          </a:prstGeom>
-          <a:solidFill>
-            <a:srgbClr val="0E4D33"/>
-          </a:solidFill>
-          <a:ln>
-            <a:noFill/>
-          </a:ln>
-          <a:effectLst/>
-        </p:spPr>
-        <p:style>
-          <a:lnRef idx="1">
-            <a:schemeClr val="accent1"/>
-          </a:lnRef>
-          <a:fillRef idx="3">
-            <a:schemeClr val="accent1"/>
-          </a:fillRef>
-          <a:effectRef idx="2">
-            <a:schemeClr val="accent1"/>
-          </a:effectRef>
-          <a:fontRef idx="minor">
-            <a:schemeClr val="lt1"/>
-          </a:fontRef>
-        </p:style>
-        <p:txBody>
-          <a:bodyPr rtlCol="0" anchor="ctr" lIns="0" rIns="0" tIns="0" bIns="0"/>
-          <a:lstStyle/>
-          <a:p>
-            <a:pPr algn="ctr"/>
-            <a:r>
-              <a:rPr sz="1100" b="1">
-                <a:solidFill>
-                  <a:srgbClr val="FFFFFF"/>
-                </a:solidFill>
-                <a:latin typeface="Calibri"/>
-              </a:rPr>
-              <a:t>✓</a:t>
-            </a:r>
-          </a:p>
-        </p:txBody>
-      </p:sp>
-      <p:sp>
-        <p:nvSpPr>
-          <p:cNvPr id="14" name="TextBox 13" descr="Takeaway 5"/>
-          <p:cNvSpPr txBox="1"/>
-          <p:nvPr/>
-        </p:nvSpPr>
-        <p:spPr>
-          <a:xfrm>
-            <a:off x="1325880" y="4114800"/>
-            <a:ext cx="10332720" cy="640080"/>
-          </a:xfrm>
-          <a:prstGeom prst="rect">
-            <a:avLst/>
-          </a:prstGeom>
-          <a:noFill/>
-        </p:spPr>
-        <p:txBody>
-          <a:bodyPr wrap="square">
-            <a:spAutoFit/>
-          </a:bodyPr>
-          <a:lstStyle/>
-          <a:p>
-            <a:pPr algn="l">
-              <a:spcAft>
-                <a:spcPts val="800"/>
-              </a:spcAft>
-            </a:pPr>
-            <a:r>
-              <a:rPr sz="1550" b="0" i="0">
-                <a:solidFill>
-                  <a:srgbClr val="212A26"/>
-                </a:solidFill>
-                <a:latin typeface="Calibri"/>
-              </a:rPr>
-              <a:t>Everything on workplace systems is logged and discoverable — type like it.</a:t>
-            </a:r>
-          </a:p>
-        </p:txBody>
-      </p:sp>
-      <p:sp>
-        <p:nvSpPr>
-          <p:cNvPr id="15" name="Oval 14" descr="Checkmark"/>
-          <p:cNvSpPr/>
-          <p:nvPr/>
-        </p:nvSpPr>
-        <p:spPr>
-          <a:xfrm>
-            <a:off x="640080" y="4773168"/>
-            <a:ext cx="420624" cy="420624"/>
-          </a:xfrm>
-          <a:prstGeom prst="ellipse">
-            <a:avLst/>
-          </a:prstGeom>
-          <a:solidFill>
-            <a:srgbClr val="0E4D33"/>
-          </a:solidFill>
-          <a:ln>
-            <a:noFill/>
-          </a:ln>
-          <a:effectLst/>
-        </p:spPr>
-        <p:style>
-          <a:lnRef idx="1">
-            <a:schemeClr val="accent1"/>
-          </a:lnRef>
-          <a:fillRef idx="3">
-            <a:schemeClr val="accent1"/>
-          </a:fillRef>
-          <a:effectRef idx="2">
-            <a:schemeClr val="accent1"/>
-          </a:effectRef>
-          <a:fontRef idx="minor">
-            <a:schemeClr val="lt1"/>
-          </a:fontRef>
-        </p:style>
-        <p:txBody>
-          <a:bodyPr rtlCol="0" anchor="ctr" lIns="0" rIns="0" tIns="0" bIns="0"/>
-          <a:lstStyle/>
-          <a:p>
-            <a:pPr algn="ctr"/>
-            <a:r>
-              <a:rPr sz="1100" b="1">
-                <a:solidFill>
-                  <a:srgbClr val="FFFFFF"/>
-                </a:solidFill>
-                <a:latin typeface="Calibri"/>
-              </a:rPr>
-              <a:t>✓</a:t>
-            </a:r>
-          </a:p>
-        </p:txBody>
-      </p:sp>
-      <p:sp>
-        <p:nvSpPr>
-          <p:cNvPr id="16" name="TextBox 15" descr="Takeaway 6"/>
-          <p:cNvSpPr txBox="1"/>
-          <p:nvPr/>
-        </p:nvSpPr>
-        <p:spPr>
-          <a:xfrm>
-            <a:off x="1325880" y="4754880"/>
-            <a:ext cx="10332720" cy="640080"/>
-          </a:xfrm>
-          <a:prstGeom prst="rect">
-            <a:avLst/>
-          </a:prstGeom>
-          <a:noFill/>
-        </p:spPr>
-        <p:txBody>
-          <a:bodyPr wrap="square">
-            <a:spAutoFit/>
-          </a:bodyPr>
-          <a:lstStyle/>
-          <a:p>
-            <a:pPr algn="l">
-              <a:spcAft>
-                <a:spcPts val="800"/>
-              </a:spcAft>
-            </a:pPr>
-            <a:r>
-              <a:rPr sz="1550" b="0" i="0">
-                <a:solidFill>
-                  <a:srgbClr val="212A26"/>
-                </a:solidFill>
-                <a:latin typeface="Calibri"/>
-              </a:rPr>
-              <a:t>Curate the public layer; it interviews before you do. And guard your attention like capital.</a:t>
-            </a:r>
-          </a:p>
-        </p:txBody>
-      </p:sp>
-      <p:sp>
-        <p:nvSpPr>
-          <p:cNvPr id="17" name="Rounded Rectangle 16" descr="Practice reminder"/>
-          <p:cNvSpPr/>
-          <p:nvPr/>
-        </p:nvSpPr>
-        <p:spPr>
-          <a:xfrm>
-            <a:off x="548640" y="5468112"/>
-            <a:ext cx="10424160" cy="685800"/>
-          </a:xfrm>
-          <a:prstGeom prst="roundRect">
-            <a:avLst/>
-          </a:prstGeom>
-          <a:solidFill>
-            <a:srgbClr val="0E4D33"/>
-          </a:solidFill>
-          <a:ln>
-            <a:noFill/>
-          </a:ln>
-          <a:effectLst/>
-        </p:spPr>
-        <p:style>
-          <a:lnRef idx="1">
-            <a:schemeClr val="accent1"/>
-          </a:lnRef>
-          <a:fillRef idx="3">
-            <a:schemeClr val="accent1"/>
-          </a:fillRef>
-          <a:effectRef idx="2">
-            <a:schemeClr val="accent1"/>
-          </a:effectRef>
-          <a:fontRef idx="minor">
-            <a:schemeClr val="lt1"/>
-          </a:fontRef>
-        </p:style>
-        <p:txBody>
-          <a:bodyPr rtlCol="0" anchor="t" wrap="square" lIns="164592" rIns="164592" tIns="128016" bIns="109728"/>
-          <a:lstStyle/>
-          <a:p>
-            <a:pPr algn="l">
-              <a:spcAft>
-                <a:spcPts val="0"/>
-              </a:spcAft>
-            </a:pPr>
-            <a:r>
-              <a:rPr sz="1450" b="1" i="0">
-                <a:solidFill>
-                  <a:srgbClr val="FFFFFF"/>
-                </a:solidFill>
-                <a:latin typeface="Calibri"/>
-              </a:rPr>
-              <a:t>Practice now: course site → Chapter 5 → Practice, then the graded homework before the weekly deadline.</a:t>
+            <a:pPr algn="r"/>
+            <a:r>
+              <a:rPr sz="1000">
+                <a:solidFill>
+                  <a:srgbClr val="5E6B64"/>
+                </a:solidFill>
+                <a:latin typeface="Calibri"/>
+              </a:rPr>
+              <a:t>19</a:t>
             </a:r>
           </a:p>
         </p:txBody>
@@ -9136,7 +9954,7 @@
     <p:bg>
       <p:bgPr>
         <a:solidFill>
-          <a:srgbClr val="EAF1EB"/>
+          <a:srgbClr val="FFFFFF"/>
         </a:solidFill>
         <a:effectLst/>
       </p:bgPr>
@@ -9150,7 +9968,7 @@
       <p:grpSpPr/>
       <p:sp>
         <p:nvSpPr>
-          <p:cNvPr id="2" name="Title 1" descr="Slide title: Worth keeping"/>
+          <p:cNvPr id="2" name="Title 1" descr="Slide title: When a memo still beats an email"/>
           <p:cNvSpPr>
             <a:spLocks noGrp="1"/>
           </p:cNvSpPr>
@@ -9170,27 +9988,27 @@
           <a:p>
             <a:pPr algn="l"/>
             <a:r>
-              <a:rPr sz="3400" b="1">
+              <a:rPr sz="3200" b="1">
                 <a:solidFill>
                   <a:srgbClr val="0E4D33"/>
                 </a:solidFill>
                 <a:latin typeface="Cambria"/>
               </a:rPr>
-              <a:t>Worth keeping</a:t>
-            </a:r>
-          </a:p>
-        </p:txBody>
-      </p:sp>
-      <p:sp>
-        <p:nvSpPr>
-          <p:cNvPr id="3" name="TextBox 2" descr="Quotation"/>
+              <a:t>When a memo still beats an email</a:t>
+            </a:r>
+          </a:p>
+        </p:txBody>
+      </p:sp>
+      <p:sp>
+        <p:nvSpPr>
+          <p:cNvPr id="3" name="TextBox 2" descr="Footer: BADM 225 · Chapter 5"/>
           <p:cNvSpPr txBox="1"/>
           <p:nvPr/>
         </p:nvSpPr>
         <p:spPr>
           <a:xfrm>
-            <a:off x="1280160" y="2194560"/>
-            <a:ext cx="9601200" cy="2377440"/>
+            <a:off x="502920" y="6446520"/>
+            <a:ext cx="5486400" cy="320040"/>
           </a:xfrm>
           <a:prstGeom prst="rect">
             <a:avLst/>
@@ -9198,38 +10016,33 @@
           <a:noFill/>
         </p:spPr>
         <p:txBody>
-          <a:bodyPr wrap="square">
+          <a:bodyPr wrap="none">
             <a:spAutoFit/>
           </a:bodyPr>
           <a:lstStyle/>
           <a:p>
-            <a:pPr algn="l">
-              <a:spcAft>
-                <a:spcPts val="800"/>
-              </a:spcAft>
-            </a:pPr>
-            <a:r>
-              <a:rPr sz="2700" b="0" i="1">
-                <a:solidFill>
-                  <a:srgbClr val="212A26"/>
-                </a:solidFill>
-                <a:latin typeface="Cambria"/>
-              </a:rPr>
-              <a:t>“On digital channels, the publicity test is not a thought experiment. It is the terms of service.”</a:t>
-            </a:r>
-          </a:p>
-        </p:txBody>
-      </p:sp>
-      <p:sp>
-        <p:nvSpPr>
-          <p:cNvPr id="4" name="TextBox 3" descr="Attribution"/>
+            <a:r>
+              <a:rPr sz="1000">
+                <a:solidFill>
+                  <a:srgbClr val="5E6B64"/>
+                </a:solidFill>
+                <a:latin typeface="Calibri"/>
+              </a:rPr>
+              <a:t>BADM 225 · Chapter 5</a:t>
+            </a:r>
+          </a:p>
+        </p:txBody>
+      </p:sp>
+      <p:sp>
+        <p:nvSpPr>
+          <p:cNvPr id="4" name="TextBox 3" descr="Slide number 20"/>
           <p:cNvSpPr txBox="1"/>
           <p:nvPr/>
         </p:nvSpPr>
         <p:spPr>
           <a:xfrm>
-            <a:off x="1280160" y="4754880"/>
-            <a:ext cx="9601200" cy="548640"/>
+            <a:off x="11247120" y="6446520"/>
+            <a:ext cx="640080" cy="320040"/>
           </a:xfrm>
           <a:prstGeom prst="rect">
             <a:avLst/>
@@ -9237,38 +10050,34 @@
           <a:noFill/>
         </p:spPr>
         <p:txBody>
-          <a:bodyPr wrap="square">
+          <a:bodyPr wrap="none">
             <a:spAutoFit/>
           </a:bodyPr>
           <a:lstStyle/>
           <a:p>
-            <a:pPr algn="l">
-              <a:spcAft>
-                <a:spcPts val="800"/>
-              </a:spcAft>
-            </a:pPr>
-            <a:r>
-              <a:rPr sz="1600" b="0" i="0">
+            <a:pPr algn="r"/>
+            <a:r>
+              <a:rPr sz="1000">
                 <a:solidFill>
                   <a:srgbClr val="5E6B64"/>
                 </a:solidFill>
                 <a:latin typeface="Calibri"/>
               </a:rPr>
-              <a:t>— this chapter, compressed</a:t>
-            </a:r>
-          </a:p>
-        </p:txBody>
-      </p:sp>
-      <p:sp>
-        <p:nvSpPr>
-          <p:cNvPr id="5" name="TextBox 4" descr="Footer: BADM 225 · Chapter 5"/>
+              <a:t>20</a:t>
+            </a:r>
+          </a:p>
+        </p:txBody>
+      </p:sp>
+      <p:sp>
+        <p:nvSpPr>
+          <p:cNvPr id="5" name="TextBox 4" descr="Key points"/>
           <p:cNvSpPr txBox="1"/>
           <p:nvPr/>
         </p:nvSpPr>
         <p:spPr>
           <a:xfrm>
-            <a:off x="502920" y="6446520"/>
-            <a:ext cx="5486400" cy="320040"/>
+            <a:off x="548640" y="1554480"/>
+            <a:ext cx="11064240" cy="4663440"/>
           </a:xfrm>
           <a:prstGeom prst="rect">
             <a:avLst/>
@@ -9276,54 +10085,144 @@
           <a:noFill/>
         </p:spPr>
         <p:txBody>
-          <a:bodyPr wrap="none">
+          <a:bodyPr wrap="square">
             <a:spAutoFit/>
           </a:bodyPr>
           <a:lstStyle/>
           <a:p>
-            <a:r>
-              <a:rPr sz="1000">
-                <a:solidFill>
-                  <a:srgbClr val="5E6B64"/>
-                </a:solidFill>
-                <a:latin typeface="Calibri"/>
-              </a:rPr>
-              <a:t>BADM 225 · Chapter 5</a:t>
-            </a:r>
-          </a:p>
-        </p:txBody>
-      </p:sp>
-      <p:sp>
-        <p:nvSpPr>
-          <p:cNvPr id="6" name="TextBox 5" descr="Slide number 20"/>
-          <p:cNvSpPr txBox="1"/>
-          <p:nvPr/>
-        </p:nvSpPr>
-        <p:spPr>
-          <a:xfrm>
-            <a:off x="11247120" y="6446520"/>
-            <a:ext cx="640080" cy="320040"/>
-          </a:xfrm>
-          <a:prstGeom prst="rect">
-            <a:avLst/>
-          </a:prstGeom>
-          <a:noFill/>
-        </p:spPr>
-        <p:txBody>
-          <a:bodyPr wrap="none">
-            <a:spAutoFit/>
-          </a:bodyPr>
-          <a:lstStyle/>
-          <a:p>
-            <a:pPr algn="r"/>
-            <a:r>
-              <a:rPr sz="1000">
-                <a:solidFill>
-                  <a:srgbClr val="5E6B64"/>
-                </a:solidFill>
-                <a:latin typeface="Calibri"/>
-              </a:rPr>
-              <a:t>20</a:t>
+            <a:pPr algn="l">
+              <a:spcAft>
+                <a:spcPts val="1200"/>
+              </a:spcAft>
+            </a:pPr>
+            <a:r>
+              <a:rPr sz="1700">
+                <a:solidFill>
+                  <a:srgbClr val="8A6410"/>
+                </a:solidFill>
+                <a:latin typeface="Calibri"/>
+              </a:rPr>
+              <a:t>▪  </a:t>
+            </a:r>
+            <a:r>
+              <a:rPr sz="1700" b="1">
+                <a:solidFill>
+                  <a:srgbClr val="0E4D33"/>
+                </a:solidFill>
+                <a:latin typeface="Calibri"/>
+              </a:rPr>
+              <a:t>The content must outlive the inbox.  </a:t>
+            </a:r>
+            <a:r>
+              <a:rPr sz="1700" b="0" i="0">
+                <a:solidFill>
+                  <a:srgbClr val="212A26"/>
+                </a:solidFill>
+                <a:latin typeface="Calibri"/>
+              </a:rPr>
+              <a:t>Policies, procedures, and decisions of record get attached as memos — a document is filed; an email is buried.</a:t>
+            </a:r>
+          </a:p>
+          <a:p>
+            <a:pPr algn="l">
+              <a:spcAft>
+                <a:spcPts val="1200"/>
+              </a:spcAft>
+            </a:pPr>
+            <a:r>
+              <a:rPr sz="1700">
+                <a:solidFill>
+                  <a:srgbClr val="8A6410"/>
+                </a:solidFill>
+                <a:latin typeface="Calibri"/>
+              </a:rPr>
+              <a:t>▪  </a:t>
+            </a:r>
+            <a:r>
+              <a:rPr sz="1700" b="1">
+                <a:solidFill>
+                  <a:srgbClr val="0E4D33"/>
+                </a:solidFill>
+                <a:latin typeface="Calibri"/>
+              </a:rPr>
+              <a:t>The audience is 'everyone, indefinitely.'  </a:t>
+            </a:r>
+            <a:r>
+              <a:rPr sz="1700" b="0" i="0">
+                <a:solidFill>
+                  <a:srgbClr val="212A26"/>
+                </a:solidFill>
+                <a:latin typeface="Calibri"/>
+              </a:rPr>
+              <a:t>A memo posted to the intranet reaches the person hired next year; an email never will.</a:t>
+            </a:r>
+          </a:p>
+          <a:p>
+            <a:pPr algn="l">
+              <a:spcAft>
+                <a:spcPts val="1200"/>
+              </a:spcAft>
+            </a:pPr>
+            <a:r>
+              <a:rPr sz="1700">
+                <a:solidFill>
+                  <a:srgbClr val="8A6410"/>
+                </a:solidFill>
+                <a:latin typeface="Calibri"/>
+              </a:rPr>
+              <a:t>▪  </a:t>
+            </a:r>
+            <a:r>
+              <a:rPr sz="1700" b="1">
+                <a:solidFill>
+                  <a:srgbClr val="0E4D33"/>
+                </a:solidFill>
+                <a:latin typeface="Calibri"/>
+              </a:rPr>
+              <a:t>The formality is the message.  </a:t>
+            </a:r>
+            <a:r>
+              <a:rPr sz="1700" b="0" i="0">
+                <a:solidFill>
+                  <a:srgbClr val="212A26"/>
+                </a:solidFill>
+                <a:latin typeface="Calibri"/>
+              </a:rPr>
+              <a:t>A signed memo announcing a reorganization says 'this is official' in a way a chat ping cannot.</a:t>
+            </a:r>
+          </a:p>
+          <a:p>
+            <a:pPr algn="l">
+              <a:spcAft>
+                <a:spcPts val="1200"/>
+              </a:spcAft>
+            </a:pPr>
+            <a:r>
+              <a:rPr sz="1700">
+                <a:solidFill>
+                  <a:srgbClr val="8A6410"/>
+                </a:solidFill>
+                <a:latin typeface="Calibri"/>
+              </a:rPr>
+              <a:t>▪  </a:t>
+            </a:r>
+            <a:r>
+              <a:rPr sz="1700" b="1">
+                <a:solidFill>
+                  <a:srgbClr val="0E4D33"/>
+                </a:solidFill>
+                <a:latin typeface="Calibri"/>
+              </a:rPr>
+              <a:t>The practical pattern:  </a:t>
+            </a:r>
+            <a:r>
+              <a:rPr sz="1700" b="0" i="0">
+                <a:solidFill>
+                  <a:srgbClr val="212A26"/>
+                </a:solidFill>
+                <a:latin typeface="Calibri"/>
+              </a:rPr>
+              <a:t>a two-line email carries a one-page memo attachment: 'Attached is the updated travel policy, effective August 1. Summary below.'</a:t>
             </a:r>
           </a:p>
         </p:txBody>
@@ -9342,7 +10241,7 @@
     <p:bg>
       <p:bgPr>
         <a:solidFill>
-          <a:srgbClr val="0E4D33"/>
+          <a:srgbClr val="FFFFFF"/>
         </a:solidFill>
         <a:effectLst/>
       </p:bgPr>
@@ -9356,7 +10255,7 @@
       <p:grpSpPr/>
       <p:sp>
         <p:nvSpPr>
-          <p:cNvPr id="2" name="Title 1" descr="Slide title: Discussion questions"/>
+          <p:cNvPr id="2" name="Title 1" descr="Slide title: Memo anatomy — four lines, then business"/>
           <p:cNvSpPr>
             <a:spLocks noGrp="1"/>
           </p:cNvSpPr>
@@ -9376,27 +10275,27 @@
           <a:p>
             <a:pPr algn="l"/>
             <a:r>
-              <a:rPr sz="3400" b="1">
-                <a:solidFill>
-                  <a:srgbClr val="FFFFFF"/>
+              <a:rPr sz="3200" b="1">
+                <a:solidFill>
+                  <a:srgbClr val="0E4D33"/>
                 </a:solidFill>
                 <a:latin typeface="Cambria"/>
               </a:rPr>
-              <a:t>Discussion questions</a:t>
-            </a:r>
-          </a:p>
-        </p:txBody>
-      </p:sp>
-      <p:sp>
-        <p:nvSpPr>
-          <p:cNvPr id="3" name="TextBox 2" descr="Discussion questions"/>
+              <a:t>Memo anatomy — four lines, then business</a:t>
+            </a:r>
+          </a:p>
+        </p:txBody>
+      </p:sp>
+      <p:sp>
+        <p:nvSpPr>
+          <p:cNvPr id="3" name="TextBox 2" descr="Footer: BADM 225 · Chapter 5"/>
           <p:cNvSpPr txBox="1"/>
           <p:nvPr/>
         </p:nvSpPr>
         <p:spPr>
           <a:xfrm>
-            <a:off x="731520" y="1737360"/>
-            <a:ext cx="10698480" cy="4480560"/>
+            <a:off x="502920" y="6446520"/>
+            <a:ext cx="5486400" cy="320040"/>
           </a:xfrm>
           <a:prstGeom prst="rect">
             <a:avLst/>
@@ -9404,147 +10303,33 @@
           <a:noFill/>
         </p:spPr>
         <p:txBody>
-          <a:bodyPr wrap="square">
+          <a:bodyPr wrap="none">
             <a:spAutoFit/>
           </a:bodyPr>
           <a:lstStyle/>
           <a:p>
-            <a:pPr algn="l">
-              <a:spcAft>
-                <a:spcPts val="1800"/>
-              </a:spcAft>
-            </a:pPr>
-            <a:r>
-              <a:rPr sz="1800" b="1">
-                <a:solidFill>
-                  <a:srgbClr val="C9931A"/>
-                </a:solidFill>
-                <a:latin typeface="Calibri"/>
-              </a:rPr>
-              <a:t>1.  </a:t>
-            </a:r>
-            <a:r>
-              <a:rPr sz="1800" b="0" i="0">
-                <a:solidFill>
-                  <a:srgbClr val="FFFFFF"/>
-                </a:solidFill>
-                <a:latin typeface="Calibri"/>
-              </a:rPr>
-              <a:t>Pull your three most recent subject lines. Which formula do they follow — and what are their repairs?</a:t>
-            </a:r>
-          </a:p>
-          <a:p>
-            <a:pPr algn="l">
-              <a:spcAft>
-                <a:spcPts val="1800"/>
-              </a:spcAft>
-            </a:pPr>
-            <a:r>
-              <a:rPr sz="1800" b="1">
-                <a:solidFill>
-                  <a:srgbClr val="C9931A"/>
-                </a:solidFill>
-                <a:latin typeface="Calibri"/>
-              </a:rPr>
-              <a:t>2.  </a:t>
-            </a:r>
-            <a:r>
-              <a:rPr sz="1800" b="0" i="0">
-                <a:solidFill>
-                  <a:srgbClr val="FFFFFF"/>
-                </a:solidFill>
-                <a:latin typeface="Calibri"/>
-              </a:rPr>
-              <a:t>Where does your team actually decide things, and what gets lost in that channel?</a:t>
-            </a:r>
-          </a:p>
-          <a:p>
-            <a:pPr algn="l">
-              <a:spcAft>
-                <a:spcPts val="1800"/>
-              </a:spcAft>
-            </a:pPr>
-            <a:r>
-              <a:rPr sz="1800" b="1">
-                <a:solidFill>
-                  <a:srgbClr val="C9931A"/>
-                </a:solidFill>
-                <a:latin typeface="Calibri"/>
-              </a:rPr>
-              <a:t>3.  </a:t>
-            </a:r>
-            <a:r>
-              <a:rPr sz="1800" b="0" i="0">
-                <a:solidFill>
-                  <a:srgbClr val="FFFFFF"/>
-                </a:solidFill>
-                <a:latin typeface="Calibri"/>
-              </a:rPr>
-              <a:t>Schedule-send: considerate boundary-keeping, or normalized after-hours work in disguise? Argue both, then commit.</a:t>
-            </a:r>
-          </a:p>
-          <a:p>
-            <a:pPr algn="l">
-              <a:spcAft>
-                <a:spcPts val="1800"/>
-              </a:spcAft>
-            </a:pPr>
-            <a:r>
-              <a:rPr sz="1800" b="1">
-                <a:solidFill>
-                  <a:srgbClr val="C9931A"/>
-                </a:solidFill>
-                <a:latin typeface="Calibri"/>
-              </a:rPr>
-              <a:t>4.  </a:t>
-            </a:r>
-            <a:r>
-              <a:rPr sz="1800" b="0" i="0">
-                <a:solidFill>
-                  <a:srgbClr val="FFFFFF"/>
-                </a:solidFill>
-                <a:latin typeface="Calibri"/>
-              </a:rPr>
-              <a:t>State your personal permanence-gradient policy: what will you never type on a logged platform?</a:t>
-            </a:r>
-          </a:p>
-          <a:p>
-            <a:pPr algn="l">
-              <a:spcAft>
-                <a:spcPts val="1800"/>
-              </a:spcAft>
-            </a:pPr>
-            <a:r>
-              <a:rPr sz="1800" b="1">
-                <a:solidFill>
-                  <a:srgbClr val="C9931A"/>
-                </a:solidFill>
-                <a:latin typeface="Calibri"/>
-              </a:rPr>
-              <a:t>5.  </a:t>
-            </a:r>
-            <a:r>
-              <a:rPr sz="1800" b="0" i="0">
-                <a:solidFill>
-                  <a:srgbClr val="FFFFFF"/>
-                </a:solidFill>
-                <a:latin typeface="Calibri"/>
-              </a:rPr>
-              <a:t>Design the company mass-email policy that makes reply-all storms impossible.</a:t>
-            </a:r>
-          </a:p>
-        </p:txBody>
-      </p:sp>
-      <p:sp>
-        <p:nvSpPr>
-          <p:cNvPr id="4" name="TextBox 3" descr="Footer"/>
+            <a:r>
+              <a:rPr sz="1000">
+                <a:solidFill>
+                  <a:srgbClr val="5E6B64"/>
+                </a:solidFill>
+                <a:latin typeface="Calibri"/>
+              </a:rPr>
+              <a:t>BADM 225 · Chapter 5</a:t>
+            </a:r>
+          </a:p>
+        </p:txBody>
+      </p:sp>
+      <p:sp>
+        <p:nvSpPr>
+          <p:cNvPr id="4" name="TextBox 3" descr="Slide number 21"/>
           <p:cNvSpPr txBox="1"/>
           <p:nvPr/>
         </p:nvSpPr>
         <p:spPr>
           <a:xfrm>
-            <a:off x="502920" y="6446520"/>
-            <a:ext cx="5486400" cy="320040"/>
+            <a:off x="11247120" y="6446520"/>
+            <a:ext cx="640080" cy="320040"/>
           </a:xfrm>
           <a:prstGeom prst="rect">
             <a:avLst/>
@@ -9557,14 +10342,447 @@
           </a:bodyPr>
           <a:lstStyle/>
           <a:p>
+            <a:pPr algn="r"/>
             <a:r>
               <a:rPr sz="1000">
                 <a:solidFill>
-                  <a:srgbClr val="A8C4B2"/>
-                </a:solidFill>
-                <a:latin typeface="Calibri"/>
-              </a:rPr>
-              <a:t>BADM 225 · Chapter 5</a:t>
+                  <a:srgbClr val="5E6B64"/>
+                </a:solidFill>
+                <a:latin typeface="Calibri"/>
+              </a:rPr>
+              <a:t>21</a:t>
+            </a:r>
+          </a:p>
+        </p:txBody>
+      </p:sp>
+      <p:sp>
+        <p:nvSpPr>
+          <p:cNvPr id="5" name="Oval 4" descr="TO / FROM / DATE / SUBJECT icon"/>
+          <p:cNvSpPr/>
+          <p:nvPr/>
+        </p:nvSpPr>
+        <p:spPr>
+          <a:xfrm>
+            <a:off x="640080" y="1655064"/>
+            <a:ext cx="566928" cy="566928"/>
+          </a:xfrm>
+          <a:prstGeom prst="ellipse">
+            <a:avLst/>
+          </a:prstGeom>
+          <a:solidFill>
+            <a:srgbClr val="0E4D33"/>
+          </a:solidFill>
+          <a:ln>
+            <a:noFill/>
+          </a:ln>
+          <a:effectLst/>
+        </p:spPr>
+        <p:style>
+          <a:lnRef idx="1">
+            <a:schemeClr val="accent1"/>
+          </a:lnRef>
+          <a:fillRef idx="3">
+            <a:schemeClr val="accent1"/>
+          </a:fillRef>
+          <a:effectRef idx="2">
+            <a:schemeClr val="accent1"/>
+          </a:effectRef>
+          <a:fontRef idx="minor">
+            <a:schemeClr val="lt1"/>
+          </a:fontRef>
+        </p:style>
+        <p:txBody>
+          <a:bodyPr rtlCol="0" anchor="ctr" lIns="0" rIns="0" tIns="0" bIns="0"/>
+          <a:lstStyle/>
+          <a:p>
+            <a:pPr algn="ctr"/>
+            <a:r>
+              <a:rPr sz="1600" b="1">
+                <a:solidFill>
+                  <a:srgbClr val="FFFFFF"/>
+                </a:solidFill>
+                <a:latin typeface="Calibri"/>
+              </a:rPr>
+              <a:t>➤</a:t>
+            </a:r>
+          </a:p>
+        </p:txBody>
+      </p:sp>
+      <p:sp>
+        <p:nvSpPr>
+          <p:cNvPr id="6" name="TextBox 5" descr="TO / FROM / DATE / SUBJECT"/>
+          <p:cNvSpPr txBox="1"/>
+          <p:nvPr/>
+        </p:nvSpPr>
+        <p:spPr>
+          <a:xfrm>
+            <a:off x="1417320" y="1600200"/>
+            <a:ext cx="10241280" cy="1078992"/>
+          </a:xfrm>
+          <a:prstGeom prst="rect">
+            <a:avLst/>
+          </a:prstGeom>
+          <a:noFill/>
+        </p:spPr>
+        <p:txBody>
+          <a:bodyPr wrap="square">
+            <a:spAutoFit/>
+          </a:bodyPr>
+          <a:lstStyle/>
+          <a:p>
+            <a:pPr algn="l">
+              <a:spcAft>
+                <a:spcPts val="200"/>
+              </a:spcAft>
+            </a:pPr>
+            <a:r>
+              <a:rPr sz="1650" b="1" i="0">
+                <a:solidFill>
+                  <a:srgbClr val="0E4D33"/>
+                </a:solidFill>
+                <a:latin typeface="Cambria"/>
+              </a:rPr>
+              <a:t>TO / FROM / DATE / SUBJECT</a:t>
+            </a:r>
+          </a:p>
+          <a:p>
+            <a:pPr algn="l">
+              <a:spcAft>
+                <a:spcPts val="0"/>
+              </a:spcAft>
+            </a:pPr>
+            <a:r>
+              <a:rPr sz="1550" b="0" i="0">
+                <a:solidFill>
+                  <a:srgbClr val="212A26"/>
+                </a:solidFill>
+                <a:latin typeface="Calibri"/>
+              </a:rPr>
+              <a:t>The four-line header replaces salutation and signature — no 'Dear,' no 'Sincerely.'</a:t>
+            </a:r>
+          </a:p>
+        </p:txBody>
+      </p:sp>
+      <p:sp>
+        <p:nvSpPr>
+          <p:cNvPr id="7" name="Oval 6" descr="Opening = the point icon"/>
+          <p:cNvSpPr/>
+          <p:nvPr/>
+        </p:nvSpPr>
+        <p:spPr>
+          <a:xfrm>
+            <a:off x="640080" y="2843784"/>
+            <a:ext cx="566928" cy="566928"/>
+          </a:xfrm>
+          <a:prstGeom prst="ellipse">
+            <a:avLst/>
+          </a:prstGeom>
+          <a:solidFill>
+            <a:srgbClr val="0E4D33"/>
+          </a:solidFill>
+          <a:ln>
+            <a:noFill/>
+          </a:ln>
+          <a:effectLst/>
+        </p:spPr>
+        <p:style>
+          <a:lnRef idx="1">
+            <a:schemeClr val="accent1"/>
+          </a:lnRef>
+          <a:fillRef idx="3">
+            <a:schemeClr val="accent1"/>
+          </a:fillRef>
+          <a:effectRef idx="2">
+            <a:schemeClr val="accent1"/>
+          </a:effectRef>
+          <a:fontRef idx="minor">
+            <a:schemeClr val="lt1"/>
+          </a:fontRef>
+        </p:style>
+        <p:txBody>
+          <a:bodyPr rtlCol="0" anchor="ctr" lIns="0" rIns="0" tIns="0" bIns="0"/>
+          <a:lstStyle/>
+          <a:p>
+            <a:pPr algn="ctr"/>
+            <a:r>
+              <a:rPr sz="1600" b="1">
+                <a:solidFill>
+                  <a:srgbClr val="FFFFFF"/>
+                </a:solidFill>
+                <a:latin typeface="Calibri"/>
+              </a:rPr>
+              <a:t>◎</a:t>
+            </a:r>
+          </a:p>
+        </p:txBody>
+      </p:sp>
+      <p:sp>
+        <p:nvSpPr>
+          <p:cNvPr id="8" name="TextBox 7" descr="Opening = the point"/>
+          <p:cNvSpPr txBox="1"/>
+          <p:nvPr/>
+        </p:nvSpPr>
+        <p:spPr>
+          <a:xfrm>
+            <a:off x="1417320" y="2788920"/>
+            <a:ext cx="10241280" cy="1078992"/>
+          </a:xfrm>
+          <a:prstGeom prst="rect">
+            <a:avLst/>
+          </a:prstGeom>
+          <a:noFill/>
+        </p:spPr>
+        <p:txBody>
+          <a:bodyPr wrap="square">
+            <a:spAutoFit/>
+          </a:bodyPr>
+          <a:lstStyle/>
+          <a:p>
+            <a:pPr algn="l">
+              <a:spcAft>
+                <a:spcPts val="200"/>
+              </a:spcAft>
+            </a:pPr>
+            <a:r>
+              <a:rPr sz="1650" b="1" i="0">
+                <a:solidFill>
+                  <a:srgbClr val="0E4D33"/>
+                </a:solidFill>
+                <a:latin typeface="Cambria"/>
+              </a:rPr>
+              <a:t>Opening = the point</a:t>
+            </a:r>
+          </a:p>
+          <a:p>
+            <a:pPr algn="l">
+              <a:spcAft>
+                <a:spcPts val="0"/>
+              </a:spcAft>
+            </a:pPr>
+            <a:r>
+              <a:rPr sz="1550" b="0" i="0">
+                <a:solidFill>
+                  <a:srgbClr val="212A26"/>
+                </a:solidFill>
+                <a:latin typeface="Calibri"/>
+              </a:rPr>
+              <a:t>First sentence states the news or decision, exactly like a direct email (Chapter 3).</a:t>
+            </a:r>
+          </a:p>
+        </p:txBody>
+      </p:sp>
+      <p:sp>
+        <p:nvSpPr>
+          <p:cNvPr id="9" name="Oval 8" descr="Headings for anything past half a page icon"/>
+          <p:cNvSpPr/>
+          <p:nvPr/>
+        </p:nvSpPr>
+        <p:spPr>
+          <a:xfrm>
+            <a:off x="640080" y="4032504"/>
+            <a:ext cx="566928" cy="566928"/>
+          </a:xfrm>
+          <a:prstGeom prst="ellipse">
+            <a:avLst/>
+          </a:prstGeom>
+          <a:solidFill>
+            <a:srgbClr val="0E4D33"/>
+          </a:solidFill>
+          <a:ln>
+            <a:noFill/>
+          </a:ln>
+          <a:effectLst/>
+        </p:spPr>
+        <p:style>
+          <a:lnRef idx="1">
+            <a:schemeClr val="accent1"/>
+          </a:lnRef>
+          <a:fillRef idx="3">
+            <a:schemeClr val="accent1"/>
+          </a:fillRef>
+          <a:effectRef idx="2">
+            <a:schemeClr val="accent1"/>
+          </a:effectRef>
+          <a:fontRef idx="minor">
+            <a:schemeClr val="lt1"/>
+          </a:fontRef>
+        </p:style>
+        <p:txBody>
+          <a:bodyPr rtlCol="0" anchor="ctr" lIns="0" rIns="0" tIns="0" bIns="0"/>
+          <a:lstStyle/>
+          <a:p>
+            <a:pPr algn="ctr"/>
+            <a:r>
+              <a:rPr sz="1600" b="1">
+                <a:solidFill>
+                  <a:srgbClr val="FFFFFF"/>
+                </a:solidFill>
+                <a:latin typeface="Calibri"/>
+              </a:rPr>
+              <a:t>▤</a:t>
+            </a:r>
+          </a:p>
+        </p:txBody>
+      </p:sp>
+      <p:sp>
+        <p:nvSpPr>
+          <p:cNvPr id="10" name="TextBox 9" descr="Headings for anything past half a page"/>
+          <p:cNvSpPr txBox="1"/>
+          <p:nvPr/>
+        </p:nvSpPr>
+        <p:spPr>
+          <a:xfrm>
+            <a:off x="1417320" y="3977640"/>
+            <a:ext cx="10241280" cy="1078992"/>
+          </a:xfrm>
+          <a:prstGeom prst="rect">
+            <a:avLst/>
+          </a:prstGeom>
+          <a:noFill/>
+        </p:spPr>
+        <p:txBody>
+          <a:bodyPr wrap="square">
+            <a:spAutoFit/>
+          </a:bodyPr>
+          <a:lstStyle/>
+          <a:p>
+            <a:pPr algn="l">
+              <a:spcAft>
+                <a:spcPts val="200"/>
+              </a:spcAft>
+            </a:pPr>
+            <a:r>
+              <a:rPr sz="1650" b="1" i="0">
+                <a:solidFill>
+                  <a:srgbClr val="0E4D33"/>
+                </a:solidFill>
+                <a:latin typeface="Cambria"/>
+              </a:rPr>
+              <a:t>Headings for anything past half a page</a:t>
+            </a:r>
+          </a:p>
+          <a:p>
+            <a:pPr algn="l">
+              <a:spcAft>
+                <a:spcPts val="0"/>
+              </a:spcAft>
+            </a:pPr>
+            <a:r>
+              <a:rPr sz="1550" b="0" i="0">
+                <a:solidFill>
+                  <a:srgbClr val="212A26"/>
+                </a:solidFill>
+                <a:latin typeface="Calibri"/>
+              </a:rPr>
+              <a:t>Memos get skimmed on bulletin boards and intranets — design for the F-pattern.</a:t>
+            </a:r>
+          </a:p>
+        </p:txBody>
+      </p:sp>
+      <p:sp>
+        <p:nvSpPr>
+          <p:cNvPr id="11" name="Oval 10" descr="Initials, not signatures icon"/>
+          <p:cNvSpPr/>
+          <p:nvPr/>
+        </p:nvSpPr>
+        <p:spPr>
+          <a:xfrm>
+            <a:off x="640080" y="5221224"/>
+            <a:ext cx="566928" cy="566928"/>
+          </a:xfrm>
+          <a:prstGeom prst="ellipse">
+            <a:avLst/>
+          </a:prstGeom>
+          <a:solidFill>
+            <a:srgbClr val="0E4D33"/>
+          </a:solidFill>
+          <a:ln>
+            <a:noFill/>
+          </a:ln>
+          <a:effectLst/>
+        </p:spPr>
+        <p:style>
+          <a:lnRef idx="1">
+            <a:schemeClr val="accent1"/>
+          </a:lnRef>
+          <a:fillRef idx="3">
+            <a:schemeClr val="accent1"/>
+          </a:fillRef>
+          <a:effectRef idx="2">
+            <a:schemeClr val="accent1"/>
+          </a:effectRef>
+          <a:fontRef idx="minor">
+            <a:schemeClr val="lt1"/>
+          </a:fontRef>
+        </p:style>
+        <p:txBody>
+          <a:bodyPr rtlCol="0" anchor="ctr" lIns="0" rIns="0" tIns="0" bIns="0"/>
+          <a:lstStyle/>
+          <a:p>
+            <a:pPr algn="ctr"/>
+            <a:r>
+              <a:rPr sz="1600" b="1">
+                <a:solidFill>
+                  <a:srgbClr val="FFFFFF"/>
+                </a:solidFill>
+                <a:latin typeface="Calibri"/>
+              </a:rPr>
+              <a:t>✍</a:t>
+            </a:r>
+          </a:p>
+        </p:txBody>
+      </p:sp>
+      <p:sp>
+        <p:nvSpPr>
+          <p:cNvPr id="12" name="TextBox 11" descr="Initials, not signatures"/>
+          <p:cNvSpPr txBox="1"/>
+          <p:nvPr/>
+        </p:nvSpPr>
+        <p:spPr>
+          <a:xfrm>
+            <a:off x="1417320" y="5166360"/>
+            <a:ext cx="10241280" cy="1078992"/>
+          </a:xfrm>
+          <a:prstGeom prst="rect">
+            <a:avLst/>
+          </a:prstGeom>
+          <a:noFill/>
+        </p:spPr>
+        <p:txBody>
+          <a:bodyPr wrap="square">
+            <a:spAutoFit/>
+          </a:bodyPr>
+          <a:lstStyle/>
+          <a:p>
+            <a:pPr algn="l">
+              <a:spcAft>
+                <a:spcPts val="200"/>
+              </a:spcAft>
+            </a:pPr>
+            <a:r>
+              <a:rPr sz="1650" b="1" i="0">
+                <a:solidFill>
+                  <a:srgbClr val="0E4D33"/>
+                </a:solidFill>
+                <a:latin typeface="Cambria"/>
+              </a:rPr>
+              <a:t>Initials, not signatures</a:t>
+            </a:r>
+          </a:p>
+          <a:p>
+            <a:pPr algn="l">
+              <a:spcAft>
+                <a:spcPts val="0"/>
+              </a:spcAft>
+            </a:pPr>
+            <a:r>
+              <a:rPr sz="1550" b="0" i="0">
+                <a:solidFill>
+                  <a:srgbClr val="212A26"/>
+                </a:solidFill>
+                <a:latin typeface="Calibri"/>
+              </a:rPr>
+              <a:t>Convention: the sender initials next to their name in the FROM line — the whole document is the signature.</a:t>
             </a:r>
           </a:p>
         </p:txBody>
@@ -9597,7 +10815,7 @@
       <p:grpSpPr/>
       <p:sp>
         <p:nvSpPr>
-          <p:cNvPr id="2" name="Title 1" descr="Slide title: Your next steps"/>
+          <p:cNvPr id="2" name="Title 1" descr="Slide title: The status update that manages up"/>
           <p:cNvSpPr>
             <a:spLocks noGrp="1"/>
           </p:cNvSpPr>
@@ -9623,7 +10841,7 @@
                 </a:solidFill>
                 <a:latin typeface="Cambria"/>
               </a:rPr>
-              <a:t>Your next steps</a:t>
+              <a:t>The status update that manages up</a:t>
             </a:r>
           </a:p>
         </p:txBody>
@@ -9740,7 +10958,7 @@
                 </a:solidFill>
                 <a:latin typeface="Calibri"/>
               </a:rPr>
-              <a:t>Practice:  </a:t>
+              <a:t>The three-line skeleton:  </a:t>
             </a:r>
             <a:r>
               <a:rPr sz="1700" b="0" i="0">
@@ -9749,7 +10967,7 @@
                 </a:solidFill>
                 <a:latin typeface="Calibri"/>
               </a:rPr>
-              <a:t>Course site → Chapter 5 → Practice questions (instant feedback, unlimited tries).</a:t>
+              <a:t>On track: [what's fine]. Slipping: [what's not + the fix + new date]. Need from you: [ask or 'nothing yet'].</a:t>
             </a:r>
           </a:p>
           <a:p>
@@ -9774,7 +10992,7 @@
                 </a:solidFill>
                 <a:latin typeface="Calibri"/>
               </a:rPr>
-              <a:t>Graded:  </a:t>
+              <a:t>Lead with the exception.  </a:t>
             </a:r>
             <a:r>
               <a:rPr sz="1700" b="0" i="0">
@@ -9783,7 +11001,7 @@
                 </a:solidFill>
                 <a:latin typeface="Calibri"/>
               </a:rPr>
-              <a:t>Complete the Chapter 5 homework on the site; paste your completion code into the Blackboard assignment before the weekly deadline.</a:t>
+              <a:t>If something is slipping, that's the news — never make a manager excavate for it (Chapter 1's upward filter).</a:t>
             </a:r>
           </a:p>
           <a:p>
@@ -9808,7 +11026,7 @@
                 </a:solidFill>
                 <a:latin typeface="Calibri"/>
               </a:rPr>
-              <a:t>Build:  </a:t>
+              <a:t>Same format every time.  </a:t>
             </a:r>
             <a:r>
               <a:rPr sz="1700" b="0" i="0">
@@ -9817,7 +11035,7 @@
                 </a:solidFill>
                 <a:latin typeface="Calibri"/>
               </a:rPr>
-              <a:t>Your email signature (this unit's assignment) to Figure 1's spec — and audit your last twenty sent messages against the playbook.</a:t>
+              <a:t>Predictable structure means your manager reads it in ten seconds — and notices instantly when something changes.</a:t>
             </a:r>
           </a:p>
           <a:p>
@@ -9842,7 +11060,7 @@
                 </a:solidFill>
                 <a:latin typeface="Calibri"/>
               </a:rPr>
-              <a:t>Read:  </a:t>
+              <a:t>Silence is a report too.  </a:t>
             </a:r>
             <a:r>
               <a:rPr sz="1700" b="0" i="0">
@@ -9851,9 +11069,366 @@
                 </a:solidFill>
                 <a:latin typeface="Calibri"/>
               </a:rPr>
-              <a:t>The Chapter 5 Study Guide — the full channel matrix, both cases, and the triage system.</a:t>
-            </a:r>
-          </a:p>
+              <a:t>A skipped update is read as 'something is wrong and they're not saying' — usually correctly.</a:t>
+            </a:r>
+          </a:p>
+        </p:txBody>
+      </p:sp>
+    </p:spTree>
+  </p:cSld>
+  <p:clrMapOvr>
+    <a:masterClrMapping/>
+  </p:clrMapOvr>
+</p:sld>
+</file>
+
+<file path=ppt/slides/slide23.xml><?xml version="1.0" encoding="utf-8"?>
+<p:sld xmlns:a="http://schemas.openxmlformats.org/drawingml/2006/main" xmlns:p="http://schemas.openxmlformats.org/presentationml/2006/main" xmlns:r="http://schemas.openxmlformats.org/officeDocument/2006/relationships">
+  <p:cSld>
+    <p:bg>
+      <p:bgPr>
+        <a:solidFill>
+          <a:srgbClr val="0E4D33"/>
+        </a:solidFill>
+        <a:effectLst/>
+      </p:bgPr>
+    </p:bg>
+    <p:spTree>
+      <p:nvGrpSpPr>
+        <p:cNvPr id="1" name=""/>
+        <p:cNvGrpSpPr/>
+        <p:nvPr/>
+      </p:nvGrpSpPr>
+      <p:grpSpPr/>
+      <p:sp>
+        <p:nvSpPr>
+          <p:cNvPr id="2" name="Title 1" descr="Slide title: Meetings start in writing"/>
+          <p:cNvSpPr>
+            <a:spLocks noGrp="1"/>
+          </p:cNvSpPr>
+          <p:nvPr>
+            <p:ph type="title"/>
+          </p:nvPr>
+        </p:nvSpPr>
+        <p:spPr>
+          <a:xfrm>
+            <a:off x="822960" y="2834640"/>
+            <a:ext cx="10515600" cy="914400"/>
+          </a:xfrm>
+        </p:spPr>
+        <p:txBody>
+          <a:bodyPr wrap="square"/>
+          <a:lstStyle/>
+          <a:p>
+            <a:pPr algn="l"/>
+            <a:r>
+              <a:rPr sz="4000" b="1">
+                <a:solidFill>
+                  <a:srgbClr val="FFFFFF"/>
+                </a:solidFill>
+                <a:latin typeface="Cambria"/>
+              </a:rPr>
+              <a:t>Meetings start in writing</a:t>
+            </a:r>
+          </a:p>
+        </p:txBody>
+      </p:sp>
+      <p:sp>
+        <p:nvSpPr>
+          <p:cNvPr id="3" name="TextBox 2" descr="Section number 06"/>
+          <p:cNvSpPr txBox="1"/>
+          <p:nvPr/>
+        </p:nvSpPr>
+        <p:spPr>
+          <a:xfrm>
+            <a:off x="822960" y="1188720"/>
+            <a:ext cx="2743200" cy="1463040"/>
+          </a:xfrm>
+          <a:prstGeom prst="rect">
+            <a:avLst/>
+          </a:prstGeom>
+          <a:noFill/>
+        </p:spPr>
+        <p:txBody>
+          <a:bodyPr wrap="square">
+            <a:spAutoFit/>
+          </a:bodyPr>
+          <a:lstStyle/>
+          <a:p>
+            <a:pPr algn="l">
+              <a:spcAft>
+                <a:spcPts val="800"/>
+              </a:spcAft>
+            </a:pPr>
+            <a:r>
+              <a:rPr sz="8000" b="1" i="0">
+                <a:solidFill>
+                  <a:srgbClr val="C9931A"/>
+                </a:solidFill>
+                <a:latin typeface="Cambria"/>
+              </a:rPr>
+              <a:t>06</a:t>
+            </a:r>
+          </a:p>
+        </p:txBody>
+      </p:sp>
+      <p:sp>
+        <p:nvSpPr>
+          <p:cNvPr id="4" name="TextBox 3" descr="Section note"/>
+          <p:cNvSpPr txBox="1"/>
+          <p:nvPr/>
+        </p:nvSpPr>
+        <p:spPr>
+          <a:xfrm>
+            <a:off x="822960" y="4023360"/>
+            <a:ext cx="9601200" cy="1097280"/>
+          </a:xfrm>
+          <a:prstGeom prst="rect">
+            <a:avLst/>
+          </a:prstGeom>
+          <a:noFill/>
+        </p:spPr>
+        <p:txBody>
+          <a:bodyPr wrap="square">
+            <a:spAutoFit/>
+          </a:bodyPr>
+          <a:lstStyle/>
+          <a:p>
+            <a:pPr algn="l">
+              <a:spcAft>
+                <a:spcPts val="800"/>
+              </a:spcAft>
+            </a:pPr>
+            <a:r>
+              <a:rPr sz="1700" b="0" i="0">
+                <a:solidFill>
+                  <a:srgbClr val="EAF1EB"/>
+                </a:solidFill>
+                <a:latin typeface="Calibri"/>
+              </a:rPr>
+              <a:t>The invite, the agenda, and the two-line record afterward.</a:t>
+            </a:r>
+          </a:p>
+        </p:txBody>
+      </p:sp>
+      <p:sp>
+        <p:nvSpPr>
+          <p:cNvPr id="5" name="TextBox 4" descr="Footer: BADM 225 · Chapter 5"/>
+          <p:cNvSpPr txBox="1"/>
+          <p:nvPr/>
+        </p:nvSpPr>
+        <p:spPr>
+          <a:xfrm>
+            <a:off x="502920" y="6446520"/>
+            <a:ext cx="5486400" cy="320040"/>
+          </a:xfrm>
+          <a:prstGeom prst="rect">
+            <a:avLst/>
+          </a:prstGeom>
+          <a:noFill/>
+        </p:spPr>
+        <p:txBody>
+          <a:bodyPr wrap="none">
+            <a:spAutoFit/>
+          </a:bodyPr>
+          <a:lstStyle/>
+          <a:p>
+            <a:r>
+              <a:rPr sz="1000">
+                <a:solidFill>
+                  <a:srgbClr val="5E6B64"/>
+                </a:solidFill>
+                <a:latin typeface="Calibri"/>
+              </a:rPr>
+              <a:t>BADM 225 · Chapter 5</a:t>
+            </a:r>
+          </a:p>
+        </p:txBody>
+      </p:sp>
+      <p:sp>
+        <p:nvSpPr>
+          <p:cNvPr id="6" name="TextBox 5" descr="Slide number 23"/>
+          <p:cNvSpPr txBox="1"/>
+          <p:nvPr/>
+        </p:nvSpPr>
+        <p:spPr>
+          <a:xfrm>
+            <a:off x="11247120" y="6446520"/>
+            <a:ext cx="640080" cy="320040"/>
+          </a:xfrm>
+          <a:prstGeom prst="rect">
+            <a:avLst/>
+          </a:prstGeom>
+          <a:noFill/>
+        </p:spPr>
+        <p:txBody>
+          <a:bodyPr wrap="none">
+            <a:spAutoFit/>
+          </a:bodyPr>
+          <a:lstStyle/>
+          <a:p>
+            <a:pPr algn="r"/>
+            <a:r>
+              <a:rPr sz="1000">
+                <a:solidFill>
+                  <a:srgbClr val="5E6B64"/>
+                </a:solidFill>
+                <a:latin typeface="Calibri"/>
+              </a:rPr>
+              <a:t>23</a:t>
+            </a:r>
+          </a:p>
+        </p:txBody>
+      </p:sp>
+    </p:spTree>
+  </p:cSld>
+  <p:clrMapOvr>
+    <a:masterClrMapping/>
+  </p:clrMapOvr>
+</p:sld>
+</file>
+
+<file path=ppt/slides/slide24.xml><?xml version="1.0" encoding="utf-8"?>
+<p:sld xmlns:a="http://schemas.openxmlformats.org/drawingml/2006/main" xmlns:p="http://schemas.openxmlformats.org/presentationml/2006/main" xmlns:r="http://schemas.openxmlformats.org/officeDocument/2006/relationships">
+  <p:cSld>
+    <p:bg>
+      <p:bgPr>
+        <a:solidFill>
+          <a:srgbClr val="FFFFFF"/>
+        </a:solidFill>
+        <a:effectLst/>
+      </p:bgPr>
+    </p:bg>
+    <p:spTree>
+      <p:nvGrpSpPr>
+        <p:cNvPr id="1" name=""/>
+        <p:cNvGrpSpPr/>
+        <p:nvPr/>
+      </p:nvGrpSpPr>
+      <p:grpSpPr/>
+      <p:sp>
+        <p:nvSpPr>
+          <p:cNvPr id="2" name="Title 1" descr="Slide title: The meeting invite is a message — write it like one"/>
+          <p:cNvSpPr>
+            <a:spLocks noGrp="1"/>
+          </p:cNvSpPr>
+          <p:nvPr>
+            <p:ph type="title"/>
+          </p:nvPr>
+        </p:nvSpPr>
+        <p:spPr>
+          <a:xfrm>
+            <a:off x="502920" y="411480"/>
+            <a:ext cx="11155680" cy="914400"/>
+          </a:xfrm>
+        </p:spPr>
+        <p:txBody>
+          <a:bodyPr wrap="square"/>
+          <a:lstStyle/>
+          <a:p>
+            <a:pPr algn="l"/>
+            <a:r>
+              <a:rPr sz="3200" b="1">
+                <a:solidFill>
+                  <a:srgbClr val="0E4D33"/>
+                </a:solidFill>
+                <a:latin typeface="Cambria"/>
+              </a:rPr>
+              <a:t>The meeting invite is a message — write it like one</a:t>
+            </a:r>
+          </a:p>
+        </p:txBody>
+      </p:sp>
+      <p:sp>
+        <p:nvSpPr>
+          <p:cNvPr id="3" name="TextBox 2" descr="Footer: BADM 225 · Chapter 5"/>
+          <p:cNvSpPr txBox="1"/>
+          <p:nvPr/>
+        </p:nvSpPr>
+        <p:spPr>
+          <a:xfrm>
+            <a:off x="502920" y="6446520"/>
+            <a:ext cx="5486400" cy="320040"/>
+          </a:xfrm>
+          <a:prstGeom prst="rect">
+            <a:avLst/>
+          </a:prstGeom>
+          <a:noFill/>
+        </p:spPr>
+        <p:txBody>
+          <a:bodyPr wrap="none">
+            <a:spAutoFit/>
+          </a:bodyPr>
+          <a:lstStyle/>
+          <a:p>
+            <a:r>
+              <a:rPr sz="1000">
+                <a:solidFill>
+                  <a:srgbClr val="5E6B64"/>
+                </a:solidFill>
+                <a:latin typeface="Calibri"/>
+              </a:rPr>
+              <a:t>BADM 225 · Chapter 5</a:t>
+            </a:r>
+          </a:p>
+        </p:txBody>
+      </p:sp>
+      <p:sp>
+        <p:nvSpPr>
+          <p:cNvPr id="4" name="TextBox 3" descr="Slide number 24"/>
+          <p:cNvSpPr txBox="1"/>
+          <p:nvPr/>
+        </p:nvSpPr>
+        <p:spPr>
+          <a:xfrm>
+            <a:off x="11247120" y="6446520"/>
+            <a:ext cx="640080" cy="320040"/>
+          </a:xfrm>
+          <a:prstGeom prst="rect">
+            <a:avLst/>
+          </a:prstGeom>
+          <a:noFill/>
+        </p:spPr>
+        <p:txBody>
+          <a:bodyPr wrap="none">
+            <a:spAutoFit/>
+          </a:bodyPr>
+          <a:lstStyle/>
+          <a:p>
+            <a:pPr algn="r"/>
+            <a:r>
+              <a:rPr sz="1000">
+                <a:solidFill>
+                  <a:srgbClr val="5E6B64"/>
+                </a:solidFill>
+                <a:latin typeface="Calibri"/>
+              </a:rPr>
+              <a:t>24</a:t>
+            </a:r>
+          </a:p>
+        </p:txBody>
+      </p:sp>
+      <p:sp>
+        <p:nvSpPr>
+          <p:cNvPr id="5" name="TextBox 4" descr="Key points"/>
+          <p:cNvSpPr txBox="1"/>
+          <p:nvPr/>
+        </p:nvSpPr>
+        <p:spPr>
+          <a:xfrm>
+            <a:off x="548640" y="1554480"/>
+            <a:ext cx="11064240" cy="4663440"/>
+          </a:xfrm>
+          <a:prstGeom prst="rect">
+            <a:avLst/>
+          </a:prstGeom>
+          <a:noFill/>
+        </p:spPr>
+        <p:txBody>
+          <a:bodyPr wrap="square">
+            <a:spAutoFit/>
+          </a:bodyPr>
+          <a:lstStyle/>
           <a:p>
             <a:pPr algn="l">
               <a:spcAft>
@@ -9876,7 +11451,7 @@
                 </a:solidFill>
                 <a:latin typeface="Calibri"/>
               </a:rPr>
-              <a:t>Coming next:  </a:t>
+              <a:t>The title states the outcome.  </a:t>
             </a:r>
             <a:r>
               <a:rPr sz="1700" b="0" i="0">
@@ -9885,7 +11460,1770 @@
                 </a:solidFill>
                 <a:latin typeface="Calibri"/>
               </a:rPr>
-              <a:t>Chapter 6 — positive and neutral messages: the everyday mail that quietly builds your reputation.</a:t>
+              <a:t>'Decide Q3 vendor' beats 'Sync' — attendees should know why they're there before they accept.</a:t>
+            </a:r>
+          </a:p>
+          <a:p>
+            <a:pPr algn="l">
+              <a:spcAft>
+                <a:spcPts val="1200"/>
+              </a:spcAft>
+            </a:pPr>
+            <a:r>
+              <a:rPr sz="1700">
+                <a:solidFill>
+                  <a:srgbClr val="8A6410"/>
+                </a:solidFill>
+                <a:latin typeface="Calibri"/>
+              </a:rPr>
+              <a:t>▪  </a:t>
+            </a:r>
+            <a:r>
+              <a:rPr sz="1700" b="1">
+                <a:solidFill>
+                  <a:srgbClr val="0E4D33"/>
+                </a:solidFill>
+                <a:latin typeface="Calibri"/>
+              </a:rPr>
+              <a:t>The body carries the agenda,  </a:t>
+            </a:r>
+            <a:r>
+              <a:rPr sz="1700" b="0" i="0">
+                <a:solidFill>
+                  <a:srgbClr val="212A26"/>
+                </a:solidFill>
+                <a:latin typeface="Calibri"/>
+              </a:rPr>
+              <a:t>the pre-read links, and what each person should bring. An empty invite is a blank check drawn on everyone's calendar.</a:t>
+            </a:r>
+          </a:p>
+          <a:p>
+            <a:pPr algn="l">
+              <a:spcAft>
+                <a:spcPts val="1200"/>
+              </a:spcAft>
+            </a:pPr>
+            <a:r>
+              <a:rPr sz="1700">
+                <a:solidFill>
+                  <a:srgbClr val="8A6410"/>
+                </a:solidFill>
+                <a:latin typeface="Calibri"/>
+              </a:rPr>
+              <a:t>▪  </a:t>
+            </a:r>
+            <a:r>
+              <a:rPr sz="1700" b="1">
+                <a:solidFill>
+                  <a:srgbClr val="0E4D33"/>
+                </a:solidFill>
+                <a:latin typeface="Calibri"/>
+              </a:rPr>
+              <a:t>Invite the necessary, inform the rest.  </a:t>
+            </a:r>
+            <a:r>
+              <a:rPr sz="1700" b="0" i="0">
+                <a:solidFill>
+                  <a:srgbClr val="212A26"/>
+                </a:solidFill>
+                <a:latin typeface="Calibri"/>
+              </a:rPr>
+              <a:t>Every optional attendee who comes anyway doubles the cost; send the notes to the curious instead.</a:t>
+            </a:r>
+          </a:p>
+          <a:p>
+            <a:pPr algn="l">
+              <a:spcAft>
+                <a:spcPts val="1200"/>
+              </a:spcAft>
+            </a:pPr>
+            <a:r>
+              <a:rPr sz="1700">
+                <a:solidFill>
+                  <a:srgbClr val="8A6410"/>
+                </a:solidFill>
+                <a:latin typeface="Calibri"/>
+              </a:rPr>
+              <a:t>▪  </a:t>
+            </a:r>
+            <a:r>
+              <a:rPr sz="1700" b="1">
+                <a:solidFill>
+                  <a:srgbClr val="0E4D33"/>
+                </a:solidFill>
+                <a:latin typeface="Calibri"/>
+              </a:rPr>
+              <a:t>Honest duration.  </a:t>
+            </a:r>
+            <a:r>
+              <a:rPr sz="1700" b="0" i="0">
+                <a:solidFill>
+                  <a:srgbClr val="212A26"/>
+                </a:solidFill>
+                <a:latin typeface="Calibri"/>
+              </a:rPr>
+              <a:t>Book the 25 minutes it needs, not the 60 the calendar defaults to — meetings expand to fill the container.</a:t>
+            </a:r>
+          </a:p>
+        </p:txBody>
+      </p:sp>
+    </p:spTree>
+  </p:cSld>
+  <p:clrMapOvr>
+    <a:masterClrMapping/>
+  </p:clrMapOvr>
+</p:sld>
+</file>
+
+<file path=ppt/slides/slide25.xml><?xml version="1.0" encoding="utf-8"?>
+<p:sld xmlns:a="http://schemas.openxmlformats.org/drawingml/2006/main" xmlns:p="http://schemas.openxmlformats.org/presentationml/2006/main" xmlns:r="http://schemas.openxmlformats.org/officeDocument/2006/relationships">
+  <p:cSld>
+    <p:bg>
+      <p:bgPr>
+        <a:solidFill>
+          <a:srgbClr val="FFFFFF"/>
+        </a:solidFill>
+        <a:effectLst/>
+      </p:bgPr>
+    </p:bg>
+    <p:spTree>
+      <p:nvGrpSpPr>
+        <p:cNvPr id="1" name=""/>
+        <p:cNvGrpSpPr/>
+        <p:nvPr/>
+      </p:nvGrpSpPr>
+      <p:grpSpPr/>
+      <p:sp>
+        <p:nvSpPr>
+          <p:cNvPr id="2" name="Title 1" descr="Slide title: Agenda anatomy: items that can actually be run"/>
+          <p:cNvSpPr>
+            <a:spLocks noGrp="1"/>
+          </p:cNvSpPr>
+          <p:nvPr>
+            <p:ph type="title"/>
+          </p:nvPr>
+        </p:nvSpPr>
+        <p:spPr>
+          <a:xfrm>
+            <a:off x="502920" y="411480"/>
+            <a:ext cx="11155680" cy="914400"/>
+          </a:xfrm>
+        </p:spPr>
+        <p:txBody>
+          <a:bodyPr wrap="square"/>
+          <a:lstStyle/>
+          <a:p>
+            <a:pPr algn="l"/>
+            <a:r>
+              <a:rPr sz="3200" b="1">
+                <a:solidFill>
+                  <a:srgbClr val="0E4D33"/>
+                </a:solidFill>
+                <a:latin typeface="Cambria"/>
+              </a:rPr>
+              <a:t>Agenda anatomy: items that can actually be run</a:t>
+            </a:r>
+          </a:p>
+        </p:txBody>
+      </p:sp>
+      <p:sp>
+        <p:nvSpPr>
+          <p:cNvPr id="3" name="TextBox 2" descr="Footer: BADM 225 · Chapter 5"/>
+          <p:cNvSpPr txBox="1"/>
+          <p:nvPr/>
+        </p:nvSpPr>
+        <p:spPr>
+          <a:xfrm>
+            <a:off x="502920" y="6446520"/>
+            <a:ext cx="5486400" cy="320040"/>
+          </a:xfrm>
+          <a:prstGeom prst="rect">
+            <a:avLst/>
+          </a:prstGeom>
+          <a:noFill/>
+        </p:spPr>
+        <p:txBody>
+          <a:bodyPr wrap="none">
+            <a:spAutoFit/>
+          </a:bodyPr>
+          <a:lstStyle/>
+          <a:p>
+            <a:r>
+              <a:rPr sz="1000">
+                <a:solidFill>
+                  <a:srgbClr val="5E6B64"/>
+                </a:solidFill>
+                <a:latin typeface="Calibri"/>
+              </a:rPr>
+              <a:t>BADM 225 · Chapter 5</a:t>
+            </a:r>
+          </a:p>
+        </p:txBody>
+      </p:sp>
+      <p:sp>
+        <p:nvSpPr>
+          <p:cNvPr id="4" name="TextBox 3" descr="Slide number 25"/>
+          <p:cNvSpPr txBox="1"/>
+          <p:nvPr/>
+        </p:nvSpPr>
+        <p:spPr>
+          <a:xfrm>
+            <a:off x="11247120" y="6446520"/>
+            <a:ext cx="640080" cy="320040"/>
+          </a:xfrm>
+          <a:prstGeom prst="rect">
+            <a:avLst/>
+          </a:prstGeom>
+          <a:noFill/>
+        </p:spPr>
+        <p:txBody>
+          <a:bodyPr wrap="none">
+            <a:spAutoFit/>
+          </a:bodyPr>
+          <a:lstStyle/>
+          <a:p>
+            <a:pPr algn="r"/>
+            <a:r>
+              <a:rPr sz="1000">
+                <a:solidFill>
+                  <a:srgbClr val="5E6B64"/>
+                </a:solidFill>
+                <a:latin typeface="Calibri"/>
+              </a:rPr>
+              <a:t>25</a:t>
+            </a:r>
+          </a:p>
+        </p:txBody>
+      </p:sp>
+      <p:sp>
+        <p:nvSpPr>
+          <p:cNvPr id="5" name="Oval 4" descr="Each item is an outcome icon"/>
+          <p:cNvSpPr/>
+          <p:nvPr/>
+        </p:nvSpPr>
+        <p:spPr>
+          <a:xfrm>
+            <a:off x="640080" y="1655064"/>
+            <a:ext cx="566928" cy="566928"/>
+          </a:xfrm>
+          <a:prstGeom prst="ellipse">
+            <a:avLst/>
+          </a:prstGeom>
+          <a:solidFill>
+            <a:srgbClr val="0E4D33"/>
+          </a:solidFill>
+          <a:ln>
+            <a:noFill/>
+          </a:ln>
+          <a:effectLst/>
+        </p:spPr>
+        <p:style>
+          <a:lnRef idx="1">
+            <a:schemeClr val="accent1"/>
+          </a:lnRef>
+          <a:fillRef idx="3">
+            <a:schemeClr val="accent1"/>
+          </a:fillRef>
+          <a:effectRef idx="2">
+            <a:schemeClr val="accent1"/>
+          </a:effectRef>
+          <a:fontRef idx="minor">
+            <a:schemeClr val="lt1"/>
+          </a:fontRef>
+        </p:style>
+        <p:txBody>
+          <a:bodyPr rtlCol="0" anchor="ctr" lIns="0" rIns="0" tIns="0" bIns="0"/>
+          <a:lstStyle/>
+          <a:p>
+            <a:pPr algn="ctr"/>
+            <a:r>
+              <a:rPr sz="1600" b="1">
+                <a:solidFill>
+                  <a:srgbClr val="FFFFFF"/>
+                </a:solidFill>
+                <a:latin typeface="Calibri"/>
+              </a:rPr>
+              <a:t>◎</a:t>
+            </a:r>
+          </a:p>
+        </p:txBody>
+      </p:sp>
+      <p:sp>
+        <p:nvSpPr>
+          <p:cNvPr id="6" name="TextBox 5" descr="Each item is an outcome"/>
+          <p:cNvSpPr txBox="1"/>
+          <p:nvPr/>
+        </p:nvSpPr>
+        <p:spPr>
+          <a:xfrm>
+            <a:off x="1417320" y="1600200"/>
+            <a:ext cx="10241280" cy="1078992"/>
+          </a:xfrm>
+          <a:prstGeom prst="rect">
+            <a:avLst/>
+          </a:prstGeom>
+          <a:noFill/>
+        </p:spPr>
+        <p:txBody>
+          <a:bodyPr wrap="square">
+            <a:spAutoFit/>
+          </a:bodyPr>
+          <a:lstStyle/>
+          <a:p>
+            <a:pPr algn="l">
+              <a:spcAft>
+                <a:spcPts val="200"/>
+              </a:spcAft>
+            </a:pPr>
+            <a:r>
+              <a:rPr sz="1650" b="1" i="0">
+                <a:solidFill>
+                  <a:srgbClr val="0E4D33"/>
+                </a:solidFill>
+                <a:latin typeface="Cambria"/>
+              </a:rPr>
+              <a:t>Each item is an outcome</a:t>
+            </a:r>
+          </a:p>
+          <a:p>
+            <a:pPr algn="l">
+              <a:spcAft>
+                <a:spcPts val="0"/>
+              </a:spcAft>
+            </a:pPr>
+            <a:r>
+              <a:rPr sz="1550" b="0" i="0">
+                <a:solidFill>
+                  <a:srgbClr val="212A26"/>
+                </a:solidFill>
+                <a:latin typeface="Calibri"/>
+              </a:rPr>
+              <a:t>'Choose between vendors A and B' — not the topic-shaped fog of 'Vendors.'</a:t>
+            </a:r>
+          </a:p>
+        </p:txBody>
+      </p:sp>
+      <p:sp>
+        <p:nvSpPr>
+          <p:cNvPr id="7" name="Oval 6" descr="Each item has an owner icon"/>
+          <p:cNvSpPr/>
+          <p:nvPr/>
+        </p:nvSpPr>
+        <p:spPr>
+          <a:xfrm>
+            <a:off x="640080" y="2843784"/>
+            <a:ext cx="566928" cy="566928"/>
+          </a:xfrm>
+          <a:prstGeom prst="ellipse">
+            <a:avLst/>
+          </a:prstGeom>
+          <a:solidFill>
+            <a:srgbClr val="0E4D33"/>
+          </a:solidFill>
+          <a:ln>
+            <a:noFill/>
+          </a:ln>
+          <a:effectLst/>
+        </p:spPr>
+        <p:style>
+          <a:lnRef idx="1">
+            <a:schemeClr val="accent1"/>
+          </a:lnRef>
+          <a:fillRef idx="3">
+            <a:schemeClr val="accent1"/>
+          </a:fillRef>
+          <a:effectRef idx="2">
+            <a:schemeClr val="accent1"/>
+          </a:effectRef>
+          <a:fontRef idx="minor">
+            <a:schemeClr val="lt1"/>
+          </a:fontRef>
+        </p:style>
+        <p:txBody>
+          <a:bodyPr rtlCol="0" anchor="ctr" lIns="0" rIns="0" tIns="0" bIns="0"/>
+          <a:lstStyle/>
+          <a:p>
+            <a:pPr algn="ctr"/>
+            <a:r>
+              <a:rPr sz="1600" b="1">
+                <a:solidFill>
+                  <a:srgbClr val="FFFFFF"/>
+                </a:solidFill>
+                <a:latin typeface="Calibri"/>
+              </a:rPr>
+              <a:t>👤</a:t>
+            </a:r>
+          </a:p>
+        </p:txBody>
+      </p:sp>
+      <p:sp>
+        <p:nvSpPr>
+          <p:cNvPr id="8" name="TextBox 7" descr="Each item has an owner"/>
+          <p:cNvSpPr txBox="1"/>
+          <p:nvPr/>
+        </p:nvSpPr>
+        <p:spPr>
+          <a:xfrm>
+            <a:off x="1417320" y="2788920"/>
+            <a:ext cx="10241280" cy="1078992"/>
+          </a:xfrm>
+          <a:prstGeom prst="rect">
+            <a:avLst/>
+          </a:prstGeom>
+          <a:noFill/>
+        </p:spPr>
+        <p:txBody>
+          <a:bodyPr wrap="square">
+            <a:spAutoFit/>
+          </a:bodyPr>
+          <a:lstStyle/>
+          <a:p>
+            <a:pPr algn="l">
+              <a:spcAft>
+                <a:spcPts val="200"/>
+              </a:spcAft>
+            </a:pPr>
+            <a:r>
+              <a:rPr sz="1650" b="1" i="0">
+                <a:solidFill>
+                  <a:srgbClr val="0E4D33"/>
+                </a:solidFill>
+                <a:latin typeface="Cambria"/>
+              </a:rPr>
+              <a:t>Each item has an owner</a:t>
+            </a:r>
+          </a:p>
+          <a:p>
+            <a:pPr algn="l">
+              <a:spcAft>
+                <a:spcPts val="0"/>
+              </a:spcAft>
+            </a:pPr>
+            <a:r>
+              <a:rPr sz="1550" b="0" i="0">
+                <a:solidFill>
+                  <a:srgbClr val="212A26"/>
+                </a:solidFill>
+                <a:latin typeface="Calibri"/>
+              </a:rPr>
+              <a:t>The person who presents, frames the decision, and captures the result.</a:t>
+            </a:r>
+          </a:p>
+        </p:txBody>
+      </p:sp>
+      <p:sp>
+        <p:nvSpPr>
+          <p:cNvPr id="9" name="Oval 8" descr="Each item has a time box icon"/>
+          <p:cNvSpPr/>
+          <p:nvPr/>
+        </p:nvSpPr>
+        <p:spPr>
+          <a:xfrm>
+            <a:off x="640080" y="4032504"/>
+            <a:ext cx="566928" cy="566928"/>
+          </a:xfrm>
+          <a:prstGeom prst="ellipse">
+            <a:avLst/>
+          </a:prstGeom>
+          <a:solidFill>
+            <a:srgbClr val="0E4D33"/>
+          </a:solidFill>
+          <a:ln>
+            <a:noFill/>
+          </a:ln>
+          <a:effectLst/>
+        </p:spPr>
+        <p:style>
+          <a:lnRef idx="1">
+            <a:schemeClr val="accent1"/>
+          </a:lnRef>
+          <a:fillRef idx="3">
+            <a:schemeClr val="accent1"/>
+          </a:fillRef>
+          <a:effectRef idx="2">
+            <a:schemeClr val="accent1"/>
+          </a:effectRef>
+          <a:fontRef idx="minor">
+            <a:schemeClr val="lt1"/>
+          </a:fontRef>
+        </p:style>
+        <p:txBody>
+          <a:bodyPr rtlCol="0" anchor="ctr" lIns="0" rIns="0" tIns="0" bIns="0"/>
+          <a:lstStyle/>
+          <a:p>
+            <a:pPr algn="ctr"/>
+            <a:r>
+              <a:rPr sz="1600" b="1">
+                <a:solidFill>
+                  <a:srgbClr val="FFFFFF"/>
+                </a:solidFill>
+                <a:latin typeface="Calibri"/>
+              </a:rPr>
+              <a:t>⏱</a:t>
+            </a:r>
+          </a:p>
+        </p:txBody>
+      </p:sp>
+      <p:sp>
+        <p:nvSpPr>
+          <p:cNvPr id="10" name="TextBox 9" descr="Each item has a time box"/>
+          <p:cNvSpPr txBox="1"/>
+          <p:nvPr/>
+        </p:nvSpPr>
+        <p:spPr>
+          <a:xfrm>
+            <a:off x="1417320" y="3977640"/>
+            <a:ext cx="10241280" cy="1078992"/>
+          </a:xfrm>
+          <a:prstGeom prst="rect">
+            <a:avLst/>
+          </a:prstGeom>
+          <a:noFill/>
+        </p:spPr>
+        <p:txBody>
+          <a:bodyPr wrap="square">
+            <a:spAutoFit/>
+          </a:bodyPr>
+          <a:lstStyle/>
+          <a:p>
+            <a:pPr algn="l">
+              <a:spcAft>
+                <a:spcPts val="200"/>
+              </a:spcAft>
+            </a:pPr>
+            <a:r>
+              <a:rPr sz="1650" b="1" i="0">
+                <a:solidFill>
+                  <a:srgbClr val="0E4D33"/>
+                </a:solidFill>
+                <a:latin typeface="Cambria"/>
+              </a:rPr>
+              <a:t>Each item has a time box</a:t>
+            </a:r>
+          </a:p>
+          <a:p>
+            <a:pPr algn="l">
+              <a:spcAft>
+                <a:spcPts val="0"/>
+              </a:spcAft>
+            </a:pPr>
+            <a:r>
+              <a:rPr sz="1550" b="0" i="0">
+                <a:solidFill>
+                  <a:srgbClr val="212A26"/>
+                </a:solidFill>
+                <a:latin typeface="Calibri"/>
+              </a:rPr>
+              <a:t>Ten minutes on item one is a promise to items two and three.</a:t>
+            </a:r>
+          </a:p>
+        </p:txBody>
+      </p:sp>
+      <p:sp>
+        <p:nvSpPr>
+          <p:cNvPr id="11" name="Oval 10" descr="Pre-reads attached, expectations stated icon"/>
+          <p:cNvSpPr/>
+          <p:nvPr/>
+        </p:nvSpPr>
+        <p:spPr>
+          <a:xfrm>
+            <a:off x="640080" y="5221224"/>
+            <a:ext cx="566928" cy="566928"/>
+          </a:xfrm>
+          <a:prstGeom prst="ellipse">
+            <a:avLst/>
+          </a:prstGeom>
+          <a:solidFill>
+            <a:srgbClr val="0E4D33"/>
+          </a:solidFill>
+          <a:ln>
+            <a:noFill/>
+          </a:ln>
+          <a:effectLst/>
+        </p:spPr>
+        <p:style>
+          <a:lnRef idx="1">
+            <a:schemeClr val="accent1"/>
+          </a:lnRef>
+          <a:fillRef idx="3">
+            <a:schemeClr val="accent1"/>
+          </a:fillRef>
+          <a:effectRef idx="2">
+            <a:schemeClr val="accent1"/>
+          </a:effectRef>
+          <a:fontRef idx="minor">
+            <a:schemeClr val="lt1"/>
+          </a:fontRef>
+        </p:style>
+        <p:txBody>
+          <a:bodyPr rtlCol="0" anchor="ctr" lIns="0" rIns="0" tIns="0" bIns="0"/>
+          <a:lstStyle/>
+          <a:p>
+            <a:pPr algn="ctr"/>
+            <a:r>
+              <a:rPr sz="1600" b="1">
+                <a:solidFill>
+                  <a:srgbClr val="FFFFFF"/>
+                </a:solidFill>
+                <a:latin typeface="Calibri"/>
+              </a:rPr>
+              <a:t>📎</a:t>
+            </a:r>
+          </a:p>
+        </p:txBody>
+      </p:sp>
+      <p:sp>
+        <p:nvSpPr>
+          <p:cNvPr id="12" name="TextBox 11" descr="Pre-reads attached, expectations stated"/>
+          <p:cNvSpPr txBox="1"/>
+          <p:nvPr/>
+        </p:nvSpPr>
+        <p:spPr>
+          <a:xfrm>
+            <a:off x="1417320" y="5166360"/>
+            <a:ext cx="10241280" cy="1078992"/>
+          </a:xfrm>
+          <a:prstGeom prst="rect">
+            <a:avLst/>
+          </a:prstGeom>
+          <a:noFill/>
+        </p:spPr>
+        <p:txBody>
+          <a:bodyPr wrap="square">
+            <a:spAutoFit/>
+          </a:bodyPr>
+          <a:lstStyle/>
+          <a:p>
+            <a:pPr algn="l">
+              <a:spcAft>
+                <a:spcPts val="200"/>
+              </a:spcAft>
+            </a:pPr>
+            <a:r>
+              <a:rPr sz="1650" b="1" i="0">
+                <a:solidFill>
+                  <a:srgbClr val="0E4D33"/>
+                </a:solidFill>
+                <a:latin typeface="Cambria"/>
+              </a:rPr>
+              <a:t>Pre-reads attached, expectations stated</a:t>
+            </a:r>
+          </a:p>
+          <a:p>
+            <a:pPr algn="l">
+              <a:spcAft>
+                <a:spcPts val="0"/>
+              </a:spcAft>
+            </a:pPr>
+            <a:r>
+              <a:rPr sz="1550" b="0" i="0">
+                <a:solidFill>
+                  <a:srgbClr val="212A26"/>
+                </a:solidFill>
+                <a:latin typeface="Calibri"/>
+              </a:rPr>
+              <a:t>'Read the one-pager before we meet; we will not walk through it live.'</a:t>
+            </a:r>
+          </a:p>
+        </p:txBody>
+      </p:sp>
+    </p:spTree>
+  </p:cSld>
+  <p:clrMapOvr>
+    <a:masterClrMapping/>
+  </p:clrMapOvr>
+</p:sld>
+</file>
+
+<file path=ppt/slides/slide26.xml><?xml version="1.0" encoding="utf-8"?>
+<p:sld xmlns:a="http://schemas.openxmlformats.org/drawingml/2006/main" xmlns:p="http://schemas.openxmlformats.org/presentationml/2006/main" xmlns:r="http://schemas.openxmlformats.org/officeDocument/2006/relationships">
+  <p:cSld>
+    <p:bg>
+      <p:bgPr>
+        <a:solidFill>
+          <a:srgbClr val="FFFFFF"/>
+        </a:solidFill>
+        <a:effectLst/>
+      </p:bgPr>
+    </p:bg>
+    <p:spTree>
+      <p:nvGrpSpPr>
+        <p:cNvPr id="1" name=""/>
+        <p:cNvGrpSpPr/>
+        <p:nvPr/>
+      </p:nvGrpSpPr>
+      <p:grpSpPr/>
+      <p:sp>
+        <p:nvSpPr>
+          <p:cNvPr id="2" name="Title 1" descr="Slide title: After the meeting: the two-line record"/>
+          <p:cNvSpPr>
+            <a:spLocks noGrp="1"/>
+          </p:cNvSpPr>
+          <p:nvPr>
+            <p:ph type="title"/>
+          </p:nvPr>
+        </p:nvSpPr>
+        <p:spPr>
+          <a:xfrm>
+            <a:off x="502920" y="411480"/>
+            <a:ext cx="11155680" cy="914400"/>
+          </a:xfrm>
+        </p:spPr>
+        <p:txBody>
+          <a:bodyPr wrap="square"/>
+          <a:lstStyle/>
+          <a:p>
+            <a:pPr algn="l"/>
+            <a:r>
+              <a:rPr sz="3200" b="1">
+                <a:solidFill>
+                  <a:srgbClr val="0E4D33"/>
+                </a:solidFill>
+                <a:latin typeface="Cambria"/>
+              </a:rPr>
+              <a:t>After the meeting: the two-line record</a:t>
+            </a:r>
+          </a:p>
+        </p:txBody>
+      </p:sp>
+      <p:sp>
+        <p:nvSpPr>
+          <p:cNvPr id="3" name="TextBox 2" descr="Footer: BADM 225 · Chapter 5"/>
+          <p:cNvSpPr txBox="1"/>
+          <p:nvPr/>
+        </p:nvSpPr>
+        <p:spPr>
+          <a:xfrm>
+            <a:off x="502920" y="6446520"/>
+            <a:ext cx="5486400" cy="320040"/>
+          </a:xfrm>
+          <a:prstGeom prst="rect">
+            <a:avLst/>
+          </a:prstGeom>
+          <a:noFill/>
+        </p:spPr>
+        <p:txBody>
+          <a:bodyPr wrap="none">
+            <a:spAutoFit/>
+          </a:bodyPr>
+          <a:lstStyle/>
+          <a:p>
+            <a:r>
+              <a:rPr sz="1000">
+                <a:solidFill>
+                  <a:srgbClr val="5E6B64"/>
+                </a:solidFill>
+                <a:latin typeface="Calibri"/>
+              </a:rPr>
+              <a:t>BADM 225 · Chapter 5</a:t>
+            </a:r>
+          </a:p>
+        </p:txBody>
+      </p:sp>
+      <p:sp>
+        <p:nvSpPr>
+          <p:cNvPr id="4" name="TextBox 3" descr="Slide number 26"/>
+          <p:cNvSpPr txBox="1"/>
+          <p:nvPr/>
+        </p:nvSpPr>
+        <p:spPr>
+          <a:xfrm>
+            <a:off x="11247120" y="6446520"/>
+            <a:ext cx="640080" cy="320040"/>
+          </a:xfrm>
+          <a:prstGeom prst="rect">
+            <a:avLst/>
+          </a:prstGeom>
+          <a:noFill/>
+        </p:spPr>
+        <p:txBody>
+          <a:bodyPr wrap="none">
+            <a:spAutoFit/>
+          </a:bodyPr>
+          <a:lstStyle/>
+          <a:p>
+            <a:pPr algn="r"/>
+            <a:r>
+              <a:rPr sz="1000">
+                <a:solidFill>
+                  <a:srgbClr val="5E6B64"/>
+                </a:solidFill>
+                <a:latin typeface="Calibri"/>
+              </a:rPr>
+              <a:t>26</a:t>
+            </a:r>
+          </a:p>
+        </p:txBody>
+      </p:sp>
+      <p:sp>
+        <p:nvSpPr>
+          <p:cNvPr id="5" name="TextBox 4" descr="Key points"/>
+          <p:cNvSpPr txBox="1"/>
+          <p:nvPr/>
+        </p:nvSpPr>
+        <p:spPr>
+          <a:xfrm>
+            <a:off x="548640" y="1554480"/>
+            <a:ext cx="11064240" cy="4663440"/>
+          </a:xfrm>
+          <a:prstGeom prst="rect">
+            <a:avLst/>
+          </a:prstGeom>
+          <a:noFill/>
+        </p:spPr>
+        <p:txBody>
+          <a:bodyPr wrap="square">
+            <a:spAutoFit/>
+          </a:bodyPr>
+          <a:lstStyle/>
+          <a:p>
+            <a:pPr algn="l">
+              <a:spcAft>
+                <a:spcPts val="1200"/>
+              </a:spcAft>
+            </a:pPr>
+            <a:r>
+              <a:rPr sz="1700">
+                <a:solidFill>
+                  <a:srgbClr val="8A6410"/>
+                </a:solidFill>
+                <a:latin typeface="Calibri"/>
+              </a:rPr>
+              <a:t>▪  </a:t>
+            </a:r>
+            <a:r>
+              <a:rPr sz="1700" b="1">
+                <a:solidFill>
+                  <a:srgbClr val="0E4D33"/>
+                </a:solidFill>
+                <a:latin typeface="Calibri"/>
+              </a:rPr>
+              <a:t>Decisions + owners + dates.  </a:t>
+            </a:r>
+            <a:r>
+              <a:rPr sz="1700" b="0" i="0">
+                <a:solidFill>
+                  <a:srgbClr val="212A26"/>
+                </a:solidFill>
+                <a:latin typeface="Calibri"/>
+              </a:rPr>
+              <a:t>'Decided: renew TechServe. Maya drafts terms by 7/12; Sam reviews by 7/15.' That's the whole document.</a:t>
+            </a:r>
+          </a:p>
+          <a:p>
+            <a:pPr algn="l">
+              <a:spcAft>
+                <a:spcPts val="1200"/>
+              </a:spcAft>
+            </a:pPr>
+            <a:r>
+              <a:rPr sz="1700">
+                <a:solidFill>
+                  <a:srgbClr val="8A6410"/>
+                </a:solidFill>
+                <a:latin typeface="Calibri"/>
+              </a:rPr>
+              <a:t>▪  </a:t>
+            </a:r>
+            <a:r>
+              <a:rPr sz="1700" b="1">
+                <a:solidFill>
+                  <a:srgbClr val="0E4D33"/>
+                </a:solidFill>
+                <a:latin typeface="Calibri"/>
+              </a:rPr>
+              <a:t>Send it within the hour,  </a:t>
+            </a:r>
+            <a:r>
+              <a:rPr sz="1700" b="0" i="0">
+                <a:solidFill>
+                  <a:srgbClr val="212A26"/>
+                </a:solidFill>
+                <a:latin typeface="Calibri"/>
+              </a:rPr>
+              <a:t>to attendees AND the informed-but-absent — memory of a meeting has a half-life measured in minutes.</a:t>
+            </a:r>
+          </a:p>
+          <a:p>
+            <a:pPr algn="l">
+              <a:spcAft>
+                <a:spcPts val="1200"/>
+              </a:spcAft>
+            </a:pPr>
+            <a:r>
+              <a:rPr sz="1700">
+                <a:solidFill>
+                  <a:srgbClr val="8A6410"/>
+                </a:solidFill>
+                <a:latin typeface="Calibri"/>
+              </a:rPr>
+              <a:t>▪  </a:t>
+            </a:r>
+            <a:r>
+              <a:rPr sz="1700" b="1">
+                <a:solidFill>
+                  <a:srgbClr val="0E4D33"/>
+                </a:solidFill>
+                <a:latin typeface="Calibri"/>
+              </a:rPr>
+              <a:t>Post it where the team decides things,  </a:t>
+            </a:r>
+            <a:r>
+              <a:rPr sz="1700" b="0" i="0">
+                <a:solidFill>
+                  <a:srgbClr val="212A26"/>
+                </a:solidFill>
+                <a:latin typeface="Calibri"/>
+              </a:rPr>
+              <a:t>not just in one inbox: the channel, the wiki, the project page.</a:t>
+            </a:r>
+          </a:p>
+          <a:p>
+            <a:pPr algn="l">
+              <a:spcAft>
+                <a:spcPts val="1200"/>
+              </a:spcAft>
+            </a:pPr>
+            <a:r>
+              <a:rPr sz="1700">
+                <a:solidFill>
+                  <a:srgbClr val="8A6410"/>
+                </a:solidFill>
+                <a:latin typeface="Calibri"/>
+              </a:rPr>
+              <a:t>▪  </a:t>
+            </a:r>
+            <a:r>
+              <a:rPr sz="1700" b="1">
+                <a:solidFill>
+                  <a:srgbClr val="0E4D33"/>
+                </a:solidFill>
+                <a:latin typeface="Calibri"/>
+              </a:rPr>
+              <a:t>Unrecorded decisions get re-decided.  </a:t>
+            </a:r>
+            <a:r>
+              <a:rPr sz="1700" b="0" i="0">
+                <a:solidFill>
+                  <a:srgbClr val="212A26"/>
+                </a:solidFill>
+                <a:latin typeface="Calibri"/>
+              </a:rPr>
+              <a:t>The three-minute summary is cheaper than the second meeting to settle what the first one settled.</a:t>
+            </a:r>
+          </a:p>
+        </p:txBody>
+      </p:sp>
+    </p:spTree>
+  </p:cSld>
+  <p:clrMapOvr>
+    <a:masterClrMapping/>
+  </p:clrMapOvr>
+</p:sld>
+</file>
+
+<file path=ppt/slides/slide27.xml><?xml version="1.0" encoding="utf-8"?>
+<p:sld xmlns:a="http://schemas.openxmlformats.org/drawingml/2006/main" xmlns:p="http://schemas.openxmlformats.org/presentationml/2006/main" xmlns:r="http://schemas.openxmlformats.org/officeDocument/2006/relationships">
+  <p:cSld>
+    <p:bg>
+      <p:bgPr>
+        <a:solidFill>
+          <a:srgbClr val="FFFFFF"/>
+        </a:solidFill>
+        <a:effectLst/>
+      </p:bgPr>
+    </p:bg>
+    <p:spTree>
+      <p:nvGrpSpPr>
+        <p:cNvPr id="1" name=""/>
+        <p:cNvGrpSpPr/>
+        <p:nvPr/>
+      </p:nvGrpSpPr>
+      <p:grpSpPr/>
+      <p:sp>
+        <p:nvSpPr>
+          <p:cNvPr id="2" name="Title 1" descr="Slide title: Case: the meeting that should have been a message"/>
+          <p:cNvSpPr>
+            <a:spLocks noGrp="1"/>
+          </p:cNvSpPr>
+          <p:nvPr>
+            <p:ph type="title"/>
+          </p:nvPr>
+        </p:nvSpPr>
+        <p:spPr>
+          <a:xfrm>
+            <a:off x="502920" y="411480"/>
+            <a:ext cx="11155680" cy="914400"/>
+          </a:xfrm>
+        </p:spPr>
+        <p:txBody>
+          <a:bodyPr wrap="square"/>
+          <a:lstStyle/>
+          <a:p>
+            <a:pPr algn="l"/>
+            <a:r>
+              <a:rPr sz="3200" b="1">
+                <a:solidFill>
+                  <a:srgbClr val="0E4D33"/>
+                </a:solidFill>
+                <a:latin typeface="Cambria"/>
+              </a:rPr>
+              <a:t>Case: the meeting that should have been a message</a:t>
+            </a:r>
+          </a:p>
+        </p:txBody>
+      </p:sp>
+      <p:sp>
+        <p:nvSpPr>
+          <p:cNvPr id="3" name="TextBox 2" descr="Footer: BADM 225 · Chapter 5"/>
+          <p:cNvSpPr txBox="1"/>
+          <p:nvPr/>
+        </p:nvSpPr>
+        <p:spPr>
+          <a:xfrm>
+            <a:off x="502920" y="6446520"/>
+            <a:ext cx="5486400" cy="320040"/>
+          </a:xfrm>
+          <a:prstGeom prst="rect">
+            <a:avLst/>
+          </a:prstGeom>
+          <a:noFill/>
+        </p:spPr>
+        <p:txBody>
+          <a:bodyPr wrap="none">
+            <a:spAutoFit/>
+          </a:bodyPr>
+          <a:lstStyle/>
+          <a:p>
+            <a:r>
+              <a:rPr sz="1000">
+                <a:solidFill>
+                  <a:srgbClr val="5E6B64"/>
+                </a:solidFill>
+                <a:latin typeface="Calibri"/>
+              </a:rPr>
+              <a:t>BADM 225 · Chapter 5</a:t>
+            </a:r>
+          </a:p>
+        </p:txBody>
+      </p:sp>
+      <p:sp>
+        <p:nvSpPr>
+          <p:cNvPr id="4" name="TextBox 3" descr="Slide number 27"/>
+          <p:cNvSpPr txBox="1"/>
+          <p:nvPr/>
+        </p:nvSpPr>
+        <p:spPr>
+          <a:xfrm>
+            <a:off x="11247120" y="6446520"/>
+            <a:ext cx="640080" cy="320040"/>
+          </a:xfrm>
+          <a:prstGeom prst="rect">
+            <a:avLst/>
+          </a:prstGeom>
+          <a:noFill/>
+        </p:spPr>
+        <p:txBody>
+          <a:bodyPr wrap="none">
+            <a:spAutoFit/>
+          </a:bodyPr>
+          <a:lstStyle/>
+          <a:p>
+            <a:pPr algn="r"/>
+            <a:r>
+              <a:rPr sz="1000">
+                <a:solidFill>
+                  <a:srgbClr val="5E6B64"/>
+                </a:solidFill>
+                <a:latin typeface="Calibri"/>
+              </a:rPr>
+              <a:t>27</a:t>
+            </a:r>
+          </a:p>
+        </p:txBody>
+      </p:sp>
+      <p:sp>
+        <p:nvSpPr>
+          <p:cNvPr id="5" name="TextBox 4" descr="Key points"/>
+          <p:cNvSpPr txBox="1"/>
+          <p:nvPr/>
+        </p:nvSpPr>
+        <p:spPr>
+          <a:xfrm>
+            <a:off x="548640" y="1554480"/>
+            <a:ext cx="11064240" cy="4663440"/>
+          </a:xfrm>
+          <a:prstGeom prst="rect">
+            <a:avLst/>
+          </a:prstGeom>
+          <a:noFill/>
+        </p:spPr>
+        <p:txBody>
+          <a:bodyPr wrap="square">
+            <a:spAutoFit/>
+          </a:bodyPr>
+          <a:lstStyle/>
+          <a:p>
+            <a:pPr algn="l">
+              <a:spcAft>
+                <a:spcPts val="1200"/>
+              </a:spcAft>
+            </a:pPr>
+            <a:r>
+              <a:rPr sz="1700">
+                <a:solidFill>
+                  <a:srgbClr val="8A6410"/>
+                </a:solidFill>
+                <a:latin typeface="Calibri"/>
+              </a:rPr>
+              <a:t>▪  </a:t>
+            </a:r>
+            <a:r>
+              <a:rPr sz="1700" b="1">
+                <a:solidFill>
+                  <a:srgbClr val="0E4D33"/>
+                </a:solidFill>
+                <a:latin typeface="Calibri"/>
+              </a:rPr>
+              <a:t>The standing Thursday review:  </a:t>
+            </a:r>
+            <a:r>
+              <a:rPr sz="1700" b="0" i="0">
+                <a:solidFill>
+                  <a:srgbClr val="212A26"/>
+                </a:solidFill>
+                <a:latin typeface="Calibri"/>
+              </a:rPr>
+              <a:t>eight people, one hour, status read aloud from slides nobody saw in advance.</a:t>
+            </a:r>
+          </a:p>
+          <a:p>
+            <a:pPr algn="l">
+              <a:spcAft>
+                <a:spcPts val="1200"/>
+              </a:spcAft>
+            </a:pPr>
+            <a:r>
+              <a:rPr sz="1700">
+                <a:solidFill>
+                  <a:srgbClr val="8A6410"/>
+                </a:solidFill>
+                <a:latin typeface="Calibri"/>
+              </a:rPr>
+              <a:t>▪  </a:t>
+            </a:r>
+            <a:r>
+              <a:rPr sz="1700" b="1">
+                <a:solidFill>
+                  <a:srgbClr val="0E4D33"/>
+                </a:solidFill>
+                <a:latin typeface="Calibri"/>
+              </a:rPr>
+              <a:t>The math:  </a:t>
+            </a:r>
+            <a:r>
+              <a:rPr sz="1700" b="0" i="0">
+                <a:solidFill>
+                  <a:srgbClr val="212A26"/>
+                </a:solidFill>
+                <a:latin typeface="Calibri"/>
+              </a:rPr>
+              <a:t>8 people × 1 hour × 50 weeks = 400 hours a year — reading aloud what a three-line status email carries in 30 seconds.</a:t>
+            </a:r>
+          </a:p>
+          <a:p>
+            <a:pPr algn="l">
+              <a:spcAft>
+                <a:spcPts val="1200"/>
+              </a:spcAft>
+            </a:pPr>
+            <a:r>
+              <a:rPr sz="1700">
+                <a:solidFill>
+                  <a:srgbClr val="8A6410"/>
+                </a:solidFill>
+                <a:latin typeface="Calibri"/>
+              </a:rPr>
+              <a:t>▪  </a:t>
+            </a:r>
+            <a:r>
+              <a:rPr sz="1700" b="1">
+                <a:solidFill>
+                  <a:srgbClr val="0E4D33"/>
+                </a:solidFill>
+                <a:latin typeface="Calibri"/>
+              </a:rPr>
+              <a:t>The repair:  </a:t>
+            </a:r>
+            <a:r>
+              <a:rPr sz="1700" b="0" i="0">
+                <a:solidFill>
+                  <a:srgbClr val="212A26"/>
+                </a:solidFill>
+                <a:latin typeface="Calibri"/>
+              </a:rPr>
+              <a:t>written status by Wednesday noon; Thursday shrinks to 20 minutes for the two items that need discussion.</a:t>
+            </a:r>
+          </a:p>
+          <a:p>
+            <a:pPr algn="l">
+              <a:spcAft>
+                <a:spcPts val="1200"/>
+              </a:spcAft>
+            </a:pPr>
+            <a:r>
+              <a:rPr sz="1700">
+                <a:solidFill>
+                  <a:srgbClr val="8A6410"/>
+                </a:solidFill>
+                <a:latin typeface="Calibri"/>
+              </a:rPr>
+              <a:t>▪  </a:t>
+            </a:r>
+            <a:r>
+              <a:rPr sz="1700" b="1">
+                <a:solidFill>
+                  <a:srgbClr val="0E4D33"/>
+                </a:solidFill>
+                <a:latin typeface="Calibri"/>
+              </a:rPr>
+              <a:t>The test that generalizes:  </a:t>
+            </a:r>
+            <a:r>
+              <a:rPr sz="1700" b="0" i="0">
+                <a:solidFill>
+                  <a:srgbClr val="212A26"/>
+                </a:solidFill>
+                <a:latin typeface="Calibri"/>
+              </a:rPr>
+              <a:t>if information flows one way and no decision is made, it's a message wearing a meeting costume.</a:t>
+            </a:r>
+          </a:p>
+        </p:txBody>
+      </p:sp>
+    </p:spTree>
+  </p:cSld>
+  <p:clrMapOvr>
+    <a:masterClrMapping/>
+  </p:clrMapOvr>
+</p:sld>
+</file>
+
+<file path=ppt/slides/slide28.xml><?xml version="1.0" encoding="utf-8"?>
+<p:sld xmlns:a="http://schemas.openxmlformats.org/drawingml/2006/main" xmlns:p="http://schemas.openxmlformats.org/presentationml/2006/main" xmlns:r="http://schemas.openxmlformats.org/officeDocument/2006/relationships">
+  <p:cSld>
+    <p:bg>
+      <p:bgPr>
+        <a:solidFill>
+          <a:srgbClr val="0E4D33"/>
+        </a:solidFill>
+        <a:effectLst/>
+      </p:bgPr>
+    </p:bg>
+    <p:spTree>
+      <p:nvGrpSpPr>
+        <p:cNvPr id="1" name=""/>
+        <p:cNvGrpSpPr/>
+        <p:nvPr/>
+      </p:nvGrpSpPr>
+      <p:grpSpPr/>
+      <p:sp>
+        <p:nvSpPr>
+          <p:cNvPr id="2" name="Title 1" descr="Slide title: Working in shared documents"/>
+          <p:cNvSpPr>
+            <a:spLocks noGrp="1"/>
+          </p:cNvSpPr>
+          <p:nvPr>
+            <p:ph type="title"/>
+          </p:nvPr>
+        </p:nvSpPr>
+        <p:spPr>
+          <a:xfrm>
+            <a:off x="822960" y="2834640"/>
+            <a:ext cx="10515600" cy="914400"/>
+          </a:xfrm>
+        </p:spPr>
+        <p:txBody>
+          <a:bodyPr wrap="square"/>
+          <a:lstStyle/>
+          <a:p>
+            <a:pPr algn="l"/>
+            <a:r>
+              <a:rPr sz="4000" b="1">
+                <a:solidFill>
+                  <a:srgbClr val="FFFFFF"/>
+                </a:solidFill>
+                <a:latin typeface="Cambria"/>
+              </a:rPr>
+              <a:t>Working in shared documents</a:t>
+            </a:r>
+          </a:p>
+        </p:txBody>
+      </p:sp>
+      <p:sp>
+        <p:nvSpPr>
+          <p:cNvPr id="3" name="TextBox 2" descr="Section number 07"/>
+          <p:cNvSpPr txBox="1"/>
+          <p:nvPr/>
+        </p:nvSpPr>
+        <p:spPr>
+          <a:xfrm>
+            <a:off x="822960" y="1188720"/>
+            <a:ext cx="2743200" cy="1463040"/>
+          </a:xfrm>
+          <a:prstGeom prst="rect">
+            <a:avLst/>
+          </a:prstGeom>
+          <a:noFill/>
+        </p:spPr>
+        <p:txBody>
+          <a:bodyPr wrap="square">
+            <a:spAutoFit/>
+          </a:bodyPr>
+          <a:lstStyle/>
+          <a:p>
+            <a:pPr algn="l">
+              <a:spcAft>
+                <a:spcPts val="800"/>
+              </a:spcAft>
+            </a:pPr>
+            <a:r>
+              <a:rPr sz="8000" b="1" i="0">
+                <a:solidFill>
+                  <a:srgbClr val="C9931A"/>
+                </a:solidFill>
+                <a:latin typeface="Cambria"/>
+              </a:rPr>
+              <a:t>07</a:t>
+            </a:r>
+          </a:p>
+        </p:txBody>
+      </p:sp>
+      <p:sp>
+        <p:nvSpPr>
+          <p:cNvPr id="4" name="TextBox 3" descr="Section note"/>
+          <p:cNvSpPr txBox="1"/>
+          <p:nvPr/>
+        </p:nvSpPr>
+        <p:spPr>
+          <a:xfrm>
+            <a:off x="822960" y="4023360"/>
+            <a:ext cx="9601200" cy="1097280"/>
+          </a:xfrm>
+          <a:prstGeom prst="rect">
+            <a:avLst/>
+          </a:prstGeom>
+          <a:noFill/>
+        </p:spPr>
+        <p:txBody>
+          <a:bodyPr wrap="square">
+            <a:spAutoFit/>
+          </a:bodyPr>
+          <a:lstStyle/>
+          <a:p>
+            <a:pPr algn="l">
+              <a:spcAft>
+                <a:spcPts val="800"/>
+              </a:spcAft>
+            </a:pPr>
+            <a:r>
+              <a:rPr sz="1700" b="0" i="0">
+                <a:solidFill>
+                  <a:srgbClr val="EAF1EB"/>
+                </a:solidFill>
+                <a:latin typeface="Calibri"/>
+              </a:rPr>
+              <a:t>The document is the meeting room now — behave accordingly.</a:t>
+            </a:r>
+          </a:p>
+        </p:txBody>
+      </p:sp>
+      <p:sp>
+        <p:nvSpPr>
+          <p:cNvPr id="5" name="TextBox 4" descr="Footer: BADM 225 · Chapter 5"/>
+          <p:cNvSpPr txBox="1"/>
+          <p:nvPr/>
+        </p:nvSpPr>
+        <p:spPr>
+          <a:xfrm>
+            <a:off x="502920" y="6446520"/>
+            <a:ext cx="5486400" cy="320040"/>
+          </a:xfrm>
+          <a:prstGeom prst="rect">
+            <a:avLst/>
+          </a:prstGeom>
+          <a:noFill/>
+        </p:spPr>
+        <p:txBody>
+          <a:bodyPr wrap="none">
+            <a:spAutoFit/>
+          </a:bodyPr>
+          <a:lstStyle/>
+          <a:p>
+            <a:r>
+              <a:rPr sz="1000">
+                <a:solidFill>
+                  <a:srgbClr val="5E6B64"/>
+                </a:solidFill>
+                <a:latin typeface="Calibri"/>
+              </a:rPr>
+              <a:t>BADM 225 · Chapter 5</a:t>
+            </a:r>
+          </a:p>
+        </p:txBody>
+      </p:sp>
+      <p:sp>
+        <p:nvSpPr>
+          <p:cNvPr id="6" name="TextBox 5" descr="Slide number 28"/>
+          <p:cNvSpPr txBox="1"/>
+          <p:nvPr/>
+        </p:nvSpPr>
+        <p:spPr>
+          <a:xfrm>
+            <a:off x="11247120" y="6446520"/>
+            <a:ext cx="640080" cy="320040"/>
+          </a:xfrm>
+          <a:prstGeom prst="rect">
+            <a:avLst/>
+          </a:prstGeom>
+          <a:noFill/>
+        </p:spPr>
+        <p:txBody>
+          <a:bodyPr wrap="none">
+            <a:spAutoFit/>
+          </a:bodyPr>
+          <a:lstStyle/>
+          <a:p>
+            <a:pPr algn="r"/>
+            <a:r>
+              <a:rPr sz="1000">
+                <a:solidFill>
+                  <a:srgbClr val="5E6B64"/>
+                </a:solidFill>
+                <a:latin typeface="Calibri"/>
+              </a:rPr>
+              <a:t>28</a:t>
+            </a:r>
+          </a:p>
+        </p:txBody>
+      </p:sp>
+    </p:spTree>
+  </p:cSld>
+  <p:clrMapOvr>
+    <a:masterClrMapping/>
+  </p:clrMapOvr>
+</p:sld>
+</file>
+
+<file path=ppt/slides/slide29.xml><?xml version="1.0" encoding="utf-8"?>
+<p:sld xmlns:a="http://schemas.openxmlformats.org/drawingml/2006/main" xmlns:p="http://schemas.openxmlformats.org/presentationml/2006/main" xmlns:r="http://schemas.openxmlformats.org/officeDocument/2006/relationships">
+  <p:cSld>
+    <p:bg>
+      <p:bgPr>
+        <a:solidFill>
+          <a:srgbClr val="FFFFFF"/>
+        </a:solidFill>
+        <a:effectLst/>
+      </p:bgPr>
+    </p:bg>
+    <p:spTree>
+      <p:nvGrpSpPr>
+        <p:cNvPr id="1" name=""/>
+        <p:cNvGrpSpPr/>
+        <p:nvPr/>
+      </p:nvGrpSpPr>
+      <p:grpSpPr/>
+      <p:sp>
+        <p:nvSpPr>
+          <p:cNvPr id="2" name="Title 1" descr="Slide title: Comment etiquette in shared documents"/>
+          <p:cNvSpPr>
+            <a:spLocks noGrp="1"/>
+          </p:cNvSpPr>
+          <p:nvPr>
+            <p:ph type="title"/>
+          </p:nvPr>
+        </p:nvSpPr>
+        <p:spPr>
+          <a:xfrm>
+            <a:off x="502920" y="411480"/>
+            <a:ext cx="11155680" cy="914400"/>
+          </a:xfrm>
+        </p:spPr>
+        <p:txBody>
+          <a:bodyPr wrap="square"/>
+          <a:lstStyle/>
+          <a:p>
+            <a:pPr algn="l"/>
+            <a:r>
+              <a:rPr sz="3200" b="1">
+                <a:solidFill>
+                  <a:srgbClr val="0E4D33"/>
+                </a:solidFill>
+                <a:latin typeface="Cambria"/>
+              </a:rPr>
+              <a:t>Comment etiquette in shared documents</a:t>
+            </a:r>
+          </a:p>
+        </p:txBody>
+      </p:sp>
+      <p:sp>
+        <p:nvSpPr>
+          <p:cNvPr id="3" name="TextBox 2" descr="Footer: BADM 225 · Chapter 5"/>
+          <p:cNvSpPr txBox="1"/>
+          <p:nvPr/>
+        </p:nvSpPr>
+        <p:spPr>
+          <a:xfrm>
+            <a:off x="502920" y="6446520"/>
+            <a:ext cx="5486400" cy="320040"/>
+          </a:xfrm>
+          <a:prstGeom prst="rect">
+            <a:avLst/>
+          </a:prstGeom>
+          <a:noFill/>
+        </p:spPr>
+        <p:txBody>
+          <a:bodyPr wrap="none">
+            <a:spAutoFit/>
+          </a:bodyPr>
+          <a:lstStyle/>
+          <a:p>
+            <a:r>
+              <a:rPr sz="1000">
+                <a:solidFill>
+                  <a:srgbClr val="5E6B64"/>
+                </a:solidFill>
+                <a:latin typeface="Calibri"/>
+              </a:rPr>
+              <a:t>BADM 225 · Chapter 5</a:t>
+            </a:r>
+          </a:p>
+        </p:txBody>
+      </p:sp>
+      <p:sp>
+        <p:nvSpPr>
+          <p:cNvPr id="4" name="TextBox 3" descr="Slide number 29"/>
+          <p:cNvSpPr txBox="1"/>
+          <p:nvPr/>
+        </p:nvSpPr>
+        <p:spPr>
+          <a:xfrm>
+            <a:off x="11247120" y="6446520"/>
+            <a:ext cx="640080" cy="320040"/>
+          </a:xfrm>
+          <a:prstGeom prst="rect">
+            <a:avLst/>
+          </a:prstGeom>
+          <a:noFill/>
+        </p:spPr>
+        <p:txBody>
+          <a:bodyPr wrap="none">
+            <a:spAutoFit/>
+          </a:bodyPr>
+          <a:lstStyle/>
+          <a:p>
+            <a:pPr algn="r"/>
+            <a:r>
+              <a:rPr sz="1000">
+                <a:solidFill>
+                  <a:srgbClr val="5E6B64"/>
+                </a:solidFill>
+                <a:latin typeface="Calibri"/>
+              </a:rPr>
+              <a:t>29</a:t>
+            </a:r>
+          </a:p>
+        </p:txBody>
+      </p:sp>
+      <p:sp>
+        <p:nvSpPr>
+          <p:cNvPr id="5" name="TextBox 4" descr="Key points"/>
+          <p:cNvSpPr txBox="1"/>
+          <p:nvPr/>
+        </p:nvSpPr>
+        <p:spPr>
+          <a:xfrm>
+            <a:off x="548640" y="1554480"/>
+            <a:ext cx="11064240" cy="4663440"/>
+          </a:xfrm>
+          <a:prstGeom prst="rect">
+            <a:avLst/>
+          </a:prstGeom>
+          <a:noFill/>
+        </p:spPr>
+        <p:txBody>
+          <a:bodyPr wrap="square">
+            <a:spAutoFit/>
+          </a:bodyPr>
+          <a:lstStyle/>
+          <a:p>
+            <a:pPr algn="l">
+              <a:spcAft>
+                <a:spcPts val="1200"/>
+              </a:spcAft>
+            </a:pPr>
+            <a:r>
+              <a:rPr sz="1700">
+                <a:solidFill>
+                  <a:srgbClr val="8A6410"/>
+                </a:solidFill>
+                <a:latin typeface="Calibri"/>
+              </a:rPr>
+              <a:t>▪  </a:t>
+            </a:r>
+            <a:r>
+              <a:rPr sz="1700" b="1">
+                <a:solidFill>
+                  <a:srgbClr val="0E4D33"/>
+                </a:solidFill>
+                <a:latin typeface="Calibri"/>
+              </a:rPr>
+              <a:t>Comment on the text, not the author.  </a:t>
+            </a:r>
+            <a:r>
+              <a:rPr sz="1700" b="0" i="0">
+                <a:solidFill>
+                  <a:srgbClr val="212A26"/>
+                </a:solidFill>
+                <a:latin typeface="Calibri"/>
+              </a:rPr>
+              <a:t>'This claim needs a source' — not 'you never cite anything.' (Chapter 4's review rules apply verbatim.)</a:t>
+            </a:r>
+          </a:p>
+          <a:p>
+            <a:pPr algn="l">
+              <a:spcAft>
+                <a:spcPts val="1200"/>
+              </a:spcAft>
+            </a:pPr>
+            <a:r>
+              <a:rPr sz="1700">
+                <a:solidFill>
+                  <a:srgbClr val="8A6410"/>
+                </a:solidFill>
+                <a:latin typeface="Calibri"/>
+              </a:rPr>
+              <a:t>▪  </a:t>
+            </a:r>
+            <a:r>
+              <a:rPr sz="1700" b="1">
+                <a:solidFill>
+                  <a:srgbClr val="0E4D33"/>
+                </a:solidFill>
+                <a:latin typeface="Calibri"/>
+              </a:rPr>
+              <a:t>Make comments resolvable.  </a:t>
+            </a:r>
+            <a:r>
+              <a:rPr sz="1700" b="0" i="0">
+                <a:solidFill>
+                  <a:srgbClr val="212A26"/>
+                </a:solidFill>
+                <a:latin typeface="Calibri"/>
+              </a:rPr>
+              <a:t>A comment is a task: state what would satisfy it, so the writer can do the thing and close it.</a:t>
+            </a:r>
+          </a:p>
+          <a:p>
+            <a:pPr algn="l">
+              <a:spcAft>
+                <a:spcPts val="1200"/>
+              </a:spcAft>
+            </a:pPr>
+            <a:r>
+              <a:rPr sz="1700">
+                <a:solidFill>
+                  <a:srgbClr val="8A6410"/>
+                </a:solidFill>
+                <a:latin typeface="Calibri"/>
+              </a:rPr>
+              <a:t>▪  </a:t>
+            </a:r>
+            <a:r>
+              <a:rPr sz="1700" b="1">
+                <a:solidFill>
+                  <a:srgbClr val="0E4D33"/>
+                </a:solidFill>
+                <a:latin typeface="Calibri"/>
+              </a:rPr>
+              <a:t>Use suggestion mode for wording,  </a:t>
+            </a:r>
+            <a:r>
+              <a:rPr sz="1700" b="0" i="0">
+                <a:solidFill>
+                  <a:srgbClr val="212A26"/>
+                </a:solidFill>
+                <a:latin typeface="Calibri"/>
+              </a:rPr>
+              <a:t>comments for substance. Direct edits to someone else's live draft are drive-by rewrites.</a:t>
+            </a:r>
+          </a:p>
+          <a:p>
+            <a:pPr algn="l">
+              <a:spcAft>
+                <a:spcPts val="1200"/>
+              </a:spcAft>
+            </a:pPr>
+            <a:r>
+              <a:rPr sz="1700">
+                <a:solidFill>
+                  <a:srgbClr val="8A6410"/>
+                </a:solidFill>
+                <a:latin typeface="Calibri"/>
+              </a:rPr>
+              <a:t>▪  </a:t>
+            </a:r>
+            <a:r>
+              <a:rPr sz="1700" b="1">
+                <a:solidFill>
+                  <a:srgbClr val="0E4D33"/>
+                </a:solidFill>
+                <a:latin typeface="Calibri"/>
+              </a:rPr>
+              <a:t>Resolve your own threads.  </a:t>
+            </a:r>
+            <a:r>
+              <a:rPr sz="1700" b="0" i="0">
+                <a:solidFill>
+                  <a:srgbClr val="212A26"/>
+                </a:solidFill>
+                <a:latin typeface="Calibri"/>
+              </a:rPr>
+              <a:t>When your question is answered, close it — a document with 60 open comments is unnavigable.</a:t>
+            </a:r>
+          </a:p>
+          <a:p>
+            <a:pPr algn="l">
+              <a:spcAft>
+                <a:spcPts val="1200"/>
+              </a:spcAft>
+            </a:pPr>
+            <a:r>
+              <a:rPr sz="1700">
+                <a:solidFill>
+                  <a:srgbClr val="8A6410"/>
+                </a:solidFill>
+                <a:latin typeface="Calibri"/>
+              </a:rPr>
+              <a:t>▪  </a:t>
+            </a:r>
+            <a:r>
+              <a:rPr sz="1700" b="1">
+                <a:solidFill>
+                  <a:srgbClr val="0E4D33"/>
+                </a:solidFill>
+                <a:latin typeface="Calibri"/>
+              </a:rPr>
+              <a:t>Big disagreements leave the margins.  </a:t>
+            </a:r>
+            <a:r>
+              <a:rPr sz="1700" b="0" i="0">
+                <a:solidFill>
+                  <a:srgbClr val="212A26"/>
+                </a:solidFill>
+                <a:latin typeface="Calibri"/>
+              </a:rPr>
+              <a:t>Three comment-thread volleys mean the discussion needs a richer channel; settle it, then record the outcome.</a:t>
             </a:r>
           </a:p>
         </p:txBody>
@@ -10224,6 +13562,3843 @@
 </p:sld>
 </file>
 
+<file path=ppt/slides/slide30.xml><?xml version="1.0" encoding="utf-8"?>
+<p:sld xmlns:a="http://schemas.openxmlformats.org/drawingml/2006/main" xmlns:p="http://schemas.openxmlformats.org/presentationml/2006/main" xmlns:r="http://schemas.openxmlformats.org/officeDocument/2006/relationships">
+  <p:cSld>
+    <p:bg>
+      <p:bgPr>
+        <a:solidFill>
+          <a:srgbClr val="FFFFFF"/>
+        </a:solidFill>
+        <a:effectLst/>
+      </p:bgPr>
+    </p:bg>
+    <p:spTree>
+      <p:nvGrpSpPr>
+        <p:cNvPr id="1" name=""/>
+        <p:cNvGrpSpPr/>
+        <p:nvPr/>
+      </p:nvGrpSpPr>
+      <p:grpSpPr/>
+      <p:sp>
+        <p:nvSpPr>
+          <p:cNvPr id="2" name="Title 1" descr="Slide title: Version discipline: chaos vs. system"/>
+          <p:cNvSpPr>
+            <a:spLocks noGrp="1"/>
+          </p:cNvSpPr>
+          <p:nvPr>
+            <p:ph type="title"/>
+          </p:nvPr>
+        </p:nvSpPr>
+        <p:spPr>
+          <a:xfrm>
+            <a:off x="502920" y="411480"/>
+            <a:ext cx="11155680" cy="914400"/>
+          </a:xfrm>
+        </p:spPr>
+        <p:txBody>
+          <a:bodyPr wrap="square"/>
+          <a:lstStyle/>
+          <a:p>
+            <a:pPr algn="l"/>
+            <a:r>
+              <a:rPr sz="3200" b="1">
+                <a:solidFill>
+                  <a:srgbClr val="0E4D33"/>
+                </a:solidFill>
+                <a:latin typeface="Cambria"/>
+              </a:rPr>
+              <a:t>Version discipline: chaos vs. system</a:t>
+            </a:r>
+          </a:p>
+        </p:txBody>
+      </p:sp>
+      <p:sp>
+        <p:nvSpPr>
+          <p:cNvPr id="3" name="TextBox 2" descr="Footer: BADM 225 · Chapter 5"/>
+          <p:cNvSpPr txBox="1"/>
+          <p:nvPr/>
+        </p:nvSpPr>
+        <p:spPr>
+          <a:xfrm>
+            <a:off x="502920" y="6446520"/>
+            <a:ext cx="5486400" cy="320040"/>
+          </a:xfrm>
+          <a:prstGeom prst="rect">
+            <a:avLst/>
+          </a:prstGeom>
+          <a:noFill/>
+        </p:spPr>
+        <p:txBody>
+          <a:bodyPr wrap="none">
+            <a:spAutoFit/>
+          </a:bodyPr>
+          <a:lstStyle/>
+          <a:p>
+            <a:r>
+              <a:rPr sz="1000">
+                <a:solidFill>
+                  <a:srgbClr val="5E6B64"/>
+                </a:solidFill>
+                <a:latin typeface="Calibri"/>
+              </a:rPr>
+              <a:t>BADM 225 · Chapter 5</a:t>
+            </a:r>
+          </a:p>
+        </p:txBody>
+      </p:sp>
+      <p:sp>
+        <p:nvSpPr>
+          <p:cNvPr id="4" name="TextBox 3" descr="Slide number 30"/>
+          <p:cNvSpPr txBox="1"/>
+          <p:nvPr/>
+        </p:nvSpPr>
+        <p:spPr>
+          <a:xfrm>
+            <a:off x="11247120" y="6446520"/>
+            <a:ext cx="640080" cy="320040"/>
+          </a:xfrm>
+          <a:prstGeom prst="rect">
+            <a:avLst/>
+          </a:prstGeom>
+          <a:noFill/>
+        </p:spPr>
+        <p:txBody>
+          <a:bodyPr wrap="none">
+            <a:spAutoFit/>
+          </a:bodyPr>
+          <a:lstStyle/>
+          <a:p>
+            <a:pPr algn="r"/>
+            <a:r>
+              <a:rPr sz="1000">
+                <a:solidFill>
+                  <a:srgbClr val="5E6B64"/>
+                </a:solidFill>
+                <a:latin typeface="Calibri"/>
+              </a:rPr>
+              <a:t>30</a:t>
+            </a:r>
+          </a:p>
+        </p:txBody>
+      </p:sp>
+      <p:sp>
+        <p:nvSpPr>
+          <p:cNvPr id="5" name="Rounded Rectangle 4" descr="You have version chaos if… panel"/>
+          <p:cNvSpPr/>
+          <p:nvPr/>
+        </p:nvSpPr>
+        <p:spPr>
+          <a:xfrm>
+            <a:off x="548640" y="1554480"/>
+            <a:ext cx="5394960" cy="4572000"/>
+          </a:xfrm>
+          <a:prstGeom prst="roundRect">
+            <a:avLst/>
+          </a:prstGeom>
+          <a:solidFill>
+            <a:srgbClr val="EAF1EB"/>
+          </a:solidFill>
+          <a:ln>
+            <a:noFill/>
+          </a:ln>
+          <a:effectLst/>
+        </p:spPr>
+        <p:style>
+          <a:lnRef idx="1">
+            <a:schemeClr val="accent1"/>
+          </a:lnRef>
+          <a:fillRef idx="3">
+            <a:schemeClr val="accent1"/>
+          </a:fillRef>
+          <a:effectRef idx="2">
+            <a:schemeClr val="accent1"/>
+          </a:effectRef>
+          <a:fontRef idx="minor">
+            <a:schemeClr val="lt1"/>
+          </a:fontRef>
+        </p:style>
+        <p:txBody>
+          <a:bodyPr rtlCol="0" anchor="t" wrap="square" lIns="164592" rIns="164592" tIns="128016" bIns="109728"/>
+          <a:lstStyle/>
+          <a:p>
+            <a:pPr algn="l">
+              <a:spcAft>
+                <a:spcPts val="1200"/>
+              </a:spcAft>
+            </a:pPr>
+            <a:r>
+              <a:rPr sz="1800" b="1" i="0">
+                <a:solidFill>
+                  <a:srgbClr val="0E4D33"/>
+                </a:solidFill>
+                <a:latin typeface="Cambria"/>
+              </a:rPr>
+              <a:t>You have version chaos if…</a:t>
+            </a:r>
+          </a:p>
+          <a:p>
+            <a:pPr algn="l">
+              <a:spcAft>
+                <a:spcPts val="900"/>
+              </a:spcAft>
+            </a:pPr>
+            <a:r>
+              <a:rPr sz="1500">
+                <a:solidFill>
+                  <a:srgbClr val="8A6410"/>
+                </a:solidFill>
+                <a:latin typeface="Calibri"/>
+              </a:rPr>
+              <a:t>▪  </a:t>
+            </a:r>
+            <a:r>
+              <a:rPr sz="1500" b="0" i="0">
+                <a:solidFill>
+                  <a:srgbClr val="212A26"/>
+                </a:solidFill>
+                <a:latin typeface="Calibri"/>
+              </a:rPr>
+              <a:t>Report_FINAL_v2_REALLY_final.docx</a:t>
+            </a:r>
+          </a:p>
+          <a:p>
+            <a:pPr algn="l">
+              <a:spcAft>
+                <a:spcPts val="900"/>
+              </a:spcAft>
+            </a:pPr>
+            <a:r>
+              <a:rPr sz="1500">
+                <a:solidFill>
+                  <a:srgbClr val="8A6410"/>
+                </a:solidFill>
+                <a:latin typeface="Calibri"/>
+              </a:rPr>
+              <a:t>▪  </a:t>
+            </a:r>
+            <a:r>
+              <a:rPr sz="1500" b="0" i="0">
+                <a:solidFill>
+                  <a:srgbClr val="212A26"/>
+                </a:solidFill>
+                <a:latin typeface="Calibri"/>
+              </a:rPr>
+              <a:t>Three people edited three copies — someone's Saturday merges them</a:t>
+            </a:r>
+          </a:p>
+          <a:p>
+            <a:pPr algn="l">
+              <a:spcAft>
+                <a:spcPts val="900"/>
+              </a:spcAft>
+            </a:pPr>
+            <a:r>
+              <a:rPr sz="1500">
+                <a:solidFill>
+                  <a:srgbClr val="8A6410"/>
+                </a:solidFill>
+                <a:latin typeface="Calibri"/>
+              </a:rPr>
+              <a:t>▪  </a:t>
+            </a:r>
+            <a:r>
+              <a:rPr sz="1500" b="0" i="0">
+                <a:solidFill>
+                  <a:srgbClr val="212A26"/>
+                </a:solidFill>
+                <a:latin typeface="Calibri"/>
+              </a:rPr>
+              <a:t>The deck presented wasn't the deck approved</a:t>
+            </a:r>
+          </a:p>
+          <a:p>
+            <a:pPr algn="l">
+              <a:spcAft>
+                <a:spcPts val="900"/>
+              </a:spcAft>
+            </a:pPr>
+            <a:r>
+              <a:rPr sz="1500">
+                <a:solidFill>
+                  <a:srgbClr val="8A6410"/>
+                </a:solidFill>
+                <a:latin typeface="Calibri"/>
+              </a:rPr>
+              <a:t>▪  </a:t>
+            </a:r>
+            <a:r>
+              <a:rPr sz="1500" b="0" i="0">
+                <a:solidFill>
+                  <a:srgbClr val="212A26"/>
+                </a:solidFill>
+                <a:latin typeface="Calibri"/>
+              </a:rPr>
+              <a:t>'Which file is current?' gets asked weekly</a:t>
+            </a:r>
+          </a:p>
+        </p:txBody>
+      </p:sp>
+      <p:sp>
+        <p:nvSpPr>
+          <p:cNvPr id="6" name="Rounded Rectangle 5" descr="The system (four rules) panel"/>
+          <p:cNvSpPr/>
+          <p:nvPr/>
+        </p:nvSpPr>
+        <p:spPr>
+          <a:xfrm>
+            <a:off x="6263640" y="1554480"/>
+            <a:ext cx="5394960" cy="4572000"/>
+          </a:xfrm>
+          <a:prstGeom prst="roundRect">
+            <a:avLst/>
+          </a:prstGeom>
+          <a:solidFill>
+            <a:srgbClr val="EAF1EB"/>
+          </a:solidFill>
+          <a:ln>
+            <a:noFill/>
+          </a:ln>
+          <a:effectLst/>
+        </p:spPr>
+        <p:style>
+          <a:lnRef idx="1">
+            <a:schemeClr val="accent1"/>
+          </a:lnRef>
+          <a:fillRef idx="3">
+            <a:schemeClr val="accent1"/>
+          </a:fillRef>
+          <a:effectRef idx="2">
+            <a:schemeClr val="accent1"/>
+          </a:effectRef>
+          <a:fontRef idx="minor">
+            <a:schemeClr val="lt1"/>
+          </a:fontRef>
+        </p:style>
+        <p:txBody>
+          <a:bodyPr rtlCol="0" anchor="t" wrap="square" lIns="164592" rIns="164592" tIns="128016" bIns="109728"/>
+          <a:lstStyle/>
+          <a:p>
+            <a:pPr algn="l">
+              <a:spcAft>
+                <a:spcPts val="1200"/>
+              </a:spcAft>
+            </a:pPr>
+            <a:r>
+              <a:rPr sz="1800" b="1" i="0">
+                <a:solidFill>
+                  <a:srgbClr val="0E4D33"/>
+                </a:solidFill>
+                <a:latin typeface="Cambria"/>
+              </a:rPr>
+              <a:t>The system (four rules)</a:t>
+            </a:r>
+          </a:p>
+          <a:p>
+            <a:pPr algn="l">
+              <a:spcAft>
+                <a:spcPts val="900"/>
+              </a:spcAft>
+            </a:pPr>
+            <a:r>
+              <a:rPr sz="1500">
+                <a:solidFill>
+                  <a:srgbClr val="8A6410"/>
+                </a:solidFill>
+                <a:latin typeface="Calibri"/>
+              </a:rPr>
+              <a:t>▪  </a:t>
+            </a:r>
+            <a:r>
+              <a:rPr sz="1500" b="0" i="0">
+                <a:solidFill>
+                  <a:srgbClr val="212A26"/>
+                </a:solidFill>
+                <a:latin typeface="Calibri"/>
+              </a:rPr>
+              <a:t>ONE living copy, in shared space — never emailed as an attachment for editing</a:t>
+            </a:r>
+          </a:p>
+          <a:p>
+            <a:pPr algn="l">
+              <a:spcAft>
+                <a:spcPts val="900"/>
+              </a:spcAft>
+            </a:pPr>
+            <a:r>
+              <a:rPr sz="1500">
+                <a:solidFill>
+                  <a:srgbClr val="8A6410"/>
+                </a:solidFill>
+                <a:latin typeface="Calibri"/>
+              </a:rPr>
+              <a:t>▪  </a:t>
+            </a:r>
+            <a:r>
+              <a:rPr sz="1500" b="0" i="0">
+                <a:solidFill>
+                  <a:srgbClr val="212A26"/>
+                </a:solidFill>
+                <a:latin typeface="Calibri"/>
+              </a:rPr>
+              <a:t>The filename says what it is; the platform tracks versions</a:t>
+            </a:r>
+          </a:p>
+          <a:p>
+            <a:pPr algn="l">
+              <a:spcAft>
+                <a:spcPts val="900"/>
+              </a:spcAft>
+            </a:pPr>
+            <a:r>
+              <a:rPr sz="1500">
+                <a:solidFill>
+                  <a:srgbClr val="8A6410"/>
+                </a:solidFill>
+                <a:latin typeface="Calibri"/>
+              </a:rPr>
+              <a:t>▪  </a:t>
+            </a:r>
+            <a:r>
+              <a:rPr sz="1500" b="0" i="0">
+                <a:solidFill>
+                  <a:srgbClr val="212A26"/>
+                </a:solidFill>
+                <a:latin typeface="Calibri"/>
+              </a:rPr>
+              <a:t>One named owner per document — merge authority lives somewhere</a:t>
+            </a:r>
+          </a:p>
+          <a:p>
+            <a:pPr algn="l">
+              <a:spcAft>
+                <a:spcPts val="900"/>
+              </a:spcAft>
+            </a:pPr>
+            <a:r>
+              <a:rPr sz="1500">
+                <a:solidFill>
+                  <a:srgbClr val="8A6410"/>
+                </a:solidFill>
+                <a:latin typeface="Calibri"/>
+              </a:rPr>
+              <a:t>▪  </a:t>
+            </a:r>
+            <a:r>
+              <a:rPr sz="1500" b="0" i="0">
+                <a:solidFill>
+                  <a:srgbClr val="212A26"/>
+                </a:solidFill>
+                <a:latin typeface="Calibri"/>
+              </a:rPr>
+              <a:t>Frozen snapshots (sent, approved, submitted) get dated copies: 'Proposal—as-submitted-2026-07-15'</a:t>
+            </a:r>
+          </a:p>
+        </p:txBody>
+      </p:sp>
+    </p:spTree>
+  </p:cSld>
+  <p:clrMapOvr>
+    <a:masterClrMapping/>
+  </p:clrMapOvr>
+</p:sld>
+</file>
+
+<file path=ppt/slides/slide31.xml><?xml version="1.0" encoding="utf-8"?>
+<p:sld xmlns:a="http://schemas.openxmlformats.org/drawingml/2006/main" xmlns:p="http://schemas.openxmlformats.org/presentationml/2006/main" xmlns:r="http://schemas.openxmlformats.org/officeDocument/2006/relationships">
+  <p:cSld>
+    <p:bg>
+      <p:bgPr>
+        <a:solidFill>
+          <a:srgbClr val="FFFFFF"/>
+        </a:solidFill>
+        <a:effectLst/>
+      </p:bgPr>
+    </p:bg>
+    <p:spTree>
+      <p:nvGrpSpPr>
+        <p:cNvPr id="1" name=""/>
+        <p:cNvGrpSpPr/>
+        <p:nvPr/>
+      </p:nvGrpSpPr>
+      <p:grpSpPr/>
+      <p:sp>
+        <p:nvSpPr>
+          <p:cNvPr id="2" name="Title 1" descr="Slide title: Out-of-office replies and availability signals"/>
+          <p:cNvSpPr>
+            <a:spLocks noGrp="1"/>
+          </p:cNvSpPr>
+          <p:nvPr>
+            <p:ph type="title"/>
+          </p:nvPr>
+        </p:nvSpPr>
+        <p:spPr>
+          <a:xfrm>
+            <a:off x="502920" y="411480"/>
+            <a:ext cx="11155680" cy="914400"/>
+          </a:xfrm>
+        </p:spPr>
+        <p:txBody>
+          <a:bodyPr wrap="square"/>
+          <a:lstStyle/>
+          <a:p>
+            <a:pPr algn="l"/>
+            <a:r>
+              <a:rPr sz="3200" b="1">
+                <a:solidFill>
+                  <a:srgbClr val="0E4D33"/>
+                </a:solidFill>
+                <a:latin typeface="Cambria"/>
+              </a:rPr>
+              <a:t>Out-of-office replies and availability signals</a:t>
+            </a:r>
+          </a:p>
+        </p:txBody>
+      </p:sp>
+      <p:sp>
+        <p:nvSpPr>
+          <p:cNvPr id="3" name="TextBox 2" descr="Footer: BADM 225 · Chapter 5"/>
+          <p:cNvSpPr txBox="1"/>
+          <p:nvPr/>
+        </p:nvSpPr>
+        <p:spPr>
+          <a:xfrm>
+            <a:off x="502920" y="6446520"/>
+            <a:ext cx="5486400" cy="320040"/>
+          </a:xfrm>
+          <a:prstGeom prst="rect">
+            <a:avLst/>
+          </a:prstGeom>
+          <a:noFill/>
+        </p:spPr>
+        <p:txBody>
+          <a:bodyPr wrap="none">
+            <a:spAutoFit/>
+          </a:bodyPr>
+          <a:lstStyle/>
+          <a:p>
+            <a:r>
+              <a:rPr sz="1000">
+                <a:solidFill>
+                  <a:srgbClr val="5E6B64"/>
+                </a:solidFill>
+                <a:latin typeface="Calibri"/>
+              </a:rPr>
+              <a:t>BADM 225 · Chapter 5</a:t>
+            </a:r>
+          </a:p>
+        </p:txBody>
+      </p:sp>
+      <p:sp>
+        <p:nvSpPr>
+          <p:cNvPr id="4" name="TextBox 3" descr="Slide number 31"/>
+          <p:cNvSpPr txBox="1"/>
+          <p:nvPr/>
+        </p:nvSpPr>
+        <p:spPr>
+          <a:xfrm>
+            <a:off x="11247120" y="6446520"/>
+            <a:ext cx="640080" cy="320040"/>
+          </a:xfrm>
+          <a:prstGeom prst="rect">
+            <a:avLst/>
+          </a:prstGeom>
+          <a:noFill/>
+        </p:spPr>
+        <p:txBody>
+          <a:bodyPr wrap="none">
+            <a:spAutoFit/>
+          </a:bodyPr>
+          <a:lstStyle/>
+          <a:p>
+            <a:pPr algn="r"/>
+            <a:r>
+              <a:rPr sz="1000">
+                <a:solidFill>
+                  <a:srgbClr val="5E6B64"/>
+                </a:solidFill>
+                <a:latin typeface="Calibri"/>
+              </a:rPr>
+              <a:t>31</a:t>
+            </a:r>
+          </a:p>
+        </p:txBody>
+      </p:sp>
+      <p:sp>
+        <p:nvSpPr>
+          <p:cNvPr id="5" name="TextBox 4" descr="Key points"/>
+          <p:cNvSpPr txBox="1"/>
+          <p:nvPr/>
+        </p:nvSpPr>
+        <p:spPr>
+          <a:xfrm>
+            <a:off x="548640" y="1554480"/>
+            <a:ext cx="11064240" cy="4663440"/>
+          </a:xfrm>
+          <a:prstGeom prst="rect">
+            <a:avLst/>
+          </a:prstGeom>
+          <a:noFill/>
+        </p:spPr>
+        <p:txBody>
+          <a:bodyPr wrap="square">
+            <a:spAutoFit/>
+          </a:bodyPr>
+          <a:lstStyle/>
+          <a:p>
+            <a:pPr algn="l">
+              <a:spcAft>
+                <a:spcPts val="1200"/>
+              </a:spcAft>
+            </a:pPr>
+            <a:r>
+              <a:rPr sz="1700">
+                <a:solidFill>
+                  <a:srgbClr val="8A6410"/>
+                </a:solidFill>
+                <a:latin typeface="Calibri"/>
+              </a:rPr>
+              <a:t>▪  </a:t>
+            </a:r>
+            <a:r>
+              <a:rPr sz="1700" b="1">
+                <a:solidFill>
+                  <a:srgbClr val="0E4D33"/>
+                </a:solidFill>
+                <a:latin typeface="Calibri"/>
+              </a:rPr>
+              <a:t>The OOO has three jobs:  </a:t>
+            </a:r>
+            <a:r>
+              <a:rPr sz="1700" b="0" i="0">
+                <a:solidFill>
+                  <a:srgbClr val="212A26"/>
+                </a:solidFill>
+                <a:latin typeface="Calibri"/>
+              </a:rPr>
+              <a:t>dates you're gone, who covers what while you are, and when the sender can expect you — three lines, done.</a:t>
+            </a:r>
+          </a:p>
+          <a:p>
+            <a:pPr algn="l">
+              <a:spcAft>
+                <a:spcPts val="1200"/>
+              </a:spcAft>
+            </a:pPr>
+            <a:r>
+              <a:rPr sz="1700">
+                <a:solidFill>
+                  <a:srgbClr val="8A6410"/>
+                </a:solidFill>
+                <a:latin typeface="Calibri"/>
+              </a:rPr>
+              <a:t>▪  </a:t>
+            </a:r>
+            <a:r>
+              <a:rPr sz="1700" b="1">
+                <a:solidFill>
+                  <a:srgbClr val="0E4D33"/>
+                </a:solidFill>
+                <a:latin typeface="Calibri"/>
+              </a:rPr>
+              <a:t>Name a human per category:  </a:t>
+            </a:r>
+            <a:r>
+              <a:rPr sz="1700" b="0" i="0">
+                <a:solidFill>
+                  <a:srgbClr val="212A26"/>
+                </a:solidFill>
+                <a:latin typeface="Calibri"/>
+              </a:rPr>
+              <a:t>'Contracts: Dana Ruiz. Everything else: I'll reply after July 21.' A bare 'I'm away' just defers the sender's problem.</a:t>
+            </a:r>
+          </a:p>
+          <a:p>
+            <a:pPr algn="l">
+              <a:spcAft>
+                <a:spcPts val="1200"/>
+              </a:spcAft>
+            </a:pPr>
+            <a:r>
+              <a:rPr sz="1700">
+                <a:solidFill>
+                  <a:srgbClr val="8A6410"/>
+                </a:solidFill>
+                <a:latin typeface="Calibri"/>
+              </a:rPr>
+              <a:t>▪  </a:t>
+            </a:r>
+            <a:r>
+              <a:rPr sz="1700" b="1">
+                <a:solidFill>
+                  <a:srgbClr val="0E4D33"/>
+                </a:solidFill>
+                <a:latin typeface="Calibri"/>
+              </a:rPr>
+              <a:t>No apology spiral.  </a:t>
+            </a:r>
+            <a:r>
+              <a:rPr sz="1700" b="0" i="0">
+                <a:solidFill>
+                  <a:srgbClr val="212A26"/>
+                </a:solidFill>
+                <a:latin typeface="Calibri"/>
+              </a:rPr>
+              <a:t>'I apologize for any inconvenience my vacation may cause' — rest is not a billing discrepancy (Chapter 4's tone pass).</a:t>
+            </a:r>
+          </a:p>
+          <a:p>
+            <a:pPr algn="l">
+              <a:spcAft>
+                <a:spcPts val="1200"/>
+              </a:spcAft>
+            </a:pPr>
+            <a:r>
+              <a:rPr sz="1700">
+                <a:solidFill>
+                  <a:srgbClr val="8A6410"/>
+                </a:solidFill>
+                <a:latin typeface="Calibri"/>
+              </a:rPr>
+              <a:t>▪  </a:t>
+            </a:r>
+            <a:r>
+              <a:rPr sz="1700" b="1">
+                <a:solidFill>
+                  <a:srgbClr val="0E4D33"/>
+                </a:solidFill>
+                <a:latin typeface="Calibri"/>
+              </a:rPr>
+              <a:t>Status indicators are micro-OOOs.  </a:t>
+            </a:r>
+            <a:r>
+              <a:rPr sz="1700" b="0" i="0">
+                <a:solidFill>
+                  <a:srgbClr val="212A26"/>
+                </a:solidFill>
+                <a:latin typeface="Calibri"/>
+              </a:rPr>
+              <a:t>'Focus time — back at 2:00' does for an afternoon what the autoreply does for a vacation. Set them honestly, honor others'.</a:t>
+            </a:r>
+          </a:p>
+        </p:txBody>
+      </p:sp>
+    </p:spTree>
+  </p:cSld>
+  <p:clrMapOvr>
+    <a:masterClrMapping/>
+  </p:clrMapOvr>
+</p:sld>
+</file>
+
+<file path=ppt/slides/slide32.xml><?xml version="1.0" encoding="utf-8"?>
+<p:sld xmlns:a="http://schemas.openxmlformats.org/drawingml/2006/main" xmlns:p="http://schemas.openxmlformats.org/presentationml/2006/main" xmlns:r="http://schemas.openxmlformats.org/officeDocument/2006/relationships">
+  <p:cSld>
+    <p:bg>
+      <p:bgPr>
+        <a:solidFill>
+          <a:srgbClr val="0E4D33"/>
+        </a:solidFill>
+        <a:effectLst/>
+      </p:bgPr>
+    </p:bg>
+    <p:spTree>
+      <p:nvGrpSpPr>
+        <p:cNvPr id="1" name=""/>
+        <p:cNvGrpSpPr/>
+        <p:nvPr/>
+      </p:nvGrpSpPr>
+      <p:grpSpPr/>
+      <p:sp>
+        <p:nvSpPr>
+          <p:cNvPr id="2" name="Title 1" descr="Slide title: The wider digital workplace"/>
+          <p:cNvSpPr>
+            <a:spLocks noGrp="1"/>
+          </p:cNvSpPr>
+          <p:nvPr>
+            <p:ph type="title"/>
+          </p:nvPr>
+        </p:nvSpPr>
+        <p:spPr>
+          <a:xfrm>
+            <a:off x="822960" y="2834640"/>
+            <a:ext cx="10515600" cy="914400"/>
+          </a:xfrm>
+        </p:spPr>
+        <p:txBody>
+          <a:bodyPr wrap="square"/>
+          <a:lstStyle/>
+          <a:p>
+            <a:pPr algn="l"/>
+            <a:r>
+              <a:rPr sz="4000" b="1">
+                <a:solidFill>
+                  <a:srgbClr val="FFFFFF"/>
+                </a:solidFill>
+                <a:latin typeface="Cambria"/>
+              </a:rPr>
+              <a:t>The wider digital workplace</a:t>
+            </a:r>
+          </a:p>
+        </p:txBody>
+      </p:sp>
+      <p:sp>
+        <p:nvSpPr>
+          <p:cNvPr id="3" name="TextBox 2" descr="Section number 08"/>
+          <p:cNvSpPr txBox="1"/>
+          <p:nvPr/>
+        </p:nvSpPr>
+        <p:spPr>
+          <a:xfrm>
+            <a:off x="822960" y="1188720"/>
+            <a:ext cx="2743200" cy="1463040"/>
+          </a:xfrm>
+          <a:prstGeom prst="rect">
+            <a:avLst/>
+          </a:prstGeom>
+          <a:noFill/>
+        </p:spPr>
+        <p:txBody>
+          <a:bodyPr wrap="square">
+            <a:spAutoFit/>
+          </a:bodyPr>
+          <a:lstStyle/>
+          <a:p>
+            <a:pPr algn="l">
+              <a:spcAft>
+                <a:spcPts val="800"/>
+              </a:spcAft>
+            </a:pPr>
+            <a:r>
+              <a:rPr sz="8000" b="1" i="0">
+                <a:solidFill>
+                  <a:srgbClr val="C9931A"/>
+                </a:solidFill>
+                <a:latin typeface="Cambria"/>
+              </a:rPr>
+              <a:t>08</a:t>
+            </a:r>
+          </a:p>
+        </p:txBody>
+      </p:sp>
+      <p:sp>
+        <p:nvSpPr>
+          <p:cNvPr id="4" name="TextBox 3" descr="Section note"/>
+          <p:cNvSpPr txBox="1"/>
+          <p:nvPr/>
+        </p:nvSpPr>
+        <p:spPr>
+          <a:xfrm>
+            <a:off x="822960" y="4023360"/>
+            <a:ext cx="9601200" cy="1097280"/>
+          </a:xfrm>
+          <a:prstGeom prst="rect">
+            <a:avLst/>
+          </a:prstGeom>
+          <a:noFill/>
+        </p:spPr>
+        <p:txBody>
+          <a:bodyPr wrap="square">
+            <a:spAutoFit/>
+          </a:bodyPr>
+          <a:lstStyle/>
+          <a:p>
+            <a:pPr algn="l">
+              <a:spcAft>
+                <a:spcPts val="800"/>
+              </a:spcAft>
+            </a:pPr>
+            <a:r>
+              <a:rPr sz="1700" b="0" i="0">
+                <a:solidFill>
+                  <a:srgbClr val="EAF1EB"/>
+                </a:solidFill>
+                <a:latin typeface="Calibri"/>
+              </a:rPr>
+              <a:t>Beyond inbox and chat: the channels that hold institutional memory.</a:t>
+            </a:r>
+          </a:p>
+        </p:txBody>
+      </p:sp>
+      <p:sp>
+        <p:nvSpPr>
+          <p:cNvPr id="5" name="TextBox 4" descr="Footer: BADM 225 · Chapter 5"/>
+          <p:cNvSpPr txBox="1"/>
+          <p:nvPr/>
+        </p:nvSpPr>
+        <p:spPr>
+          <a:xfrm>
+            <a:off x="502920" y="6446520"/>
+            <a:ext cx="5486400" cy="320040"/>
+          </a:xfrm>
+          <a:prstGeom prst="rect">
+            <a:avLst/>
+          </a:prstGeom>
+          <a:noFill/>
+        </p:spPr>
+        <p:txBody>
+          <a:bodyPr wrap="none">
+            <a:spAutoFit/>
+          </a:bodyPr>
+          <a:lstStyle/>
+          <a:p>
+            <a:r>
+              <a:rPr sz="1000">
+                <a:solidFill>
+                  <a:srgbClr val="5E6B64"/>
+                </a:solidFill>
+                <a:latin typeface="Calibri"/>
+              </a:rPr>
+              <a:t>BADM 225 · Chapter 5</a:t>
+            </a:r>
+          </a:p>
+        </p:txBody>
+      </p:sp>
+      <p:sp>
+        <p:nvSpPr>
+          <p:cNvPr id="6" name="TextBox 5" descr="Slide number 32"/>
+          <p:cNvSpPr txBox="1"/>
+          <p:nvPr/>
+        </p:nvSpPr>
+        <p:spPr>
+          <a:xfrm>
+            <a:off x="11247120" y="6446520"/>
+            <a:ext cx="640080" cy="320040"/>
+          </a:xfrm>
+          <a:prstGeom prst="rect">
+            <a:avLst/>
+          </a:prstGeom>
+          <a:noFill/>
+        </p:spPr>
+        <p:txBody>
+          <a:bodyPr wrap="none">
+            <a:spAutoFit/>
+          </a:bodyPr>
+          <a:lstStyle/>
+          <a:p>
+            <a:pPr algn="r"/>
+            <a:r>
+              <a:rPr sz="1000">
+                <a:solidFill>
+                  <a:srgbClr val="5E6B64"/>
+                </a:solidFill>
+                <a:latin typeface="Calibri"/>
+              </a:rPr>
+              <a:t>32</a:t>
+            </a:r>
+          </a:p>
+        </p:txBody>
+      </p:sp>
+    </p:spTree>
+  </p:cSld>
+  <p:clrMapOvr>
+    <a:masterClrMapping/>
+  </p:clrMapOvr>
+</p:sld>
+</file>
+
+<file path=ppt/slides/slide33.xml><?xml version="1.0" encoding="utf-8"?>
+<p:sld xmlns:a="http://schemas.openxmlformats.org/drawingml/2006/main" xmlns:p="http://schemas.openxmlformats.org/presentationml/2006/main" xmlns:r="http://schemas.openxmlformats.org/officeDocument/2006/relationships">
+  <p:cSld>
+    <p:bg>
+      <p:bgPr>
+        <a:solidFill>
+          <a:srgbClr val="FFFFFF"/>
+        </a:solidFill>
+        <a:effectLst/>
+      </p:bgPr>
+    </p:bg>
+    <p:spTree>
+      <p:nvGrpSpPr>
+        <p:cNvPr id="1" name=""/>
+        <p:cNvGrpSpPr/>
+        <p:nvPr/>
+      </p:nvGrpSpPr>
+      <p:grpSpPr/>
+      <p:sp>
+        <p:nvSpPr>
+          <p:cNvPr id="2" name="Title 1" descr="Slide title: Channels beyond the inbox"/>
+          <p:cNvSpPr>
+            <a:spLocks noGrp="1"/>
+          </p:cNvSpPr>
+          <p:nvPr>
+            <p:ph type="title"/>
+          </p:nvPr>
+        </p:nvSpPr>
+        <p:spPr>
+          <a:xfrm>
+            <a:off x="502920" y="411480"/>
+            <a:ext cx="11155680" cy="914400"/>
+          </a:xfrm>
+        </p:spPr>
+        <p:txBody>
+          <a:bodyPr wrap="square"/>
+          <a:lstStyle/>
+          <a:p>
+            <a:pPr algn="l"/>
+            <a:r>
+              <a:rPr sz="3200" b="1">
+                <a:solidFill>
+                  <a:srgbClr val="0E4D33"/>
+                </a:solidFill>
+                <a:latin typeface="Cambria"/>
+              </a:rPr>
+              <a:t>Channels beyond the inbox</a:t>
+            </a:r>
+          </a:p>
+        </p:txBody>
+      </p:sp>
+      <p:sp>
+        <p:nvSpPr>
+          <p:cNvPr id="3" name="TextBox 2" descr="Footer: BADM 225 · Chapter 5"/>
+          <p:cNvSpPr txBox="1"/>
+          <p:nvPr/>
+        </p:nvSpPr>
+        <p:spPr>
+          <a:xfrm>
+            <a:off x="502920" y="6446520"/>
+            <a:ext cx="5486400" cy="320040"/>
+          </a:xfrm>
+          <a:prstGeom prst="rect">
+            <a:avLst/>
+          </a:prstGeom>
+          <a:noFill/>
+        </p:spPr>
+        <p:txBody>
+          <a:bodyPr wrap="none">
+            <a:spAutoFit/>
+          </a:bodyPr>
+          <a:lstStyle/>
+          <a:p>
+            <a:r>
+              <a:rPr sz="1000">
+                <a:solidFill>
+                  <a:srgbClr val="5E6B64"/>
+                </a:solidFill>
+                <a:latin typeface="Calibri"/>
+              </a:rPr>
+              <a:t>BADM 225 · Chapter 5</a:t>
+            </a:r>
+          </a:p>
+        </p:txBody>
+      </p:sp>
+      <p:sp>
+        <p:nvSpPr>
+          <p:cNvPr id="4" name="TextBox 3" descr="Slide number 33"/>
+          <p:cNvSpPr txBox="1"/>
+          <p:nvPr/>
+        </p:nvSpPr>
+        <p:spPr>
+          <a:xfrm>
+            <a:off x="11247120" y="6446520"/>
+            <a:ext cx="640080" cy="320040"/>
+          </a:xfrm>
+          <a:prstGeom prst="rect">
+            <a:avLst/>
+          </a:prstGeom>
+          <a:noFill/>
+        </p:spPr>
+        <p:txBody>
+          <a:bodyPr wrap="none">
+            <a:spAutoFit/>
+          </a:bodyPr>
+          <a:lstStyle/>
+          <a:p>
+            <a:pPr algn="r"/>
+            <a:r>
+              <a:rPr sz="1000">
+                <a:solidFill>
+                  <a:srgbClr val="5E6B64"/>
+                </a:solidFill>
+                <a:latin typeface="Calibri"/>
+              </a:rPr>
+              <a:t>33</a:t>
+            </a:r>
+          </a:p>
+        </p:txBody>
+      </p:sp>
+      <p:sp>
+        <p:nvSpPr>
+          <p:cNvPr id="5" name="TextBox 4" descr="Context"/>
+          <p:cNvSpPr txBox="1"/>
+          <p:nvPr/>
+        </p:nvSpPr>
+        <p:spPr>
+          <a:xfrm>
+            <a:off x="548640" y="1417320"/>
+            <a:ext cx="10972800" cy="411480"/>
+          </a:xfrm>
+          <a:prstGeom prst="rect">
+            <a:avLst/>
+          </a:prstGeom>
+          <a:noFill/>
+        </p:spPr>
+        <p:txBody>
+          <a:bodyPr wrap="square">
+            <a:spAutoFit/>
+          </a:bodyPr>
+          <a:lstStyle/>
+          <a:p>
+            <a:pPr algn="l">
+              <a:spcAft>
+                <a:spcPts val="800"/>
+              </a:spcAft>
+            </a:pPr>
+            <a:r>
+              <a:rPr sz="1400" b="0" i="1">
+                <a:solidFill>
+                  <a:srgbClr val="5E6B64"/>
+                </a:solidFill>
+                <a:latin typeface="Calibri"/>
+              </a:rPr>
+              <a:t>Match the channel to the content's SHELF LIFE, not just its urgency.</a:t>
+            </a:r>
+          </a:p>
+        </p:txBody>
+      </p:sp>
+      <p:sp>
+        <p:nvSpPr>
+          <p:cNvPr id="6" name="Oval 5" descr="Wiki / intranet pages icon"/>
+          <p:cNvSpPr/>
+          <p:nvPr/>
+        </p:nvSpPr>
+        <p:spPr>
+          <a:xfrm>
+            <a:off x="640080" y="1975104"/>
+            <a:ext cx="566928" cy="566928"/>
+          </a:xfrm>
+          <a:prstGeom prst="ellipse">
+            <a:avLst/>
+          </a:prstGeom>
+          <a:solidFill>
+            <a:srgbClr val="0E4D33"/>
+          </a:solidFill>
+          <a:ln>
+            <a:noFill/>
+          </a:ln>
+          <a:effectLst/>
+        </p:spPr>
+        <p:style>
+          <a:lnRef idx="1">
+            <a:schemeClr val="accent1"/>
+          </a:lnRef>
+          <a:fillRef idx="3">
+            <a:schemeClr val="accent1"/>
+          </a:fillRef>
+          <a:effectRef idx="2">
+            <a:schemeClr val="accent1"/>
+          </a:effectRef>
+          <a:fontRef idx="minor">
+            <a:schemeClr val="lt1"/>
+          </a:fontRef>
+        </p:style>
+        <p:txBody>
+          <a:bodyPr rtlCol="0" anchor="ctr" lIns="0" rIns="0" tIns="0" bIns="0"/>
+          <a:lstStyle/>
+          <a:p>
+            <a:pPr algn="ctr"/>
+            <a:r>
+              <a:rPr sz="1600" b="1">
+                <a:solidFill>
+                  <a:srgbClr val="FFFFFF"/>
+                </a:solidFill>
+                <a:latin typeface="Calibri"/>
+              </a:rPr>
+              <a:t>📚</a:t>
+            </a:r>
+          </a:p>
+        </p:txBody>
+      </p:sp>
+      <p:sp>
+        <p:nvSpPr>
+          <p:cNvPr id="7" name="TextBox 6" descr="Wiki / intranet pages"/>
+          <p:cNvSpPr txBox="1"/>
+          <p:nvPr/>
+        </p:nvSpPr>
+        <p:spPr>
+          <a:xfrm>
+            <a:off x="1417320" y="1920240"/>
+            <a:ext cx="10241280" cy="1078992"/>
+          </a:xfrm>
+          <a:prstGeom prst="rect">
+            <a:avLst/>
+          </a:prstGeom>
+          <a:noFill/>
+        </p:spPr>
+        <p:txBody>
+          <a:bodyPr wrap="square">
+            <a:spAutoFit/>
+          </a:bodyPr>
+          <a:lstStyle/>
+          <a:p>
+            <a:pPr algn="l">
+              <a:spcAft>
+                <a:spcPts val="200"/>
+              </a:spcAft>
+            </a:pPr>
+            <a:r>
+              <a:rPr sz="1650" b="1" i="0">
+                <a:solidFill>
+                  <a:srgbClr val="0E4D33"/>
+                </a:solidFill>
+                <a:latin typeface="Cambria"/>
+              </a:rPr>
+              <a:t>Wiki / intranet pages</a:t>
+            </a:r>
+          </a:p>
+          <a:p>
+            <a:pPr algn="l">
+              <a:spcAft>
+                <a:spcPts val="0"/>
+              </a:spcAft>
+            </a:pPr>
+            <a:r>
+              <a:rPr sz="1550" b="0" i="0">
+                <a:solidFill>
+                  <a:srgbClr val="212A26"/>
+                </a:solidFill>
+                <a:latin typeface="Calibri"/>
+              </a:rPr>
+              <a:t>Institutional memory: how-tos, policies, decisions of record. Written once, found for years.</a:t>
+            </a:r>
+          </a:p>
+        </p:txBody>
+      </p:sp>
+      <p:sp>
+        <p:nvSpPr>
+          <p:cNvPr id="8" name="Oval 7" descr="Internal posts &amp; newsletters icon"/>
+          <p:cNvSpPr/>
+          <p:nvPr/>
+        </p:nvSpPr>
+        <p:spPr>
+          <a:xfrm>
+            <a:off x="640080" y="3163824"/>
+            <a:ext cx="566928" cy="566928"/>
+          </a:xfrm>
+          <a:prstGeom prst="ellipse">
+            <a:avLst/>
+          </a:prstGeom>
+          <a:solidFill>
+            <a:srgbClr val="0E4D33"/>
+          </a:solidFill>
+          <a:ln>
+            <a:noFill/>
+          </a:ln>
+          <a:effectLst/>
+        </p:spPr>
+        <p:style>
+          <a:lnRef idx="1">
+            <a:schemeClr val="accent1"/>
+          </a:lnRef>
+          <a:fillRef idx="3">
+            <a:schemeClr val="accent1"/>
+          </a:fillRef>
+          <a:effectRef idx="2">
+            <a:schemeClr val="accent1"/>
+          </a:effectRef>
+          <a:fontRef idx="minor">
+            <a:schemeClr val="lt1"/>
+          </a:fontRef>
+        </p:style>
+        <p:txBody>
+          <a:bodyPr rtlCol="0" anchor="ctr" lIns="0" rIns="0" tIns="0" bIns="0"/>
+          <a:lstStyle/>
+          <a:p>
+            <a:pPr algn="ctr"/>
+            <a:r>
+              <a:rPr sz="1600" b="1">
+                <a:solidFill>
+                  <a:srgbClr val="FFFFFF"/>
+                </a:solidFill>
+                <a:latin typeface="Calibri"/>
+              </a:rPr>
+              <a:t>📰</a:t>
+            </a:r>
+          </a:p>
+        </p:txBody>
+      </p:sp>
+      <p:sp>
+        <p:nvSpPr>
+          <p:cNvPr id="9" name="TextBox 8" descr="Internal posts &amp; newsletters"/>
+          <p:cNvSpPr txBox="1"/>
+          <p:nvPr/>
+        </p:nvSpPr>
+        <p:spPr>
+          <a:xfrm>
+            <a:off x="1417320" y="3108960"/>
+            <a:ext cx="10241280" cy="1078992"/>
+          </a:xfrm>
+          <a:prstGeom prst="rect">
+            <a:avLst/>
+          </a:prstGeom>
+          <a:noFill/>
+        </p:spPr>
+        <p:txBody>
+          <a:bodyPr wrap="square">
+            <a:spAutoFit/>
+          </a:bodyPr>
+          <a:lstStyle/>
+          <a:p>
+            <a:pPr algn="l">
+              <a:spcAft>
+                <a:spcPts val="200"/>
+              </a:spcAft>
+            </a:pPr>
+            <a:r>
+              <a:rPr sz="1650" b="1" i="0">
+                <a:solidFill>
+                  <a:srgbClr val="0E4D33"/>
+                </a:solidFill>
+                <a:latin typeface="Cambria"/>
+              </a:rPr>
+              <a:t>Internal posts &amp; newsletters</a:t>
+            </a:r>
+          </a:p>
+          <a:p>
+            <a:pPr algn="l">
+              <a:spcAft>
+                <a:spcPts val="0"/>
+              </a:spcAft>
+            </a:pPr>
+            <a:r>
+              <a:rPr sz="1550" b="0" i="0">
+                <a:solidFill>
+                  <a:srgbClr val="212A26"/>
+                </a:solidFill>
+                <a:latin typeface="Calibri"/>
+              </a:rPr>
+              <a:t>Broadcast without reply-pressure — announcements, wins, context-setting from leadership.</a:t>
+            </a:r>
+          </a:p>
+        </p:txBody>
+      </p:sp>
+      <p:sp>
+        <p:nvSpPr>
+          <p:cNvPr id="10" name="Oval 9" descr="Recorded video / audio messages icon"/>
+          <p:cNvSpPr/>
+          <p:nvPr/>
+        </p:nvSpPr>
+        <p:spPr>
+          <a:xfrm>
+            <a:off x="640080" y="4352544"/>
+            <a:ext cx="566928" cy="566928"/>
+          </a:xfrm>
+          <a:prstGeom prst="ellipse">
+            <a:avLst/>
+          </a:prstGeom>
+          <a:solidFill>
+            <a:srgbClr val="0E4D33"/>
+          </a:solidFill>
+          <a:ln>
+            <a:noFill/>
+          </a:ln>
+          <a:effectLst/>
+        </p:spPr>
+        <p:style>
+          <a:lnRef idx="1">
+            <a:schemeClr val="accent1"/>
+          </a:lnRef>
+          <a:fillRef idx="3">
+            <a:schemeClr val="accent1"/>
+          </a:fillRef>
+          <a:effectRef idx="2">
+            <a:schemeClr val="accent1"/>
+          </a:effectRef>
+          <a:fontRef idx="minor">
+            <a:schemeClr val="lt1"/>
+          </a:fontRef>
+        </p:style>
+        <p:txBody>
+          <a:bodyPr rtlCol="0" anchor="ctr" lIns="0" rIns="0" tIns="0" bIns="0"/>
+          <a:lstStyle/>
+          <a:p>
+            <a:pPr algn="ctr"/>
+            <a:r>
+              <a:rPr sz="1600" b="1">
+                <a:solidFill>
+                  <a:srgbClr val="FFFFFF"/>
+                </a:solidFill>
+                <a:latin typeface="Calibri"/>
+              </a:rPr>
+              <a:t>🎥</a:t>
+            </a:r>
+          </a:p>
+        </p:txBody>
+      </p:sp>
+      <p:sp>
+        <p:nvSpPr>
+          <p:cNvPr id="11" name="TextBox 10" descr="Recorded video / audio messages"/>
+          <p:cNvSpPr txBox="1"/>
+          <p:nvPr/>
+        </p:nvSpPr>
+        <p:spPr>
+          <a:xfrm>
+            <a:off x="1417320" y="4297680"/>
+            <a:ext cx="10241280" cy="1078992"/>
+          </a:xfrm>
+          <a:prstGeom prst="rect">
+            <a:avLst/>
+          </a:prstGeom>
+          <a:noFill/>
+        </p:spPr>
+        <p:txBody>
+          <a:bodyPr wrap="square">
+            <a:spAutoFit/>
+          </a:bodyPr>
+          <a:lstStyle/>
+          <a:p>
+            <a:pPr algn="l">
+              <a:spcAft>
+                <a:spcPts val="200"/>
+              </a:spcAft>
+            </a:pPr>
+            <a:r>
+              <a:rPr sz="1650" b="1" i="0">
+                <a:solidFill>
+                  <a:srgbClr val="0E4D33"/>
+                </a:solidFill>
+                <a:latin typeface="Cambria"/>
+              </a:rPr>
+              <a:t>Recorded video / audio messages</a:t>
+            </a:r>
+          </a:p>
+          <a:p>
+            <a:pPr algn="l">
+              <a:spcAft>
+                <a:spcPts val="0"/>
+              </a:spcAft>
+            </a:pPr>
+            <a:r>
+              <a:rPr sz="1550" b="0" i="0">
+                <a:solidFill>
+                  <a:srgbClr val="212A26"/>
+                </a:solidFill>
+                <a:latin typeface="Calibri"/>
+              </a:rPr>
+              <a:t>Tone-rich broadcast for change and morale; pair with a written summary for searchability.</a:t>
+            </a:r>
+          </a:p>
+        </p:txBody>
+      </p:sp>
+      <p:sp>
+        <p:nvSpPr>
+          <p:cNvPr id="12" name="Oval 11" descr="Forums &amp; open channels icon"/>
+          <p:cNvSpPr/>
+          <p:nvPr/>
+        </p:nvSpPr>
+        <p:spPr>
+          <a:xfrm>
+            <a:off x="640080" y="5541264"/>
+            <a:ext cx="566928" cy="566928"/>
+          </a:xfrm>
+          <a:prstGeom prst="ellipse">
+            <a:avLst/>
+          </a:prstGeom>
+          <a:solidFill>
+            <a:srgbClr val="0E4D33"/>
+          </a:solidFill>
+          <a:ln>
+            <a:noFill/>
+          </a:ln>
+          <a:effectLst/>
+        </p:spPr>
+        <p:style>
+          <a:lnRef idx="1">
+            <a:schemeClr val="accent1"/>
+          </a:lnRef>
+          <a:fillRef idx="3">
+            <a:schemeClr val="accent1"/>
+          </a:fillRef>
+          <a:effectRef idx="2">
+            <a:schemeClr val="accent1"/>
+          </a:effectRef>
+          <a:fontRef idx="minor">
+            <a:schemeClr val="lt1"/>
+          </a:fontRef>
+        </p:style>
+        <p:txBody>
+          <a:bodyPr rtlCol="0" anchor="ctr" lIns="0" rIns="0" tIns="0" bIns="0"/>
+          <a:lstStyle/>
+          <a:p>
+            <a:pPr algn="ctr"/>
+            <a:r>
+              <a:rPr sz="1600" b="1">
+                <a:solidFill>
+                  <a:srgbClr val="FFFFFF"/>
+                </a:solidFill>
+                <a:latin typeface="Calibri"/>
+              </a:rPr>
+              <a:t>💬</a:t>
+            </a:r>
+          </a:p>
+        </p:txBody>
+      </p:sp>
+      <p:sp>
+        <p:nvSpPr>
+          <p:cNvPr id="13" name="TextBox 12" descr="Forums &amp; open channels"/>
+          <p:cNvSpPr txBox="1"/>
+          <p:nvPr/>
+        </p:nvSpPr>
+        <p:spPr>
+          <a:xfrm>
+            <a:off x="1417320" y="5486400"/>
+            <a:ext cx="10241280" cy="1078992"/>
+          </a:xfrm>
+          <a:prstGeom prst="rect">
+            <a:avLst/>
+          </a:prstGeom>
+          <a:noFill/>
+        </p:spPr>
+        <p:txBody>
+          <a:bodyPr wrap="square">
+            <a:spAutoFit/>
+          </a:bodyPr>
+          <a:lstStyle/>
+          <a:p>
+            <a:pPr algn="l">
+              <a:spcAft>
+                <a:spcPts val="200"/>
+              </a:spcAft>
+            </a:pPr>
+            <a:r>
+              <a:rPr sz="1650" b="1" i="0">
+                <a:solidFill>
+                  <a:srgbClr val="0E4D33"/>
+                </a:solidFill>
+                <a:latin typeface="Cambria"/>
+              </a:rPr>
+              <a:t>Forums &amp; open channels</a:t>
+            </a:r>
+          </a:p>
+          <a:p>
+            <a:pPr algn="l">
+              <a:spcAft>
+                <a:spcPts val="0"/>
+              </a:spcAft>
+            </a:pPr>
+            <a:r>
+              <a:rPr sz="1550" b="0" i="0">
+                <a:solidFill>
+                  <a:srgbClr val="212A26"/>
+                </a:solidFill>
+                <a:latin typeface="Calibri"/>
+              </a:rPr>
+              <a:t>Questions asked in public teach everyone — yesterday's answered thread is tomorrow's documentation.</a:t>
+            </a:r>
+          </a:p>
+        </p:txBody>
+      </p:sp>
+    </p:spTree>
+  </p:cSld>
+  <p:clrMapOvr>
+    <a:masterClrMapping/>
+  </p:clrMapOvr>
+</p:sld>
+</file>
+
+<file path=ppt/slides/slide34.xml><?xml version="1.0" encoding="utf-8"?>
+<p:sld xmlns:a="http://schemas.openxmlformats.org/drawingml/2006/main" xmlns:p="http://schemas.openxmlformats.org/presentationml/2006/main" xmlns:r="http://schemas.openxmlformats.org/officeDocument/2006/relationships">
+  <p:cSld>
+    <p:bg>
+      <p:bgPr>
+        <a:solidFill>
+          <a:srgbClr val="FFFFFF"/>
+        </a:solidFill>
+        <a:effectLst/>
+      </p:bgPr>
+    </p:bg>
+    <p:spTree>
+      <p:nvGrpSpPr>
+        <p:cNvPr id="1" name=""/>
+        <p:cNvGrpSpPr/>
+        <p:nvPr/>
+      </p:nvGrpSpPr>
+      <p:grpSpPr/>
+      <p:sp>
+        <p:nvSpPr>
+          <p:cNvPr id="2" name="Title 1" descr="Slide title: Writing for the wiki: findability is the whole game"/>
+          <p:cNvSpPr>
+            <a:spLocks noGrp="1"/>
+          </p:cNvSpPr>
+          <p:nvPr>
+            <p:ph type="title"/>
+          </p:nvPr>
+        </p:nvSpPr>
+        <p:spPr>
+          <a:xfrm>
+            <a:off x="502920" y="411480"/>
+            <a:ext cx="11155680" cy="914400"/>
+          </a:xfrm>
+        </p:spPr>
+        <p:txBody>
+          <a:bodyPr wrap="square"/>
+          <a:lstStyle/>
+          <a:p>
+            <a:pPr algn="l"/>
+            <a:r>
+              <a:rPr sz="3200" b="1">
+                <a:solidFill>
+                  <a:srgbClr val="0E4D33"/>
+                </a:solidFill>
+                <a:latin typeface="Cambria"/>
+              </a:rPr>
+              <a:t>Writing for the wiki: findability is the whole game</a:t>
+            </a:r>
+          </a:p>
+        </p:txBody>
+      </p:sp>
+      <p:sp>
+        <p:nvSpPr>
+          <p:cNvPr id="3" name="TextBox 2" descr="Footer: BADM 225 · Chapter 5"/>
+          <p:cNvSpPr txBox="1"/>
+          <p:nvPr/>
+        </p:nvSpPr>
+        <p:spPr>
+          <a:xfrm>
+            <a:off x="502920" y="6446520"/>
+            <a:ext cx="5486400" cy="320040"/>
+          </a:xfrm>
+          <a:prstGeom prst="rect">
+            <a:avLst/>
+          </a:prstGeom>
+          <a:noFill/>
+        </p:spPr>
+        <p:txBody>
+          <a:bodyPr wrap="none">
+            <a:spAutoFit/>
+          </a:bodyPr>
+          <a:lstStyle/>
+          <a:p>
+            <a:r>
+              <a:rPr sz="1000">
+                <a:solidFill>
+                  <a:srgbClr val="5E6B64"/>
+                </a:solidFill>
+                <a:latin typeface="Calibri"/>
+              </a:rPr>
+              <a:t>BADM 225 · Chapter 5</a:t>
+            </a:r>
+          </a:p>
+        </p:txBody>
+      </p:sp>
+      <p:sp>
+        <p:nvSpPr>
+          <p:cNvPr id="4" name="TextBox 3" descr="Slide number 34"/>
+          <p:cNvSpPr txBox="1"/>
+          <p:nvPr/>
+        </p:nvSpPr>
+        <p:spPr>
+          <a:xfrm>
+            <a:off x="11247120" y="6446520"/>
+            <a:ext cx="640080" cy="320040"/>
+          </a:xfrm>
+          <a:prstGeom prst="rect">
+            <a:avLst/>
+          </a:prstGeom>
+          <a:noFill/>
+        </p:spPr>
+        <p:txBody>
+          <a:bodyPr wrap="none">
+            <a:spAutoFit/>
+          </a:bodyPr>
+          <a:lstStyle/>
+          <a:p>
+            <a:pPr algn="r"/>
+            <a:r>
+              <a:rPr sz="1000">
+                <a:solidFill>
+                  <a:srgbClr val="5E6B64"/>
+                </a:solidFill>
+                <a:latin typeface="Calibri"/>
+              </a:rPr>
+              <a:t>34</a:t>
+            </a:r>
+          </a:p>
+        </p:txBody>
+      </p:sp>
+      <p:sp>
+        <p:nvSpPr>
+          <p:cNvPr id="5" name="TextBox 4" descr="Key points"/>
+          <p:cNvSpPr txBox="1"/>
+          <p:nvPr/>
+        </p:nvSpPr>
+        <p:spPr>
+          <a:xfrm>
+            <a:off x="548640" y="1554480"/>
+            <a:ext cx="11064240" cy="4663440"/>
+          </a:xfrm>
+          <a:prstGeom prst="rect">
+            <a:avLst/>
+          </a:prstGeom>
+          <a:noFill/>
+        </p:spPr>
+        <p:txBody>
+          <a:bodyPr wrap="square">
+            <a:spAutoFit/>
+          </a:bodyPr>
+          <a:lstStyle/>
+          <a:p>
+            <a:pPr algn="l">
+              <a:spcAft>
+                <a:spcPts val="1200"/>
+              </a:spcAft>
+            </a:pPr>
+            <a:r>
+              <a:rPr sz="1700">
+                <a:solidFill>
+                  <a:srgbClr val="8A6410"/>
+                </a:solidFill>
+                <a:latin typeface="Calibri"/>
+              </a:rPr>
+              <a:t>▪  </a:t>
+            </a:r>
+            <a:r>
+              <a:rPr sz="1700" b="1">
+                <a:solidFill>
+                  <a:srgbClr val="0E4D33"/>
+                </a:solidFill>
+                <a:latin typeface="Calibri"/>
+              </a:rPr>
+              <a:t>Title for the searcher, not the writer.  </a:t>
+            </a:r>
+            <a:r>
+              <a:rPr sz="1700" b="0" i="0">
+                <a:solidFill>
+                  <a:srgbClr val="212A26"/>
+                </a:solidFill>
+                <a:latin typeface="Calibri"/>
+              </a:rPr>
+              <a:t>'How to submit a travel reimbursement' — the words a desperate colleague will actually type.</a:t>
+            </a:r>
+          </a:p>
+          <a:p>
+            <a:pPr algn="l">
+              <a:spcAft>
+                <a:spcPts val="1200"/>
+              </a:spcAft>
+            </a:pPr>
+            <a:r>
+              <a:rPr sz="1700">
+                <a:solidFill>
+                  <a:srgbClr val="8A6410"/>
+                </a:solidFill>
+                <a:latin typeface="Calibri"/>
+              </a:rPr>
+              <a:t>▪  </a:t>
+            </a:r>
+            <a:r>
+              <a:rPr sz="1700" b="1">
+                <a:solidFill>
+                  <a:srgbClr val="0E4D33"/>
+                </a:solidFill>
+                <a:latin typeface="Calibri"/>
+              </a:rPr>
+              <a:t>Answer first, context after.  </a:t>
+            </a:r>
+            <a:r>
+              <a:rPr sz="1700" b="0" i="0">
+                <a:solidFill>
+                  <a:srgbClr val="212A26"/>
+                </a:solidFill>
+                <a:latin typeface="Calibri"/>
+              </a:rPr>
+              <a:t>Wiki readers arrive mid-task; give the steps, then the background (the inverted pyramid, again).</a:t>
+            </a:r>
+          </a:p>
+          <a:p>
+            <a:pPr algn="l">
+              <a:spcAft>
+                <a:spcPts val="1200"/>
+              </a:spcAft>
+            </a:pPr>
+            <a:r>
+              <a:rPr sz="1700">
+                <a:solidFill>
+                  <a:srgbClr val="8A6410"/>
+                </a:solidFill>
+                <a:latin typeface="Calibri"/>
+              </a:rPr>
+              <a:t>▪  </a:t>
+            </a:r>
+            <a:r>
+              <a:rPr sz="1700" b="1">
+                <a:solidFill>
+                  <a:srgbClr val="0E4D33"/>
+                </a:solidFill>
+                <a:latin typeface="Calibri"/>
+              </a:rPr>
+              <a:t>Date it and own it.  </a:t>
+            </a:r>
+            <a:r>
+              <a:rPr sz="1700" b="0" i="0">
+                <a:solidFill>
+                  <a:srgbClr val="212A26"/>
+                </a:solidFill>
+                <a:latin typeface="Calibri"/>
+              </a:rPr>
+              <a:t>Every page shows when it was last verified and who maintains it — undated pages read as unreliable and usually are.</a:t>
+            </a:r>
+          </a:p>
+          <a:p>
+            <a:pPr algn="l">
+              <a:spcAft>
+                <a:spcPts val="1200"/>
+              </a:spcAft>
+            </a:pPr>
+            <a:r>
+              <a:rPr sz="1700">
+                <a:solidFill>
+                  <a:srgbClr val="8A6410"/>
+                </a:solidFill>
+                <a:latin typeface="Calibri"/>
+              </a:rPr>
+              <a:t>▪  </a:t>
+            </a:r>
+            <a:r>
+              <a:rPr sz="1700" b="1">
+                <a:solidFill>
+                  <a:srgbClr val="0E4D33"/>
+                </a:solidFill>
+                <a:latin typeface="Calibri"/>
+              </a:rPr>
+              <a:t>Delete or redirect the obsolete.  </a:t>
+            </a:r>
+            <a:r>
+              <a:rPr sz="1700" b="0" i="0">
+                <a:solidFill>
+                  <a:srgbClr val="212A26"/>
+                </a:solidFill>
+                <a:latin typeface="Calibri"/>
+              </a:rPr>
+              <a:t>A wrong wiki page is worse than none; it answers confidently and incorrectly forever.</a:t>
+            </a:r>
+          </a:p>
+        </p:txBody>
+      </p:sp>
+    </p:spTree>
+  </p:cSld>
+  <p:clrMapOvr>
+    <a:masterClrMapping/>
+  </p:clrMapOvr>
+</p:sld>
+</file>
+
+<file path=ppt/slides/slide35.xml><?xml version="1.0" encoding="utf-8"?>
+<p:sld xmlns:a="http://schemas.openxmlformats.org/drawingml/2006/main" xmlns:p="http://schemas.openxmlformats.org/presentationml/2006/main" xmlns:r="http://schemas.openxmlformats.org/officeDocument/2006/relationships">
+  <p:cSld>
+    <p:bg>
+      <p:bgPr>
+        <a:solidFill>
+          <a:srgbClr val="FFFFFF"/>
+        </a:solidFill>
+        <a:effectLst/>
+      </p:bgPr>
+    </p:bg>
+    <p:spTree>
+      <p:nvGrpSpPr>
+        <p:cNvPr id="1" name=""/>
+        <p:cNvGrpSpPr/>
+        <p:nvPr/>
+      </p:nvGrpSpPr>
+      <p:grpSpPr/>
+      <p:sp>
+        <p:nvSpPr>
+          <p:cNvPr id="2" name="Title 1" descr="Slide title: Video message or written message?"/>
+          <p:cNvSpPr>
+            <a:spLocks noGrp="1"/>
+          </p:cNvSpPr>
+          <p:nvPr>
+            <p:ph type="title"/>
+          </p:nvPr>
+        </p:nvSpPr>
+        <p:spPr>
+          <a:xfrm>
+            <a:off x="502920" y="411480"/>
+            <a:ext cx="11155680" cy="914400"/>
+          </a:xfrm>
+        </p:spPr>
+        <p:txBody>
+          <a:bodyPr wrap="square"/>
+          <a:lstStyle/>
+          <a:p>
+            <a:pPr algn="l"/>
+            <a:r>
+              <a:rPr sz="3200" b="1">
+                <a:solidFill>
+                  <a:srgbClr val="0E4D33"/>
+                </a:solidFill>
+                <a:latin typeface="Cambria"/>
+              </a:rPr>
+              <a:t>Video message or written message?</a:t>
+            </a:r>
+          </a:p>
+        </p:txBody>
+      </p:sp>
+      <p:sp>
+        <p:nvSpPr>
+          <p:cNvPr id="3" name="TextBox 2" descr="Footer: BADM 225 · Chapter 5"/>
+          <p:cNvSpPr txBox="1"/>
+          <p:nvPr/>
+        </p:nvSpPr>
+        <p:spPr>
+          <a:xfrm>
+            <a:off x="502920" y="6446520"/>
+            <a:ext cx="5486400" cy="320040"/>
+          </a:xfrm>
+          <a:prstGeom prst="rect">
+            <a:avLst/>
+          </a:prstGeom>
+          <a:noFill/>
+        </p:spPr>
+        <p:txBody>
+          <a:bodyPr wrap="none">
+            <a:spAutoFit/>
+          </a:bodyPr>
+          <a:lstStyle/>
+          <a:p>
+            <a:r>
+              <a:rPr sz="1000">
+                <a:solidFill>
+                  <a:srgbClr val="5E6B64"/>
+                </a:solidFill>
+                <a:latin typeface="Calibri"/>
+              </a:rPr>
+              <a:t>BADM 225 · Chapter 5</a:t>
+            </a:r>
+          </a:p>
+        </p:txBody>
+      </p:sp>
+      <p:sp>
+        <p:nvSpPr>
+          <p:cNvPr id="4" name="TextBox 3" descr="Slide number 35"/>
+          <p:cNvSpPr txBox="1"/>
+          <p:nvPr/>
+        </p:nvSpPr>
+        <p:spPr>
+          <a:xfrm>
+            <a:off x="11247120" y="6446520"/>
+            <a:ext cx="640080" cy="320040"/>
+          </a:xfrm>
+          <a:prstGeom prst="rect">
+            <a:avLst/>
+          </a:prstGeom>
+          <a:noFill/>
+        </p:spPr>
+        <p:txBody>
+          <a:bodyPr wrap="none">
+            <a:spAutoFit/>
+          </a:bodyPr>
+          <a:lstStyle/>
+          <a:p>
+            <a:pPr algn="r"/>
+            <a:r>
+              <a:rPr sz="1000">
+                <a:solidFill>
+                  <a:srgbClr val="5E6B64"/>
+                </a:solidFill>
+                <a:latin typeface="Calibri"/>
+              </a:rPr>
+              <a:t>35</a:t>
+            </a:r>
+          </a:p>
+        </p:txBody>
+      </p:sp>
+      <p:sp>
+        <p:nvSpPr>
+          <p:cNvPr id="5" name="Rounded Rectangle 4" descr="Record VIDEO when… panel"/>
+          <p:cNvSpPr/>
+          <p:nvPr/>
+        </p:nvSpPr>
+        <p:spPr>
+          <a:xfrm>
+            <a:off x="548640" y="1554480"/>
+            <a:ext cx="5394960" cy="4572000"/>
+          </a:xfrm>
+          <a:prstGeom prst="roundRect">
+            <a:avLst/>
+          </a:prstGeom>
+          <a:solidFill>
+            <a:srgbClr val="EAF1EB"/>
+          </a:solidFill>
+          <a:ln>
+            <a:noFill/>
+          </a:ln>
+          <a:effectLst/>
+        </p:spPr>
+        <p:style>
+          <a:lnRef idx="1">
+            <a:schemeClr val="accent1"/>
+          </a:lnRef>
+          <a:fillRef idx="3">
+            <a:schemeClr val="accent1"/>
+          </a:fillRef>
+          <a:effectRef idx="2">
+            <a:schemeClr val="accent1"/>
+          </a:effectRef>
+          <a:fontRef idx="minor">
+            <a:schemeClr val="lt1"/>
+          </a:fontRef>
+        </p:style>
+        <p:txBody>
+          <a:bodyPr rtlCol="0" anchor="t" wrap="square" lIns="164592" rIns="164592" tIns="128016" bIns="109728"/>
+          <a:lstStyle/>
+          <a:p>
+            <a:pPr algn="l">
+              <a:spcAft>
+                <a:spcPts val="1200"/>
+              </a:spcAft>
+            </a:pPr>
+            <a:r>
+              <a:rPr sz="1800" b="1" i="0">
+                <a:solidFill>
+                  <a:srgbClr val="0E4D33"/>
+                </a:solidFill>
+                <a:latin typeface="Cambria"/>
+              </a:rPr>
+              <a:t>Record VIDEO when…</a:t>
+            </a:r>
+          </a:p>
+          <a:p>
+            <a:pPr algn="l">
+              <a:spcAft>
+                <a:spcPts val="900"/>
+              </a:spcAft>
+            </a:pPr>
+            <a:r>
+              <a:rPr sz="1500">
+                <a:solidFill>
+                  <a:srgbClr val="8A6410"/>
+                </a:solidFill>
+                <a:latin typeface="Calibri"/>
+              </a:rPr>
+              <a:t>▪  </a:t>
+            </a:r>
+            <a:r>
+              <a:rPr sz="1500" b="0" i="0">
+                <a:solidFill>
+                  <a:srgbClr val="212A26"/>
+                </a:solidFill>
+                <a:latin typeface="Calibri"/>
+              </a:rPr>
+              <a:t>Tone carries the content: change, thanks, morale</a:t>
+            </a:r>
+          </a:p>
+          <a:p>
+            <a:pPr algn="l">
+              <a:spcAft>
+                <a:spcPts val="900"/>
+              </a:spcAft>
+            </a:pPr>
+            <a:r>
+              <a:rPr sz="1500">
+                <a:solidFill>
+                  <a:srgbClr val="8A6410"/>
+                </a:solidFill>
+                <a:latin typeface="Calibri"/>
+              </a:rPr>
+              <a:t>▪  </a:t>
+            </a:r>
+            <a:r>
+              <a:rPr sz="1500" b="0" i="0">
+                <a:solidFill>
+                  <a:srgbClr val="212A26"/>
+                </a:solidFill>
+                <a:latin typeface="Calibri"/>
+              </a:rPr>
+              <a:t>You're demonstrating something visual</a:t>
+            </a:r>
+          </a:p>
+          <a:p>
+            <a:pPr algn="l">
+              <a:spcAft>
+                <a:spcPts val="900"/>
+              </a:spcAft>
+            </a:pPr>
+            <a:r>
+              <a:rPr sz="1500">
+                <a:solidFill>
+                  <a:srgbClr val="8A6410"/>
+                </a:solidFill>
+                <a:latin typeface="Calibri"/>
+              </a:rPr>
+              <a:t>▪  </a:t>
+            </a:r>
+            <a:r>
+              <a:rPr sz="1500" b="0" i="0">
+                <a:solidFill>
+                  <a:srgbClr val="212A26"/>
+                </a:solidFill>
+                <a:latin typeface="Calibri"/>
+              </a:rPr>
+              <a:t>The audience is broad and the message is once</a:t>
+            </a:r>
+          </a:p>
+          <a:p>
+            <a:pPr algn="l">
+              <a:spcAft>
+                <a:spcPts val="900"/>
+              </a:spcAft>
+            </a:pPr>
+            <a:r>
+              <a:rPr sz="1500">
+                <a:solidFill>
+                  <a:srgbClr val="8A6410"/>
+                </a:solidFill>
+                <a:latin typeface="Calibri"/>
+              </a:rPr>
+              <a:t>▪  </a:t>
+            </a:r>
+            <a:r>
+              <a:rPr sz="1500" b="1">
+                <a:solidFill>
+                  <a:srgbClr val="0E4D33"/>
+                </a:solidFill>
+                <a:latin typeface="Calibri"/>
+              </a:rPr>
+              <a:t>Always:  </a:t>
+            </a:r>
+            <a:r>
+              <a:rPr sz="1500" b="0" i="0">
+                <a:solidFill>
+                  <a:srgbClr val="212A26"/>
+                </a:solidFill>
+                <a:latin typeface="Calibri"/>
+              </a:rPr>
+              <a:t>keep it short and attach the decisions in text</a:t>
+            </a:r>
+          </a:p>
+        </p:txBody>
+      </p:sp>
+      <p:sp>
+        <p:nvSpPr>
+          <p:cNvPr id="6" name="Rounded Rectangle 5" descr="Write TEXT when… panel"/>
+          <p:cNvSpPr/>
+          <p:nvPr/>
+        </p:nvSpPr>
+        <p:spPr>
+          <a:xfrm>
+            <a:off x="6263640" y="1554480"/>
+            <a:ext cx="5394960" cy="4572000"/>
+          </a:xfrm>
+          <a:prstGeom prst="roundRect">
+            <a:avLst/>
+          </a:prstGeom>
+          <a:solidFill>
+            <a:srgbClr val="EAF1EB"/>
+          </a:solidFill>
+          <a:ln>
+            <a:noFill/>
+          </a:ln>
+          <a:effectLst/>
+        </p:spPr>
+        <p:style>
+          <a:lnRef idx="1">
+            <a:schemeClr val="accent1"/>
+          </a:lnRef>
+          <a:fillRef idx="3">
+            <a:schemeClr val="accent1"/>
+          </a:fillRef>
+          <a:effectRef idx="2">
+            <a:schemeClr val="accent1"/>
+          </a:effectRef>
+          <a:fontRef idx="minor">
+            <a:schemeClr val="lt1"/>
+          </a:fontRef>
+        </p:style>
+        <p:txBody>
+          <a:bodyPr rtlCol="0" anchor="t" wrap="square" lIns="164592" rIns="164592" tIns="128016" bIns="109728"/>
+          <a:lstStyle/>
+          <a:p>
+            <a:pPr algn="l">
+              <a:spcAft>
+                <a:spcPts val="1200"/>
+              </a:spcAft>
+            </a:pPr>
+            <a:r>
+              <a:rPr sz="1800" b="1" i="0">
+                <a:solidFill>
+                  <a:srgbClr val="0E4D33"/>
+                </a:solidFill>
+                <a:latin typeface="Cambria"/>
+              </a:rPr>
+              <a:t>Write TEXT when…</a:t>
+            </a:r>
+          </a:p>
+          <a:p>
+            <a:pPr algn="l">
+              <a:spcAft>
+                <a:spcPts val="900"/>
+              </a:spcAft>
+            </a:pPr>
+            <a:r>
+              <a:rPr sz="1500">
+                <a:solidFill>
+                  <a:srgbClr val="8A6410"/>
+                </a:solidFill>
+                <a:latin typeface="Calibri"/>
+              </a:rPr>
+              <a:t>▪  </a:t>
+            </a:r>
+            <a:r>
+              <a:rPr sz="1500" b="0" i="0">
+                <a:solidFill>
+                  <a:srgbClr val="212A26"/>
+                </a:solidFill>
+                <a:latin typeface="Calibri"/>
+              </a:rPr>
+              <a:t>Anyone will need to find it later — video is unsearchable</a:t>
+            </a:r>
+          </a:p>
+          <a:p>
+            <a:pPr algn="l">
+              <a:spcAft>
+                <a:spcPts val="900"/>
+              </a:spcAft>
+            </a:pPr>
+            <a:r>
+              <a:rPr sz="1500">
+                <a:solidFill>
+                  <a:srgbClr val="8A6410"/>
+                </a:solidFill>
+                <a:latin typeface="Calibri"/>
+              </a:rPr>
+              <a:t>▪  </a:t>
+            </a:r>
+            <a:r>
+              <a:rPr sz="1500" b="0" i="0">
+                <a:solidFill>
+                  <a:srgbClr val="212A26"/>
+                </a:solidFill>
+                <a:latin typeface="Calibri"/>
+              </a:rPr>
+              <a:t>Readers need to skim, quote, or forward pieces</a:t>
+            </a:r>
+          </a:p>
+          <a:p>
+            <a:pPr algn="l">
+              <a:spcAft>
+                <a:spcPts val="900"/>
+              </a:spcAft>
+            </a:pPr>
+            <a:r>
+              <a:rPr sz="1500">
+                <a:solidFill>
+                  <a:srgbClr val="8A6410"/>
+                </a:solidFill>
+                <a:latin typeface="Calibri"/>
+              </a:rPr>
+              <a:t>▪  </a:t>
+            </a:r>
+            <a:r>
+              <a:rPr sz="1500" b="0" i="0">
+                <a:solidFill>
+                  <a:srgbClr val="212A26"/>
+                </a:solidFill>
+                <a:latin typeface="Calibri"/>
+              </a:rPr>
+              <a:t>Precision matters: numbers, dates, commitments</a:t>
+            </a:r>
+          </a:p>
+          <a:p>
+            <a:pPr algn="l">
+              <a:spcAft>
+                <a:spcPts val="900"/>
+              </a:spcAft>
+            </a:pPr>
+            <a:r>
+              <a:rPr sz="1500">
+                <a:solidFill>
+                  <a:srgbClr val="8A6410"/>
+                </a:solidFill>
+                <a:latin typeface="Calibri"/>
+              </a:rPr>
+              <a:t>▪  </a:t>
+            </a:r>
+            <a:r>
+              <a:rPr sz="1500" b="1">
+                <a:solidFill>
+                  <a:srgbClr val="0E4D33"/>
+                </a:solidFill>
+                <a:latin typeface="Calibri"/>
+              </a:rPr>
+              <a:t>Test:  </a:t>
+            </a:r>
+            <a:r>
+              <a:rPr sz="1500" b="0" i="0">
+                <a:solidFill>
+                  <a:srgbClr val="212A26"/>
+                </a:solidFill>
+                <a:latin typeface="Calibri"/>
+              </a:rPr>
+              <a:t>if someone will ask 'what exactly did they say?' — text</a:t>
+            </a:r>
+          </a:p>
+        </p:txBody>
+      </p:sp>
+    </p:spTree>
+  </p:cSld>
+  <p:clrMapOvr>
+    <a:masterClrMapping/>
+  </p:clrMapOvr>
+</p:sld>
+</file>
+
+<file path=ppt/slides/slide36.xml><?xml version="1.0" encoding="utf-8"?>
+<p:sld xmlns:a="http://schemas.openxmlformats.org/drawingml/2006/main" xmlns:p="http://schemas.openxmlformats.org/presentationml/2006/main" xmlns:r="http://schemas.openxmlformats.org/officeDocument/2006/relationships">
+  <p:cSld>
+    <p:bg>
+      <p:bgPr>
+        <a:solidFill>
+          <a:srgbClr val="FFFFFF"/>
+        </a:solidFill>
+        <a:effectLst/>
+      </p:bgPr>
+    </p:bg>
+    <p:spTree>
+      <p:nvGrpSpPr>
+        <p:cNvPr id="1" name=""/>
+        <p:cNvGrpSpPr/>
+        <p:nvPr/>
+      </p:nvGrpSpPr>
+      <p:grpSpPr/>
+      <p:sp>
+        <p:nvSpPr>
+          <p:cNvPr id="2" name="Title 1" descr="Slide title: Signature block anatomy (this unit's assignment)"/>
+          <p:cNvSpPr>
+            <a:spLocks noGrp="1"/>
+          </p:cNvSpPr>
+          <p:nvPr>
+            <p:ph type="title"/>
+          </p:nvPr>
+        </p:nvSpPr>
+        <p:spPr>
+          <a:xfrm>
+            <a:off x="502920" y="411480"/>
+            <a:ext cx="11155680" cy="914400"/>
+          </a:xfrm>
+        </p:spPr>
+        <p:txBody>
+          <a:bodyPr wrap="square"/>
+          <a:lstStyle/>
+          <a:p>
+            <a:pPr algn="l"/>
+            <a:r>
+              <a:rPr sz="3200" b="1">
+                <a:solidFill>
+                  <a:srgbClr val="0E4D33"/>
+                </a:solidFill>
+                <a:latin typeface="Cambria"/>
+              </a:rPr>
+              <a:t>Signature block anatomy (this unit's assignment)</a:t>
+            </a:r>
+          </a:p>
+        </p:txBody>
+      </p:sp>
+      <p:sp>
+        <p:nvSpPr>
+          <p:cNvPr id="3" name="TextBox 2" descr="Footer: BADM 225 · Chapter 5"/>
+          <p:cNvSpPr txBox="1"/>
+          <p:nvPr/>
+        </p:nvSpPr>
+        <p:spPr>
+          <a:xfrm>
+            <a:off x="502920" y="6446520"/>
+            <a:ext cx="5486400" cy="320040"/>
+          </a:xfrm>
+          <a:prstGeom prst="rect">
+            <a:avLst/>
+          </a:prstGeom>
+          <a:noFill/>
+        </p:spPr>
+        <p:txBody>
+          <a:bodyPr wrap="none">
+            <a:spAutoFit/>
+          </a:bodyPr>
+          <a:lstStyle/>
+          <a:p>
+            <a:r>
+              <a:rPr sz="1000">
+                <a:solidFill>
+                  <a:srgbClr val="5E6B64"/>
+                </a:solidFill>
+                <a:latin typeface="Calibri"/>
+              </a:rPr>
+              <a:t>BADM 225 · Chapter 5</a:t>
+            </a:r>
+          </a:p>
+        </p:txBody>
+      </p:sp>
+      <p:sp>
+        <p:nvSpPr>
+          <p:cNvPr id="4" name="TextBox 3" descr="Slide number 36"/>
+          <p:cNvSpPr txBox="1"/>
+          <p:nvPr/>
+        </p:nvSpPr>
+        <p:spPr>
+          <a:xfrm>
+            <a:off x="11247120" y="6446520"/>
+            <a:ext cx="640080" cy="320040"/>
+          </a:xfrm>
+          <a:prstGeom prst="rect">
+            <a:avLst/>
+          </a:prstGeom>
+          <a:noFill/>
+        </p:spPr>
+        <p:txBody>
+          <a:bodyPr wrap="none">
+            <a:spAutoFit/>
+          </a:bodyPr>
+          <a:lstStyle/>
+          <a:p>
+            <a:pPr algn="r"/>
+            <a:r>
+              <a:rPr sz="1000">
+                <a:solidFill>
+                  <a:srgbClr val="5E6B64"/>
+                </a:solidFill>
+                <a:latin typeface="Calibri"/>
+              </a:rPr>
+              <a:t>36</a:t>
+            </a:r>
+          </a:p>
+        </p:txBody>
+      </p:sp>
+      <p:sp>
+        <p:nvSpPr>
+          <p:cNvPr id="5" name="TextBox 4" descr="Key points"/>
+          <p:cNvSpPr txBox="1"/>
+          <p:nvPr/>
+        </p:nvSpPr>
+        <p:spPr>
+          <a:xfrm>
+            <a:off x="548640" y="1554480"/>
+            <a:ext cx="11064240" cy="4663440"/>
+          </a:xfrm>
+          <a:prstGeom prst="rect">
+            <a:avLst/>
+          </a:prstGeom>
+          <a:noFill/>
+        </p:spPr>
+        <p:txBody>
+          <a:bodyPr wrap="square">
+            <a:spAutoFit/>
+          </a:bodyPr>
+          <a:lstStyle/>
+          <a:p>
+            <a:pPr algn="l">
+              <a:spcAft>
+                <a:spcPts val="1200"/>
+              </a:spcAft>
+            </a:pPr>
+            <a:r>
+              <a:rPr sz="1700">
+                <a:solidFill>
+                  <a:srgbClr val="8A6410"/>
+                </a:solidFill>
+                <a:latin typeface="Calibri"/>
+              </a:rPr>
+              <a:t>▪  </a:t>
+            </a:r>
+            <a:r>
+              <a:rPr sz="1700" b="1">
+                <a:solidFill>
+                  <a:srgbClr val="0E4D33"/>
+                </a:solidFill>
+                <a:latin typeface="Calibri"/>
+              </a:rPr>
+              <a:t>The load-bearing four:  </a:t>
+            </a:r>
+            <a:r>
+              <a:rPr sz="1700" b="0" i="0">
+                <a:solidFill>
+                  <a:srgbClr val="212A26"/>
+                </a:solidFill>
+                <a:latin typeface="Calibri"/>
+              </a:rPr>
+              <a:t>name · title · organization · one phone number. Everything else is optional.</a:t>
+            </a:r>
+          </a:p>
+          <a:p>
+            <a:pPr algn="l">
+              <a:spcAft>
+                <a:spcPts val="1200"/>
+              </a:spcAft>
+            </a:pPr>
+            <a:r>
+              <a:rPr sz="1700">
+                <a:solidFill>
+                  <a:srgbClr val="8A6410"/>
+                </a:solidFill>
+                <a:latin typeface="Calibri"/>
+              </a:rPr>
+              <a:t>▪  </a:t>
+            </a:r>
+            <a:r>
+              <a:rPr sz="1700" b="1">
+                <a:solidFill>
+                  <a:srgbClr val="0E4D33"/>
+                </a:solidFill>
+                <a:latin typeface="Calibri"/>
+              </a:rPr>
+              <a:t>Optional and fine:  </a:t>
+            </a:r>
+            <a:r>
+              <a:rPr sz="1700" b="0" i="0">
+                <a:solidFill>
+                  <a:srgbClr val="212A26"/>
+                </a:solidFill>
+                <a:latin typeface="Calibri"/>
+              </a:rPr>
+              <a:t>pronouns, LinkedIn URL, office hours or time zone — anything that helps a stranger reach you correctly.</a:t>
+            </a:r>
+          </a:p>
+          <a:p>
+            <a:pPr algn="l">
+              <a:spcAft>
+                <a:spcPts val="1200"/>
+              </a:spcAft>
+            </a:pPr>
+            <a:r>
+              <a:rPr sz="1700">
+                <a:solidFill>
+                  <a:srgbClr val="8A6410"/>
+                </a:solidFill>
+                <a:latin typeface="Calibri"/>
+              </a:rPr>
+              <a:t>▪  </a:t>
+            </a:r>
+            <a:r>
+              <a:rPr sz="1700" b="1">
+                <a:solidFill>
+                  <a:srgbClr val="0E4D33"/>
+                </a:solidFill>
+                <a:latin typeface="Calibri"/>
+              </a:rPr>
+              <a:t>Leave out:  </a:t>
+            </a:r>
+            <a:r>
+              <a:rPr sz="1700" b="0" i="0">
+                <a:solidFill>
+                  <a:srgbClr val="212A26"/>
+                </a:solidFill>
+                <a:latin typeface="Calibri"/>
+              </a:rPr>
+              <a:t>inspirational quote forests, six social icons, legal disclaimers you weren't told to add, and images that arrive as attachment paperclips.</a:t>
+            </a:r>
+          </a:p>
+          <a:p>
+            <a:pPr algn="l">
+              <a:spcAft>
+                <a:spcPts val="1200"/>
+              </a:spcAft>
+            </a:pPr>
+            <a:r>
+              <a:rPr sz="1700">
+                <a:solidFill>
+                  <a:srgbClr val="8A6410"/>
+                </a:solidFill>
+                <a:latin typeface="Calibri"/>
+              </a:rPr>
+              <a:t>▪  </a:t>
+            </a:r>
+            <a:r>
+              <a:rPr sz="1700" b="1">
+                <a:solidFill>
+                  <a:srgbClr val="0E4D33"/>
+                </a:solidFill>
+                <a:latin typeface="Calibri"/>
+              </a:rPr>
+              <a:t>Test it where it will live:  </a:t>
+            </a:r>
+            <a:r>
+              <a:rPr sz="1700" b="0" i="0">
+                <a:solidFill>
+                  <a:srgbClr val="212A26"/>
+                </a:solidFill>
+                <a:latin typeface="Calibri"/>
+              </a:rPr>
+              <a:t>on a phone screen, in a reply chain, in plain-text mode — the signature that only works in one client doesn't work.</a:t>
+            </a:r>
+          </a:p>
+        </p:txBody>
+      </p:sp>
+    </p:spTree>
+  </p:cSld>
+  <p:clrMapOvr>
+    <a:masterClrMapping/>
+  </p:clrMapOvr>
+</p:sld>
+</file>
+
+<file path=ppt/slides/slide37.xml><?xml version="1.0" encoding="utf-8"?>
+<p:sld xmlns:a="http://schemas.openxmlformats.org/drawingml/2006/main" xmlns:p="http://schemas.openxmlformats.org/presentationml/2006/main" xmlns:r="http://schemas.openxmlformats.org/officeDocument/2006/relationships">
+  <p:cSld>
+    <p:bg>
+      <p:bgPr>
+        <a:solidFill>
+          <a:srgbClr val="FFFFFF"/>
+        </a:solidFill>
+        <a:effectLst/>
+      </p:bgPr>
+    </p:bg>
+    <p:spTree>
+      <p:nvGrpSpPr>
+        <p:cNvPr id="1" name=""/>
+        <p:cNvGrpSpPr/>
+        <p:nvPr/>
+      </p:nvGrpSpPr>
+      <p:grpSpPr/>
+      <p:sp>
+        <p:nvSpPr>
+          <p:cNvPr id="2" name="Title 1" descr="Slide title: The real cost of 'quick' interruptions"/>
+          <p:cNvSpPr>
+            <a:spLocks noGrp="1"/>
+          </p:cNvSpPr>
+          <p:nvPr>
+            <p:ph type="title"/>
+          </p:nvPr>
+        </p:nvSpPr>
+        <p:spPr>
+          <a:xfrm>
+            <a:off x="502920" y="411480"/>
+            <a:ext cx="11155680" cy="914400"/>
+          </a:xfrm>
+        </p:spPr>
+        <p:txBody>
+          <a:bodyPr wrap="square"/>
+          <a:lstStyle/>
+          <a:p>
+            <a:pPr algn="l"/>
+            <a:r>
+              <a:rPr sz="3200" b="1">
+                <a:solidFill>
+                  <a:srgbClr val="0E4D33"/>
+                </a:solidFill>
+                <a:latin typeface="Cambria"/>
+              </a:rPr>
+              <a:t>The real cost of 'quick' interruptions</a:t>
+            </a:r>
+          </a:p>
+        </p:txBody>
+      </p:sp>
+      <p:sp>
+        <p:nvSpPr>
+          <p:cNvPr id="3" name="TextBox 2" descr="Footer: BADM 225 · Chapter 5"/>
+          <p:cNvSpPr txBox="1"/>
+          <p:nvPr/>
+        </p:nvSpPr>
+        <p:spPr>
+          <a:xfrm>
+            <a:off x="502920" y="6446520"/>
+            <a:ext cx="5486400" cy="320040"/>
+          </a:xfrm>
+          <a:prstGeom prst="rect">
+            <a:avLst/>
+          </a:prstGeom>
+          <a:noFill/>
+        </p:spPr>
+        <p:txBody>
+          <a:bodyPr wrap="none">
+            <a:spAutoFit/>
+          </a:bodyPr>
+          <a:lstStyle/>
+          <a:p>
+            <a:r>
+              <a:rPr sz="1000">
+                <a:solidFill>
+                  <a:srgbClr val="5E6B64"/>
+                </a:solidFill>
+                <a:latin typeface="Calibri"/>
+              </a:rPr>
+              <a:t>BADM 225 · Chapter 5</a:t>
+            </a:r>
+          </a:p>
+        </p:txBody>
+      </p:sp>
+      <p:sp>
+        <p:nvSpPr>
+          <p:cNvPr id="4" name="TextBox 3" descr="Slide number 37"/>
+          <p:cNvSpPr txBox="1"/>
+          <p:nvPr/>
+        </p:nvSpPr>
+        <p:spPr>
+          <a:xfrm>
+            <a:off x="11247120" y="6446520"/>
+            <a:ext cx="640080" cy="320040"/>
+          </a:xfrm>
+          <a:prstGeom prst="rect">
+            <a:avLst/>
+          </a:prstGeom>
+          <a:noFill/>
+        </p:spPr>
+        <p:txBody>
+          <a:bodyPr wrap="none">
+            <a:spAutoFit/>
+          </a:bodyPr>
+          <a:lstStyle/>
+          <a:p>
+            <a:pPr algn="r"/>
+            <a:r>
+              <a:rPr sz="1000">
+                <a:solidFill>
+                  <a:srgbClr val="5E6B64"/>
+                </a:solidFill>
+                <a:latin typeface="Calibri"/>
+              </a:rPr>
+              <a:t>37</a:t>
+            </a:r>
+          </a:p>
+        </p:txBody>
+      </p:sp>
+      <p:sp>
+        <p:nvSpPr>
+          <p:cNvPr id="5" name="Rounded Rectangle 4" descr="Highlighted statistic"/>
+          <p:cNvSpPr/>
+          <p:nvPr/>
+        </p:nvSpPr>
+        <p:spPr>
+          <a:xfrm>
+            <a:off x="548640" y="1645920"/>
+            <a:ext cx="4206240" cy="4206240"/>
+          </a:xfrm>
+          <a:prstGeom prst="roundRect">
+            <a:avLst/>
+          </a:prstGeom>
+          <a:solidFill>
+            <a:srgbClr val="0E4D33"/>
+          </a:solidFill>
+          <a:ln>
+            <a:noFill/>
+          </a:ln>
+          <a:effectLst/>
+        </p:spPr>
+        <p:style>
+          <a:lnRef idx="1">
+            <a:schemeClr val="accent1"/>
+          </a:lnRef>
+          <a:fillRef idx="3">
+            <a:schemeClr val="accent1"/>
+          </a:fillRef>
+          <a:effectRef idx="2">
+            <a:schemeClr val="accent1"/>
+          </a:effectRef>
+          <a:fontRef idx="minor">
+            <a:schemeClr val="lt1"/>
+          </a:fontRef>
+        </p:style>
+        <p:txBody>
+          <a:bodyPr rtlCol="0" anchor="t" wrap="square" lIns="164592" rIns="164592" tIns="128016" bIns="109728"/>
+          <a:lstStyle/>
+          <a:p>
+            <a:pPr algn="ctr">
+              <a:spcAft>
+                <a:spcPts val="400"/>
+              </a:spcAft>
+            </a:pPr>
+            <a:r>
+              <a:rPr sz="6400" b="1">
+                <a:solidFill>
+                  <a:srgbClr val="FFFFFF"/>
+                </a:solidFill>
+                <a:latin typeface="Cambria"/>
+              </a:rPr>
+              <a:t>~23 min</a:t>
+            </a:r>
+          </a:p>
+          <a:p>
+            <a:pPr algn="ctr">
+              <a:spcAft>
+                <a:spcPts val="800"/>
+              </a:spcAft>
+            </a:pPr>
+            <a:r>
+              <a:rPr sz="1500" b="0" i="0">
+                <a:solidFill>
+                  <a:srgbClr val="EAF1EB"/>
+                </a:solidFill>
+                <a:latin typeface="Calibri"/>
+              </a:rPr>
+              <a:t>is roughly how long it takes to fully re-engage with demanding work after an interruption, in University of California, Irvine research on task switching (Mark et al.).</a:t>
+            </a:r>
+          </a:p>
+        </p:txBody>
+      </p:sp>
+      <p:sp>
+        <p:nvSpPr>
+          <p:cNvPr id="6" name="TextBox 5" descr="Supporting points"/>
+          <p:cNvSpPr txBox="1"/>
+          <p:nvPr/>
+        </p:nvSpPr>
+        <p:spPr>
+          <a:xfrm>
+            <a:off x="5212080" y="1737360"/>
+            <a:ext cx="6400800" cy="4297680"/>
+          </a:xfrm>
+          <a:prstGeom prst="rect">
+            <a:avLst/>
+          </a:prstGeom>
+          <a:noFill/>
+        </p:spPr>
+        <p:txBody>
+          <a:bodyPr wrap="square">
+            <a:spAutoFit/>
+          </a:bodyPr>
+          <a:lstStyle/>
+          <a:p>
+            <a:pPr algn="l">
+              <a:spcAft>
+                <a:spcPts val="1400"/>
+              </a:spcAft>
+            </a:pPr>
+            <a:r>
+              <a:rPr sz="1600">
+                <a:solidFill>
+                  <a:srgbClr val="8A6410"/>
+                </a:solidFill>
+                <a:latin typeface="Calibri"/>
+              </a:rPr>
+              <a:t>▪  </a:t>
+            </a:r>
+            <a:r>
+              <a:rPr sz="1600" b="1">
+                <a:solidFill>
+                  <a:srgbClr val="0E4D33"/>
+                </a:solidFill>
+                <a:latin typeface="Calibri"/>
+              </a:rPr>
+              <a:t>The ping is never just the ping.  </a:t>
+            </a:r>
+            <a:r>
+              <a:rPr sz="1600" b="0" i="0">
+                <a:solidFill>
+                  <a:srgbClr val="212A26"/>
+                </a:solidFill>
+                <a:latin typeface="Calibri"/>
+              </a:rPr>
+              <a:t>Ten 'quick questions' can dissolve a workday without any of them being unreasonable alone.</a:t>
+            </a:r>
+          </a:p>
+          <a:p>
+            <a:pPr algn="l">
+              <a:spcAft>
+                <a:spcPts val="1400"/>
+              </a:spcAft>
+            </a:pPr>
+            <a:r>
+              <a:rPr sz="1600">
+                <a:solidFill>
+                  <a:srgbClr val="8A6410"/>
+                </a:solidFill>
+                <a:latin typeface="Calibri"/>
+              </a:rPr>
+              <a:t>▪  </a:t>
+            </a:r>
+            <a:r>
+              <a:rPr sz="1600" b="1">
+                <a:solidFill>
+                  <a:srgbClr val="0E4D33"/>
+                </a:solidFill>
+                <a:latin typeface="Calibri"/>
+              </a:rPr>
+              <a:t>Sender-side implication:  </a:t>
+            </a:r>
+            <a:r>
+              <a:rPr sz="1600" b="0" i="0">
+                <a:solidFill>
+                  <a:srgbClr val="212A26"/>
+                </a:solidFill>
+                <a:latin typeface="Calibri"/>
+              </a:rPr>
+              <a:t>batch non-urgent asks; one message with three questions costs one recovery, not three.</a:t>
+            </a:r>
+          </a:p>
+          <a:p>
+            <a:pPr algn="l">
+              <a:spcAft>
+                <a:spcPts val="1400"/>
+              </a:spcAft>
+            </a:pPr>
+            <a:r>
+              <a:rPr sz="1600">
+                <a:solidFill>
+                  <a:srgbClr val="8A6410"/>
+                </a:solidFill>
+                <a:latin typeface="Calibri"/>
+              </a:rPr>
+              <a:t>▪  </a:t>
+            </a:r>
+            <a:r>
+              <a:rPr sz="1600" b="1">
+                <a:solidFill>
+                  <a:srgbClr val="0E4D33"/>
+                </a:solidFill>
+                <a:latin typeface="Calibri"/>
+              </a:rPr>
+              <a:t>Receiver-side implication:  </a:t>
+            </a:r>
+            <a:r>
+              <a:rPr sz="1600" b="0" i="0">
+                <a:solidFill>
+                  <a:srgbClr val="212A26"/>
+                </a:solidFill>
+                <a:latin typeface="Calibri"/>
+              </a:rPr>
+              <a:t>the unpinged block from Section 4 isn't a luxury — it's where the demanding work actually happens.</a:t>
+            </a:r>
+          </a:p>
+        </p:txBody>
+      </p:sp>
+    </p:spTree>
+  </p:cSld>
+  <p:clrMapOvr>
+    <a:masterClrMapping/>
+  </p:clrMapOvr>
+</p:sld>
+</file>
+
+<file path=ppt/slides/slide38.xml><?xml version="1.0" encoding="utf-8"?>
+<p:sld xmlns:a="http://schemas.openxmlformats.org/drawingml/2006/main" xmlns:p="http://schemas.openxmlformats.org/presentationml/2006/main" xmlns:r="http://schemas.openxmlformats.org/officeDocument/2006/relationships">
+  <p:cSld>
+    <p:bg>
+      <p:bgPr>
+        <a:solidFill>
+          <a:srgbClr val="FFFFFF"/>
+        </a:solidFill>
+        <a:effectLst/>
+      </p:bgPr>
+    </p:bg>
+    <p:spTree>
+      <p:nvGrpSpPr>
+        <p:cNvPr id="1" name=""/>
+        <p:cNvGrpSpPr/>
+        <p:nvPr/>
+      </p:nvGrpSpPr>
+      <p:grpSpPr/>
+      <p:sp>
+        <p:nvSpPr>
+          <p:cNvPr id="2" name="Title 1" descr="Slide title: Key takeaways"/>
+          <p:cNvSpPr>
+            <a:spLocks noGrp="1"/>
+          </p:cNvSpPr>
+          <p:nvPr>
+            <p:ph type="title"/>
+          </p:nvPr>
+        </p:nvSpPr>
+        <p:spPr>
+          <a:xfrm>
+            <a:off x="502920" y="411480"/>
+            <a:ext cx="11155680" cy="914400"/>
+          </a:xfrm>
+        </p:spPr>
+        <p:txBody>
+          <a:bodyPr wrap="square"/>
+          <a:lstStyle/>
+          <a:p>
+            <a:pPr algn="l"/>
+            <a:r>
+              <a:rPr sz="3200" b="1">
+                <a:solidFill>
+                  <a:srgbClr val="0E4D33"/>
+                </a:solidFill>
+                <a:latin typeface="Cambria"/>
+              </a:rPr>
+              <a:t>Key takeaways</a:t>
+            </a:r>
+          </a:p>
+        </p:txBody>
+      </p:sp>
+      <p:sp>
+        <p:nvSpPr>
+          <p:cNvPr id="3" name="TextBox 2" descr="Footer: BADM 225 · Chapter 5"/>
+          <p:cNvSpPr txBox="1"/>
+          <p:nvPr/>
+        </p:nvSpPr>
+        <p:spPr>
+          <a:xfrm>
+            <a:off x="502920" y="6446520"/>
+            <a:ext cx="5486400" cy="320040"/>
+          </a:xfrm>
+          <a:prstGeom prst="rect">
+            <a:avLst/>
+          </a:prstGeom>
+          <a:noFill/>
+        </p:spPr>
+        <p:txBody>
+          <a:bodyPr wrap="none">
+            <a:spAutoFit/>
+          </a:bodyPr>
+          <a:lstStyle/>
+          <a:p>
+            <a:r>
+              <a:rPr sz="1000">
+                <a:solidFill>
+                  <a:srgbClr val="5E6B64"/>
+                </a:solidFill>
+                <a:latin typeface="Calibri"/>
+              </a:rPr>
+              <a:t>BADM 225 · Chapter 5</a:t>
+            </a:r>
+          </a:p>
+        </p:txBody>
+      </p:sp>
+      <p:sp>
+        <p:nvSpPr>
+          <p:cNvPr id="4" name="TextBox 3" descr="Slide number 38"/>
+          <p:cNvSpPr txBox="1"/>
+          <p:nvPr/>
+        </p:nvSpPr>
+        <p:spPr>
+          <a:xfrm>
+            <a:off x="11247120" y="6446520"/>
+            <a:ext cx="640080" cy="320040"/>
+          </a:xfrm>
+          <a:prstGeom prst="rect">
+            <a:avLst/>
+          </a:prstGeom>
+          <a:noFill/>
+        </p:spPr>
+        <p:txBody>
+          <a:bodyPr wrap="none">
+            <a:spAutoFit/>
+          </a:bodyPr>
+          <a:lstStyle/>
+          <a:p>
+            <a:pPr algn="r"/>
+            <a:r>
+              <a:rPr sz="1000">
+                <a:solidFill>
+                  <a:srgbClr val="5E6B64"/>
+                </a:solidFill>
+                <a:latin typeface="Calibri"/>
+              </a:rPr>
+              <a:t>38</a:t>
+            </a:r>
+          </a:p>
+        </p:txBody>
+      </p:sp>
+      <p:sp>
+        <p:nvSpPr>
+          <p:cNvPr id="5" name="Oval 4" descr="Checkmark"/>
+          <p:cNvSpPr/>
+          <p:nvPr/>
+        </p:nvSpPr>
+        <p:spPr>
+          <a:xfrm>
+            <a:off x="640080" y="1572768"/>
+            <a:ext cx="420624" cy="420624"/>
+          </a:xfrm>
+          <a:prstGeom prst="ellipse">
+            <a:avLst/>
+          </a:prstGeom>
+          <a:solidFill>
+            <a:srgbClr val="0E4D33"/>
+          </a:solidFill>
+          <a:ln>
+            <a:noFill/>
+          </a:ln>
+          <a:effectLst/>
+        </p:spPr>
+        <p:style>
+          <a:lnRef idx="1">
+            <a:schemeClr val="accent1"/>
+          </a:lnRef>
+          <a:fillRef idx="3">
+            <a:schemeClr val="accent1"/>
+          </a:fillRef>
+          <a:effectRef idx="2">
+            <a:schemeClr val="accent1"/>
+          </a:effectRef>
+          <a:fontRef idx="minor">
+            <a:schemeClr val="lt1"/>
+          </a:fontRef>
+        </p:style>
+        <p:txBody>
+          <a:bodyPr rtlCol="0" anchor="ctr" lIns="0" rIns="0" tIns="0" bIns="0"/>
+          <a:lstStyle/>
+          <a:p>
+            <a:pPr algn="ctr"/>
+            <a:r>
+              <a:rPr sz="1100" b="1">
+                <a:solidFill>
+                  <a:srgbClr val="FFFFFF"/>
+                </a:solidFill>
+                <a:latin typeface="Calibri"/>
+              </a:rPr>
+              <a:t>✓</a:t>
+            </a:r>
+          </a:p>
+        </p:txBody>
+      </p:sp>
+      <p:sp>
+        <p:nvSpPr>
+          <p:cNvPr id="6" name="TextBox 5" descr="Takeaway 1"/>
+          <p:cNvSpPr txBox="1"/>
+          <p:nvPr/>
+        </p:nvSpPr>
+        <p:spPr>
+          <a:xfrm>
+            <a:off x="1325880" y="1554480"/>
+            <a:ext cx="10332720" cy="640080"/>
+          </a:xfrm>
+          <a:prstGeom prst="rect">
+            <a:avLst/>
+          </a:prstGeom>
+          <a:noFill/>
+        </p:spPr>
+        <p:txBody>
+          <a:bodyPr wrap="square">
+            <a:spAutoFit/>
+          </a:bodyPr>
+          <a:lstStyle/>
+          <a:p>
+            <a:pPr algn="l">
+              <a:spcAft>
+                <a:spcPts val="800"/>
+              </a:spcAft>
+            </a:pPr>
+            <a:r>
+              <a:rPr sz="1550" b="0" i="0">
+                <a:solidFill>
+                  <a:srgbClr val="212A26"/>
+                </a:solidFill>
+                <a:latin typeface="Calibri"/>
+              </a:rPr>
+              <a:t>The subject line is the message's job; sentence one delivers it; the dated ask ends it.</a:t>
+            </a:r>
+          </a:p>
+        </p:txBody>
+      </p:sp>
+      <p:sp>
+        <p:nvSpPr>
+          <p:cNvPr id="7" name="Oval 6" descr="Checkmark"/>
+          <p:cNvSpPr/>
+          <p:nvPr/>
+        </p:nvSpPr>
+        <p:spPr>
+          <a:xfrm>
+            <a:off x="640080" y="2212848"/>
+            <a:ext cx="420624" cy="420624"/>
+          </a:xfrm>
+          <a:prstGeom prst="ellipse">
+            <a:avLst/>
+          </a:prstGeom>
+          <a:solidFill>
+            <a:srgbClr val="0E4D33"/>
+          </a:solidFill>
+          <a:ln>
+            <a:noFill/>
+          </a:ln>
+          <a:effectLst/>
+        </p:spPr>
+        <p:style>
+          <a:lnRef idx="1">
+            <a:schemeClr val="accent1"/>
+          </a:lnRef>
+          <a:fillRef idx="3">
+            <a:schemeClr val="accent1"/>
+          </a:fillRef>
+          <a:effectRef idx="2">
+            <a:schemeClr val="accent1"/>
+          </a:effectRef>
+          <a:fontRef idx="minor">
+            <a:schemeClr val="lt1"/>
+          </a:fontRef>
+        </p:style>
+        <p:txBody>
+          <a:bodyPr rtlCol="0" anchor="ctr" lIns="0" rIns="0" tIns="0" bIns="0"/>
+          <a:lstStyle/>
+          <a:p>
+            <a:pPr algn="ctr"/>
+            <a:r>
+              <a:rPr sz="1100" b="1">
+                <a:solidFill>
+                  <a:srgbClr val="FFFFFF"/>
+                </a:solidFill>
+                <a:latin typeface="Calibri"/>
+              </a:rPr>
+              <a:t>✓</a:t>
+            </a:r>
+          </a:p>
+        </p:txBody>
+      </p:sp>
+      <p:sp>
+        <p:nvSpPr>
+          <p:cNvPr id="8" name="TextBox 7" descr="Takeaway 2"/>
+          <p:cNvSpPr txBox="1"/>
+          <p:nvPr/>
+        </p:nvSpPr>
+        <p:spPr>
+          <a:xfrm>
+            <a:off x="1325880" y="2194560"/>
+            <a:ext cx="10332720" cy="640080"/>
+          </a:xfrm>
+          <a:prstGeom prst="rect">
+            <a:avLst/>
+          </a:prstGeom>
+          <a:noFill/>
+        </p:spPr>
+        <p:txBody>
+          <a:bodyPr wrap="square">
+            <a:spAutoFit/>
+          </a:bodyPr>
+          <a:lstStyle/>
+          <a:p>
+            <a:pPr algn="l">
+              <a:spcAft>
+                <a:spcPts val="800"/>
+              </a:spcAft>
+            </a:pPr>
+            <a:r>
+              <a:rPr sz="1550" b="0" i="0">
+                <a:solidFill>
+                  <a:srgbClr val="212A26"/>
+                </a:solidFill>
+                <a:latin typeface="Calibri"/>
+              </a:rPr>
+              <a:t>One screen for routine mail — longer content becomes an attachment with a cover note.</a:t>
+            </a:r>
+          </a:p>
+        </p:txBody>
+      </p:sp>
+      <p:sp>
+        <p:nvSpPr>
+          <p:cNvPr id="9" name="Oval 8" descr="Checkmark"/>
+          <p:cNvSpPr/>
+          <p:nvPr/>
+        </p:nvSpPr>
+        <p:spPr>
+          <a:xfrm>
+            <a:off x="640080" y="2852928"/>
+            <a:ext cx="420624" cy="420624"/>
+          </a:xfrm>
+          <a:prstGeom prst="ellipse">
+            <a:avLst/>
+          </a:prstGeom>
+          <a:solidFill>
+            <a:srgbClr val="0E4D33"/>
+          </a:solidFill>
+          <a:ln>
+            <a:noFill/>
+          </a:ln>
+          <a:effectLst/>
+        </p:spPr>
+        <p:style>
+          <a:lnRef idx="1">
+            <a:schemeClr val="accent1"/>
+          </a:lnRef>
+          <a:fillRef idx="3">
+            <a:schemeClr val="accent1"/>
+          </a:fillRef>
+          <a:effectRef idx="2">
+            <a:schemeClr val="accent1"/>
+          </a:effectRef>
+          <a:fontRef idx="minor">
+            <a:schemeClr val="lt1"/>
+          </a:fontRef>
+        </p:style>
+        <p:txBody>
+          <a:bodyPr rtlCol="0" anchor="ctr" lIns="0" rIns="0" tIns="0" bIns="0"/>
+          <a:lstStyle/>
+          <a:p>
+            <a:pPr algn="ctr"/>
+            <a:r>
+              <a:rPr sz="1100" b="1">
+                <a:solidFill>
+                  <a:srgbClr val="FFFFFF"/>
+                </a:solidFill>
+                <a:latin typeface="Calibri"/>
+              </a:rPr>
+              <a:t>✓</a:t>
+            </a:r>
+          </a:p>
+        </p:txBody>
+      </p:sp>
+      <p:sp>
+        <p:nvSpPr>
+          <p:cNvPr id="10" name="TextBox 9" descr="Takeaway 3"/>
+          <p:cNvSpPr txBox="1"/>
+          <p:nvPr/>
+        </p:nvSpPr>
+        <p:spPr>
+          <a:xfrm>
+            <a:off x="1325880" y="2834640"/>
+            <a:ext cx="10332720" cy="640080"/>
+          </a:xfrm>
+          <a:prstGeom prst="rect">
+            <a:avLst/>
+          </a:prstGeom>
+          <a:noFill/>
+        </p:spPr>
+        <p:txBody>
+          <a:bodyPr wrap="square">
+            <a:spAutoFit/>
+          </a:bodyPr>
+          <a:lstStyle/>
+          <a:p>
+            <a:pPr algn="l">
+              <a:spcAft>
+                <a:spcPts val="800"/>
+              </a:spcAft>
+            </a:pPr>
+            <a:r>
+              <a:rPr sz="1550" b="0" i="0">
+                <a:solidFill>
+                  <a:srgbClr val="212A26"/>
+                </a:solidFill>
+                <a:latin typeface="Calibri"/>
+              </a:rPr>
+              <a:t>Reply-all only when every name needs every word; To acts, CC knows; new topic, new thread.</a:t>
+            </a:r>
+          </a:p>
+        </p:txBody>
+      </p:sp>
+      <p:sp>
+        <p:nvSpPr>
+          <p:cNvPr id="11" name="Oval 10" descr="Checkmark"/>
+          <p:cNvSpPr/>
+          <p:nvPr/>
+        </p:nvSpPr>
+        <p:spPr>
+          <a:xfrm>
+            <a:off x="640080" y="3493008"/>
+            <a:ext cx="420624" cy="420624"/>
+          </a:xfrm>
+          <a:prstGeom prst="ellipse">
+            <a:avLst/>
+          </a:prstGeom>
+          <a:solidFill>
+            <a:srgbClr val="0E4D33"/>
+          </a:solidFill>
+          <a:ln>
+            <a:noFill/>
+          </a:ln>
+          <a:effectLst/>
+        </p:spPr>
+        <p:style>
+          <a:lnRef idx="1">
+            <a:schemeClr val="accent1"/>
+          </a:lnRef>
+          <a:fillRef idx="3">
+            <a:schemeClr val="accent1"/>
+          </a:fillRef>
+          <a:effectRef idx="2">
+            <a:schemeClr val="accent1"/>
+          </a:effectRef>
+          <a:fontRef idx="minor">
+            <a:schemeClr val="lt1"/>
+          </a:fontRef>
+        </p:style>
+        <p:txBody>
+          <a:bodyPr rtlCol="0" anchor="ctr" lIns="0" rIns="0" tIns="0" bIns="0"/>
+          <a:lstStyle/>
+          <a:p>
+            <a:pPr algn="ctr"/>
+            <a:r>
+              <a:rPr sz="1100" b="1">
+                <a:solidFill>
+                  <a:srgbClr val="FFFFFF"/>
+                </a:solidFill>
+                <a:latin typeface="Calibri"/>
+              </a:rPr>
+              <a:t>✓</a:t>
+            </a:r>
+          </a:p>
+        </p:txBody>
+      </p:sp>
+      <p:sp>
+        <p:nvSpPr>
+          <p:cNvPr id="12" name="TextBox 11" descr="Takeaway 4"/>
+          <p:cNvSpPr txBox="1"/>
+          <p:nvPr/>
+        </p:nvSpPr>
+        <p:spPr>
+          <a:xfrm>
+            <a:off x="1325880" y="3474720"/>
+            <a:ext cx="10332720" cy="640080"/>
+          </a:xfrm>
+          <a:prstGeom prst="rect">
+            <a:avLst/>
+          </a:prstGeom>
+          <a:noFill/>
+        </p:spPr>
+        <p:txBody>
+          <a:bodyPr wrap="square">
+            <a:spAutoFit/>
+          </a:bodyPr>
+          <a:lstStyle/>
+          <a:p>
+            <a:pPr algn="l">
+              <a:spcAft>
+                <a:spcPts val="800"/>
+              </a:spcAft>
+            </a:pPr>
+            <a:r>
+              <a:rPr sz="1550" b="0" i="0">
+                <a:solidFill>
+                  <a:srgbClr val="212A26"/>
+                </a:solidFill>
+                <a:latin typeface="Calibri"/>
+              </a:rPr>
+              <a:t>Chat coordinates, email records; decisions graduate. Texts are invitation-only logistics.</a:t>
+            </a:r>
+          </a:p>
+        </p:txBody>
+      </p:sp>
+      <p:sp>
+        <p:nvSpPr>
+          <p:cNvPr id="13" name="Oval 12" descr="Checkmark"/>
+          <p:cNvSpPr/>
+          <p:nvPr/>
+        </p:nvSpPr>
+        <p:spPr>
+          <a:xfrm>
+            <a:off x="640080" y="4133088"/>
+            <a:ext cx="420624" cy="420624"/>
+          </a:xfrm>
+          <a:prstGeom prst="ellipse">
+            <a:avLst/>
+          </a:prstGeom>
+          <a:solidFill>
+            <a:srgbClr val="0E4D33"/>
+          </a:solidFill>
+          <a:ln>
+            <a:noFill/>
+          </a:ln>
+          <a:effectLst/>
+        </p:spPr>
+        <p:style>
+          <a:lnRef idx="1">
+            <a:schemeClr val="accent1"/>
+          </a:lnRef>
+          <a:fillRef idx="3">
+            <a:schemeClr val="accent1"/>
+          </a:fillRef>
+          <a:effectRef idx="2">
+            <a:schemeClr val="accent1"/>
+          </a:effectRef>
+          <a:fontRef idx="minor">
+            <a:schemeClr val="lt1"/>
+          </a:fontRef>
+        </p:style>
+        <p:txBody>
+          <a:bodyPr rtlCol="0" anchor="ctr" lIns="0" rIns="0" tIns="0" bIns="0"/>
+          <a:lstStyle/>
+          <a:p>
+            <a:pPr algn="ctr"/>
+            <a:r>
+              <a:rPr sz="1100" b="1">
+                <a:solidFill>
+                  <a:srgbClr val="FFFFFF"/>
+                </a:solidFill>
+                <a:latin typeface="Calibri"/>
+              </a:rPr>
+              <a:t>✓</a:t>
+            </a:r>
+          </a:p>
+        </p:txBody>
+      </p:sp>
+      <p:sp>
+        <p:nvSpPr>
+          <p:cNvPr id="14" name="TextBox 13" descr="Takeaway 5"/>
+          <p:cNvSpPr txBox="1"/>
+          <p:nvPr/>
+        </p:nvSpPr>
+        <p:spPr>
+          <a:xfrm>
+            <a:off x="1325880" y="4114800"/>
+            <a:ext cx="10332720" cy="640080"/>
+          </a:xfrm>
+          <a:prstGeom prst="rect">
+            <a:avLst/>
+          </a:prstGeom>
+          <a:noFill/>
+        </p:spPr>
+        <p:txBody>
+          <a:bodyPr wrap="square">
+            <a:spAutoFit/>
+          </a:bodyPr>
+          <a:lstStyle/>
+          <a:p>
+            <a:pPr algn="l">
+              <a:spcAft>
+                <a:spcPts val="800"/>
+              </a:spcAft>
+            </a:pPr>
+            <a:r>
+              <a:rPr sz="1550" b="0" i="0">
+                <a:solidFill>
+                  <a:srgbClr val="212A26"/>
+                </a:solidFill>
+                <a:latin typeface="Calibri"/>
+              </a:rPr>
+              <a:t>Everything on workplace systems is logged and discoverable — type like it.</a:t>
+            </a:r>
+          </a:p>
+        </p:txBody>
+      </p:sp>
+      <p:sp>
+        <p:nvSpPr>
+          <p:cNvPr id="15" name="Oval 14" descr="Checkmark"/>
+          <p:cNvSpPr/>
+          <p:nvPr/>
+        </p:nvSpPr>
+        <p:spPr>
+          <a:xfrm>
+            <a:off x="640080" y="4773168"/>
+            <a:ext cx="420624" cy="420624"/>
+          </a:xfrm>
+          <a:prstGeom prst="ellipse">
+            <a:avLst/>
+          </a:prstGeom>
+          <a:solidFill>
+            <a:srgbClr val="0E4D33"/>
+          </a:solidFill>
+          <a:ln>
+            <a:noFill/>
+          </a:ln>
+          <a:effectLst/>
+        </p:spPr>
+        <p:style>
+          <a:lnRef idx="1">
+            <a:schemeClr val="accent1"/>
+          </a:lnRef>
+          <a:fillRef idx="3">
+            <a:schemeClr val="accent1"/>
+          </a:fillRef>
+          <a:effectRef idx="2">
+            <a:schemeClr val="accent1"/>
+          </a:effectRef>
+          <a:fontRef idx="minor">
+            <a:schemeClr val="lt1"/>
+          </a:fontRef>
+        </p:style>
+        <p:txBody>
+          <a:bodyPr rtlCol="0" anchor="ctr" lIns="0" rIns="0" tIns="0" bIns="0"/>
+          <a:lstStyle/>
+          <a:p>
+            <a:pPr algn="ctr"/>
+            <a:r>
+              <a:rPr sz="1100" b="1">
+                <a:solidFill>
+                  <a:srgbClr val="FFFFFF"/>
+                </a:solidFill>
+                <a:latin typeface="Calibri"/>
+              </a:rPr>
+              <a:t>✓</a:t>
+            </a:r>
+          </a:p>
+        </p:txBody>
+      </p:sp>
+      <p:sp>
+        <p:nvSpPr>
+          <p:cNvPr id="16" name="TextBox 15" descr="Takeaway 6"/>
+          <p:cNvSpPr txBox="1"/>
+          <p:nvPr/>
+        </p:nvSpPr>
+        <p:spPr>
+          <a:xfrm>
+            <a:off x="1325880" y="4754880"/>
+            <a:ext cx="10332720" cy="640080"/>
+          </a:xfrm>
+          <a:prstGeom prst="rect">
+            <a:avLst/>
+          </a:prstGeom>
+          <a:noFill/>
+        </p:spPr>
+        <p:txBody>
+          <a:bodyPr wrap="square">
+            <a:spAutoFit/>
+          </a:bodyPr>
+          <a:lstStyle/>
+          <a:p>
+            <a:pPr algn="l">
+              <a:spcAft>
+                <a:spcPts val="800"/>
+              </a:spcAft>
+            </a:pPr>
+            <a:r>
+              <a:rPr sz="1550" b="0" i="0">
+                <a:solidFill>
+                  <a:srgbClr val="212A26"/>
+                </a:solidFill>
+                <a:latin typeface="Calibri"/>
+              </a:rPr>
+              <a:t>Curate the public layer; it interviews before you do. And guard your attention like capital.</a:t>
+            </a:r>
+          </a:p>
+        </p:txBody>
+      </p:sp>
+      <p:sp>
+        <p:nvSpPr>
+          <p:cNvPr id="17" name="Rounded Rectangle 16" descr="Practice reminder"/>
+          <p:cNvSpPr/>
+          <p:nvPr/>
+        </p:nvSpPr>
+        <p:spPr>
+          <a:xfrm>
+            <a:off x="548640" y="5468112"/>
+            <a:ext cx="10424160" cy="685800"/>
+          </a:xfrm>
+          <a:prstGeom prst="roundRect">
+            <a:avLst/>
+          </a:prstGeom>
+          <a:solidFill>
+            <a:srgbClr val="0E4D33"/>
+          </a:solidFill>
+          <a:ln>
+            <a:noFill/>
+          </a:ln>
+          <a:effectLst/>
+        </p:spPr>
+        <p:style>
+          <a:lnRef idx="1">
+            <a:schemeClr val="accent1"/>
+          </a:lnRef>
+          <a:fillRef idx="3">
+            <a:schemeClr val="accent1"/>
+          </a:fillRef>
+          <a:effectRef idx="2">
+            <a:schemeClr val="accent1"/>
+          </a:effectRef>
+          <a:fontRef idx="minor">
+            <a:schemeClr val="lt1"/>
+          </a:fontRef>
+        </p:style>
+        <p:txBody>
+          <a:bodyPr rtlCol="0" anchor="t" wrap="square" lIns="164592" rIns="164592" tIns="128016" bIns="109728"/>
+          <a:lstStyle/>
+          <a:p>
+            <a:pPr algn="l">
+              <a:spcAft>
+                <a:spcPts val="0"/>
+              </a:spcAft>
+            </a:pPr>
+            <a:r>
+              <a:rPr sz="1450" b="1" i="0">
+                <a:solidFill>
+                  <a:srgbClr val="FFFFFF"/>
+                </a:solidFill>
+                <a:latin typeface="Calibri"/>
+              </a:rPr>
+              <a:t>Practice now: course site → Chapter 5 → Practice, then the graded homework before the weekly deadline.</a:t>
+            </a:r>
+          </a:p>
+        </p:txBody>
+      </p:sp>
+    </p:spTree>
+  </p:cSld>
+  <p:clrMapOvr>
+    <a:masterClrMapping/>
+  </p:clrMapOvr>
+</p:sld>
+</file>
+
+<file path=ppt/slides/slide39.xml><?xml version="1.0" encoding="utf-8"?>
+<p:sld xmlns:a="http://schemas.openxmlformats.org/drawingml/2006/main" xmlns:p="http://schemas.openxmlformats.org/presentationml/2006/main" xmlns:r="http://schemas.openxmlformats.org/officeDocument/2006/relationships">
+  <p:cSld>
+    <p:bg>
+      <p:bgPr>
+        <a:solidFill>
+          <a:srgbClr val="EAF1EB"/>
+        </a:solidFill>
+        <a:effectLst/>
+      </p:bgPr>
+    </p:bg>
+    <p:spTree>
+      <p:nvGrpSpPr>
+        <p:cNvPr id="1" name=""/>
+        <p:cNvGrpSpPr/>
+        <p:nvPr/>
+      </p:nvGrpSpPr>
+      <p:grpSpPr/>
+      <p:sp>
+        <p:nvSpPr>
+          <p:cNvPr id="2" name="Title 1" descr="Slide title: Worth keeping"/>
+          <p:cNvSpPr>
+            <a:spLocks noGrp="1"/>
+          </p:cNvSpPr>
+          <p:nvPr>
+            <p:ph type="title"/>
+          </p:nvPr>
+        </p:nvSpPr>
+        <p:spPr>
+          <a:xfrm>
+            <a:off x="502920" y="411480"/>
+            <a:ext cx="11155680" cy="914400"/>
+          </a:xfrm>
+        </p:spPr>
+        <p:txBody>
+          <a:bodyPr wrap="square"/>
+          <a:lstStyle/>
+          <a:p>
+            <a:pPr algn="l"/>
+            <a:r>
+              <a:rPr sz="3400" b="1">
+                <a:solidFill>
+                  <a:srgbClr val="0E4D33"/>
+                </a:solidFill>
+                <a:latin typeface="Cambria"/>
+              </a:rPr>
+              <a:t>Worth keeping</a:t>
+            </a:r>
+          </a:p>
+        </p:txBody>
+      </p:sp>
+      <p:sp>
+        <p:nvSpPr>
+          <p:cNvPr id="3" name="TextBox 2" descr="Quotation"/>
+          <p:cNvSpPr txBox="1"/>
+          <p:nvPr/>
+        </p:nvSpPr>
+        <p:spPr>
+          <a:xfrm>
+            <a:off x="1280160" y="2194560"/>
+            <a:ext cx="9601200" cy="2377440"/>
+          </a:xfrm>
+          <a:prstGeom prst="rect">
+            <a:avLst/>
+          </a:prstGeom>
+          <a:noFill/>
+        </p:spPr>
+        <p:txBody>
+          <a:bodyPr wrap="square">
+            <a:spAutoFit/>
+          </a:bodyPr>
+          <a:lstStyle/>
+          <a:p>
+            <a:pPr algn="l">
+              <a:spcAft>
+                <a:spcPts val="800"/>
+              </a:spcAft>
+            </a:pPr>
+            <a:r>
+              <a:rPr sz="2700" b="0" i="1">
+                <a:solidFill>
+                  <a:srgbClr val="212A26"/>
+                </a:solidFill>
+                <a:latin typeface="Cambria"/>
+              </a:rPr>
+              <a:t>“On digital channels, the publicity test is not a thought experiment. It is the terms of service.”</a:t>
+            </a:r>
+          </a:p>
+        </p:txBody>
+      </p:sp>
+      <p:sp>
+        <p:nvSpPr>
+          <p:cNvPr id="4" name="TextBox 3" descr="Attribution"/>
+          <p:cNvSpPr txBox="1"/>
+          <p:nvPr/>
+        </p:nvSpPr>
+        <p:spPr>
+          <a:xfrm>
+            <a:off x="1280160" y="4754880"/>
+            <a:ext cx="9601200" cy="548640"/>
+          </a:xfrm>
+          <a:prstGeom prst="rect">
+            <a:avLst/>
+          </a:prstGeom>
+          <a:noFill/>
+        </p:spPr>
+        <p:txBody>
+          <a:bodyPr wrap="square">
+            <a:spAutoFit/>
+          </a:bodyPr>
+          <a:lstStyle/>
+          <a:p>
+            <a:pPr algn="l">
+              <a:spcAft>
+                <a:spcPts val="800"/>
+              </a:spcAft>
+            </a:pPr>
+            <a:r>
+              <a:rPr sz="1600" b="0" i="0">
+                <a:solidFill>
+                  <a:srgbClr val="5E6B64"/>
+                </a:solidFill>
+                <a:latin typeface="Calibri"/>
+              </a:rPr>
+              <a:t>— this chapter, compressed</a:t>
+            </a:r>
+          </a:p>
+        </p:txBody>
+      </p:sp>
+      <p:sp>
+        <p:nvSpPr>
+          <p:cNvPr id="5" name="TextBox 4" descr="Footer: BADM 225 · Chapter 5"/>
+          <p:cNvSpPr txBox="1"/>
+          <p:nvPr/>
+        </p:nvSpPr>
+        <p:spPr>
+          <a:xfrm>
+            <a:off x="502920" y="6446520"/>
+            <a:ext cx="5486400" cy="320040"/>
+          </a:xfrm>
+          <a:prstGeom prst="rect">
+            <a:avLst/>
+          </a:prstGeom>
+          <a:noFill/>
+        </p:spPr>
+        <p:txBody>
+          <a:bodyPr wrap="none">
+            <a:spAutoFit/>
+          </a:bodyPr>
+          <a:lstStyle/>
+          <a:p>
+            <a:r>
+              <a:rPr sz="1000">
+                <a:solidFill>
+                  <a:srgbClr val="5E6B64"/>
+                </a:solidFill>
+                <a:latin typeface="Calibri"/>
+              </a:rPr>
+              <a:t>BADM 225 · Chapter 5</a:t>
+            </a:r>
+          </a:p>
+        </p:txBody>
+      </p:sp>
+      <p:sp>
+        <p:nvSpPr>
+          <p:cNvPr id="6" name="TextBox 5" descr="Slide number 39"/>
+          <p:cNvSpPr txBox="1"/>
+          <p:nvPr/>
+        </p:nvSpPr>
+        <p:spPr>
+          <a:xfrm>
+            <a:off x="11247120" y="6446520"/>
+            <a:ext cx="640080" cy="320040"/>
+          </a:xfrm>
+          <a:prstGeom prst="rect">
+            <a:avLst/>
+          </a:prstGeom>
+          <a:noFill/>
+        </p:spPr>
+        <p:txBody>
+          <a:bodyPr wrap="none">
+            <a:spAutoFit/>
+          </a:bodyPr>
+          <a:lstStyle/>
+          <a:p>
+            <a:pPr algn="r"/>
+            <a:r>
+              <a:rPr sz="1000">
+                <a:solidFill>
+                  <a:srgbClr val="5E6B64"/>
+                </a:solidFill>
+                <a:latin typeface="Calibri"/>
+              </a:rPr>
+              <a:t>39</a:t>
+            </a:r>
+          </a:p>
+        </p:txBody>
+      </p:sp>
+    </p:spTree>
+  </p:cSld>
+  <p:clrMapOvr>
+    <a:masterClrMapping/>
+  </p:clrMapOvr>
+</p:sld>
+</file>
+
 <file path=ppt/slides/slide4.xml><?xml version="1.0" encoding="utf-8"?>
 <p:sld xmlns:a="http://schemas.openxmlformats.org/drawingml/2006/main" xmlns:p="http://schemas.openxmlformats.org/presentationml/2006/main" xmlns:r="http://schemas.openxmlformats.org/officeDocument/2006/relationships">
   <p:cSld>
@@ -10418,6 +17593,568 @@
                 <a:latin typeface="Calibri"/>
               </a:rPr>
               <a:t>4</a:t>
+            </a:r>
+          </a:p>
+        </p:txBody>
+      </p:sp>
+    </p:spTree>
+  </p:cSld>
+  <p:clrMapOvr>
+    <a:masterClrMapping/>
+  </p:clrMapOvr>
+</p:sld>
+</file>
+
+<file path=ppt/slides/slide40.xml><?xml version="1.0" encoding="utf-8"?>
+<p:sld xmlns:a="http://schemas.openxmlformats.org/drawingml/2006/main" xmlns:p="http://schemas.openxmlformats.org/presentationml/2006/main" xmlns:r="http://schemas.openxmlformats.org/officeDocument/2006/relationships">
+  <p:cSld>
+    <p:bg>
+      <p:bgPr>
+        <a:solidFill>
+          <a:srgbClr val="0E4D33"/>
+        </a:solidFill>
+        <a:effectLst/>
+      </p:bgPr>
+    </p:bg>
+    <p:spTree>
+      <p:nvGrpSpPr>
+        <p:cNvPr id="1" name=""/>
+        <p:cNvGrpSpPr/>
+        <p:nvPr/>
+      </p:nvGrpSpPr>
+      <p:grpSpPr/>
+      <p:sp>
+        <p:nvSpPr>
+          <p:cNvPr id="2" name="Title 1" descr="Slide title: Discussion questions"/>
+          <p:cNvSpPr>
+            <a:spLocks noGrp="1"/>
+          </p:cNvSpPr>
+          <p:nvPr>
+            <p:ph type="title"/>
+          </p:nvPr>
+        </p:nvSpPr>
+        <p:spPr>
+          <a:xfrm>
+            <a:off x="502920" y="411480"/>
+            <a:ext cx="11155680" cy="914400"/>
+          </a:xfrm>
+        </p:spPr>
+        <p:txBody>
+          <a:bodyPr wrap="square"/>
+          <a:lstStyle/>
+          <a:p>
+            <a:pPr algn="l"/>
+            <a:r>
+              <a:rPr sz="3400" b="1">
+                <a:solidFill>
+                  <a:srgbClr val="FFFFFF"/>
+                </a:solidFill>
+                <a:latin typeface="Cambria"/>
+              </a:rPr>
+              <a:t>Discussion questions</a:t>
+            </a:r>
+          </a:p>
+        </p:txBody>
+      </p:sp>
+      <p:sp>
+        <p:nvSpPr>
+          <p:cNvPr id="3" name="TextBox 2" descr="Discussion questions"/>
+          <p:cNvSpPr txBox="1"/>
+          <p:nvPr/>
+        </p:nvSpPr>
+        <p:spPr>
+          <a:xfrm>
+            <a:off x="731520" y="1737360"/>
+            <a:ext cx="10698480" cy="4480560"/>
+          </a:xfrm>
+          <a:prstGeom prst="rect">
+            <a:avLst/>
+          </a:prstGeom>
+          <a:noFill/>
+        </p:spPr>
+        <p:txBody>
+          <a:bodyPr wrap="square">
+            <a:spAutoFit/>
+          </a:bodyPr>
+          <a:lstStyle/>
+          <a:p>
+            <a:pPr algn="l">
+              <a:spcAft>
+                <a:spcPts val="1800"/>
+              </a:spcAft>
+            </a:pPr>
+            <a:r>
+              <a:rPr sz="1800" b="1">
+                <a:solidFill>
+                  <a:srgbClr val="C9931A"/>
+                </a:solidFill>
+                <a:latin typeface="Calibri"/>
+              </a:rPr>
+              <a:t>1.  </a:t>
+            </a:r>
+            <a:r>
+              <a:rPr sz="1800" b="0" i="0">
+                <a:solidFill>
+                  <a:srgbClr val="FFFFFF"/>
+                </a:solidFill>
+                <a:latin typeface="Calibri"/>
+              </a:rPr>
+              <a:t>Pull your three most recent subject lines. Which formula do they follow — and what are their repairs?</a:t>
+            </a:r>
+          </a:p>
+          <a:p>
+            <a:pPr algn="l">
+              <a:spcAft>
+                <a:spcPts val="1800"/>
+              </a:spcAft>
+            </a:pPr>
+            <a:r>
+              <a:rPr sz="1800" b="1">
+                <a:solidFill>
+                  <a:srgbClr val="C9931A"/>
+                </a:solidFill>
+                <a:latin typeface="Calibri"/>
+              </a:rPr>
+              <a:t>2.  </a:t>
+            </a:r>
+            <a:r>
+              <a:rPr sz="1800" b="0" i="0">
+                <a:solidFill>
+                  <a:srgbClr val="FFFFFF"/>
+                </a:solidFill>
+                <a:latin typeface="Calibri"/>
+              </a:rPr>
+              <a:t>Where does your team actually decide things, and what gets lost in that channel?</a:t>
+            </a:r>
+          </a:p>
+          <a:p>
+            <a:pPr algn="l">
+              <a:spcAft>
+                <a:spcPts val="1800"/>
+              </a:spcAft>
+            </a:pPr>
+            <a:r>
+              <a:rPr sz="1800" b="1">
+                <a:solidFill>
+                  <a:srgbClr val="C9931A"/>
+                </a:solidFill>
+                <a:latin typeface="Calibri"/>
+              </a:rPr>
+              <a:t>3.  </a:t>
+            </a:r>
+            <a:r>
+              <a:rPr sz="1800" b="0" i="0">
+                <a:solidFill>
+                  <a:srgbClr val="FFFFFF"/>
+                </a:solidFill>
+                <a:latin typeface="Calibri"/>
+              </a:rPr>
+              <a:t>Schedule-send: considerate boundary-keeping, or normalized after-hours work in disguise? Argue both, then commit.</a:t>
+            </a:r>
+          </a:p>
+          <a:p>
+            <a:pPr algn="l">
+              <a:spcAft>
+                <a:spcPts val="1800"/>
+              </a:spcAft>
+            </a:pPr>
+            <a:r>
+              <a:rPr sz="1800" b="1">
+                <a:solidFill>
+                  <a:srgbClr val="C9931A"/>
+                </a:solidFill>
+                <a:latin typeface="Calibri"/>
+              </a:rPr>
+              <a:t>4.  </a:t>
+            </a:r>
+            <a:r>
+              <a:rPr sz="1800" b="0" i="0">
+                <a:solidFill>
+                  <a:srgbClr val="FFFFFF"/>
+                </a:solidFill>
+                <a:latin typeface="Calibri"/>
+              </a:rPr>
+              <a:t>State your personal permanence-gradient policy: what will you never type on a logged platform?</a:t>
+            </a:r>
+          </a:p>
+          <a:p>
+            <a:pPr algn="l">
+              <a:spcAft>
+                <a:spcPts val="1800"/>
+              </a:spcAft>
+            </a:pPr>
+            <a:r>
+              <a:rPr sz="1800" b="1">
+                <a:solidFill>
+                  <a:srgbClr val="C9931A"/>
+                </a:solidFill>
+                <a:latin typeface="Calibri"/>
+              </a:rPr>
+              <a:t>5.  </a:t>
+            </a:r>
+            <a:r>
+              <a:rPr sz="1800" b="0" i="0">
+                <a:solidFill>
+                  <a:srgbClr val="FFFFFF"/>
+                </a:solidFill>
+                <a:latin typeface="Calibri"/>
+              </a:rPr>
+              <a:t>Design the company mass-email policy that makes reply-all storms impossible.</a:t>
+            </a:r>
+          </a:p>
+        </p:txBody>
+      </p:sp>
+      <p:sp>
+        <p:nvSpPr>
+          <p:cNvPr id="4" name="TextBox 3" descr="Footer"/>
+          <p:cNvSpPr txBox="1"/>
+          <p:nvPr/>
+        </p:nvSpPr>
+        <p:spPr>
+          <a:xfrm>
+            <a:off x="502920" y="6446520"/>
+            <a:ext cx="5486400" cy="320040"/>
+          </a:xfrm>
+          <a:prstGeom prst="rect">
+            <a:avLst/>
+          </a:prstGeom>
+          <a:noFill/>
+        </p:spPr>
+        <p:txBody>
+          <a:bodyPr wrap="none">
+            <a:spAutoFit/>
+          </a:bodyPr>
+          <a:lstStyle/>
+          <a:p>
+            <a:r>
+              <a:rPr sz="1000">
+                <a:solidFill>
+                  <a:srgbClr val="A8C4B2"/>
+                </a:solidFill>
+                <a:latin typeface="Calibri"/>
+              </a:rPr>
+              <a:t>BADM 225 · Chapter 5</a:t>
+            </a:r>
+          </a:p>
+        </p:txBody>
+      </p:sp>
+    </p:spTree>
+  </p:cSld>
+  <p:clrMapOvr>
+    <a:masterClrMapping/>
+  </p:clrMapOvr>
+</p:sld>
+</file>
+
+<file path=ppt/slides/slide41.xml><?xml version="1.0" encoding="utf-8"?>
+<p:sld xmlns:a="http://schemas.openxmlformats.org/drawingml/2006/main" xmlns:p="http://schemas.openxmlformats.org/presentationml/2006/main" xmlns:r="http://schemas.openxmlformats.org/officeDocument/2006/relationships">
+  <p:cSld>
+    <p:bg>
+      <p:bgPr>
+        <a:solidFill>
+          <a:srgbClr val="FFFFFF"/>
+        </a:solidFill>
+        <a:effectLst/>
+      </p:bgPr>
+    </p:bg>
+    <p:spTree>
+      <p:nvGrpSpPr>
+        <p:cNvPr id="1" name=""/>
+        <p:cNvGrpSpPr/>
+        <p:nvPr/>
+      </p:nvGrpSpPr>
+      <p:grpSpPr/>
+      <p:sp>
+        <p:nvSpPr>
+          <p:cNvPr id="2" name="Title 1" descr="Slide title: Your next steps"/>
+          <p:cNvSpPr>
+            <a:spLocks noGrp="1"/>
+          </p:cNvSpPr>
+          <p:nvPr>
+            <p:ph type="title"/>
+          </p:nvPr>
+        </p:nvSpPr>
+        <p:spPr>
+          <a:xfrm>
+            <a:off x="502920" y="411480"/>
+            <a:ext cx="11155680" cy="914400"/>
+          </a:xfrm>
+        </p:spPr>
+        <p:txBody>
+          <a:bodyPr wrap="square"/>
+          <a:lstStyle/>
+          <a:p>
+            <a:pPr algn="l"/>
+            <a:r>
+              <a:rPr sz="3200" b="1">
+                <a:solidFill>
+                  <a:srgbClr val="0E4D33"/>
+                </a:solidFill>
+                <a:latin typeface="Cambria"/>
+              </a:rPr>
+              <a:t>Your next steps</a:t>
+            </a:r>
+          </a:p>
+        </p:txBody>
+      </p:sp>
+      <p:sp>
+        <p:nvSpPr>
+          <p:cNvPr id="3" name="TextBox 2" descr="Footer: BADM 225 · Chapter 5"/>
+          <p:cNvSpPr txBox="1"/>
+          <p:nvPr/>
+        </p:nvSpPr>
+        <p:spPr>
+          <a:xfrm>
+            <a:off x="502920" y="6446520"/>
+            <a:ext cx="5486400" cy="320040"/>
+          </a:xfrm>
+          <a:prstGeom prst="rect">
+            <a:avLst/>
+          </a:prstGeom>
+          <a:noFill/>
+        </p:spPr>
+        <p:txBody>
+          <a:bodyPr wrap="none">
+            <a:spAutoFit/>
+          </a:bodyPr>
+          <a:lstStyle/>
+          <a:p>
+            <a:r>
+              <a:rPr sz="1000">
+                <a:solidFill>
+                  <a:srgbClr val="5E6B64"/>
+                </a:solidFill>
+                <a:latin typeface="Calibri"/>
+              </a:rPr>
+              <a:t>BADM 225 · Chapter 5</a:t>
+            </a:r>
+          </a:p>
+        </p:txBody>
+      </p:sp>
+      <p:sp>
+        <p:nvSpPr>
+          <p:cNvPr id="4" name="TextBox 3" descr="Slide number 41"/>
+          <p:cNvSpPr txBox="1"/>
+          <p:nvPr/>
+        </p:nvSpPr>
+        <p:spPr>
+          <a:xfrm>
+            <a:off x="11247120" y="6446520"/>
+            <a:ext cx="640080" cy="320040"/>
+          </a:xfrm>
+          <a:prstGeom prst="rect">
+            <a:avLst/>
+          </a:prstGeom>
+          <a:noFill/>
+        </p:spPr>
+        <p:txBody>
+          <a:bodyPr wrap="none">
+            <a:spAutoFit/>
+          </a:bodyPr>
+          <a:lstStyle/>
+          <a:p>
+            <a:pPr algn="r"/>
+            <a:r>
+              <a:rPr sz="1000">
+                <a:solidFill>
+                  <a:srgbClr val="5E6B64"/>
+                </a:solidFill>
+                <a:latin typeface="Calibri"/>
+              </a:rPr>
+              <a:t>41</a:t>
+            </a:r>
+          </a:p>
+        </p:txBody>
+      </p:sp>
+      <p:sp>
+        <p:nvSpPr>
+          <p:cNvPr id="5" name="TextBox 4" descr="Key points"/>
+          <p:cNvSpPr txBox="1"/>
+          <p:nvPr/>
+        </p:nvSpPr>
+        <p:spPr>
+          <a:xfrm>
+            <a:off x="548640" y="1554480"/>
+            <a:ext cx="11064240" cy="4663440"/>
+          </a:xfrm>
+          <a:prstGeom prst="rect">
+            <a:avLst/>
+          </a:prstGeom>
+          <a:noFill/>
+        </p:spPr>
+        <p:txBody>
+          <a:bodyPr wrap="square">
+            <a:spAutoFit/>
+          </a:bodyPr>
+          <a:lstStyle/>
+          <a:p>
+            <a:pPr algn="l">
+              <a:spcAft>
+                <a:spcPts val="1200"/>
+              </a:spcAft>
+            </a:pPr>
+            <a:r>
+              <a:rPr sz="1700">
+                <a:solidFill>
+                  <a:srgbClr val="8A6410"/>
+                </a:solidFill>
+                <a:latin typeface="Calibri"/>
+              </a:rPr>
+              <a:t>▪  </a:t>
+            </a:r>
+            <a:r>
+              <a:rPr sz="1700" b="1">
+                <a:solidFill>
+                  <a:srgbClr val="0E4D33"/>
+                </a:solidFill>
+                <a:latin typeface="Calibri"/>
+              </a:rPr>
+              <a:t>Practice:  </a:t>
+            </a:r>
+            <a:r>
+              <a:rPr sz="1700" b="0" i="0">
+                <a:solidFill>
+                  <a:srgbClr val="212A26"/>
+                </a:solidFill>
+                <a:latin typeface="Calibri"/>
+              </a:rPr>
+              <a:t>Course site → Chapter 5 → Practice questions (instant feedback, unlimited tries).</a:t>
+            </a:r>
+          </a:p>
+          <a:p>
+            <a:pPr algn="l">
+              <a:spcAft>
+                <a:spcPts val="1200"/>
+              </a:spcAft>
+            </a:pPr>
+            <a:r>
+              <a:rPr sz="1700">
+                <a:solidFill>
+                  <a:srgbClr val="8A6410"/>
+                </a:solidFill>
+                <a:latin typeface="Calibri"/>
+              </a:rPr>
+              <a:t>▪  </a:t>
+            </a:r>
+            <a:r>
+              <a:rPr sz="1700" b="1">
+                <a:solidFill>
+                  <a:srgbClr val="0E4D33"/>
+                </a:solidFill>
+                <a:latin typeface="Calibri"/>
+              </a:rPr>
+              <a:t>Graded:  </a:t>
+            </a:r>
+            <a:r>
+              <a:rPr sz="1700" b="0" i="0">
+                <a:solidFill>
+                  <a:srgbClr val="212A26"/>
+                </a:solidFill>
+                <a:latin typeface="Calibri"/>
+              </a:rPr>
+              <a:t>Complete the Chapter 5 homework on the site; paste your completion code into the Blackboard assignment before the weekly deadline.</a:t>
+            </a:r>
+          </a:p>
+          <a:p>
+            <a:pPr algn="l">
+              <a:spcAft>
+                <a:spcPts val="1200"/>
+              </a:spcAft>
+            </a:pPr>
+            <a:r>
+              <a:rPr sz="1700">
+                <a:solidFill>
+                  <a:srgbClr val="8A6410"/>
+                </a:solidFill>
+                <a:latin typeface="Calibri"/>
+              </a:rPr>
+              <a:t>▪  </a:t>
+            </a:r>
+            <a:r>
+              <a:rPr sz="1700" b="1">
+                <a:solidFill>
+                  <a:srgbClr val="0E4D33"/>
+                </a:solidFill>
+                <a:latin typeface="Calibri"/>
+              </a:rPr>
+              <a:t>Build:  </a:t>
+            </a:r>
+            <a:r>
+              <a:rPr sz="1700" b="0" i="0">
+                <a:solidFill>
+                  <a:srgbClr val="212A26"/>
+                </a:solidFill>
+                <a:latin typeface="Calibri"/>
+              </a:rPr>
+              <a:t>Your email signature (this unit's assignment) to Figure 1's spec — and audit your last twenty sent messages against the playbook.</a:t>
+            </a:r>
+          </a:p>
+          <a:p>
+            <a:pPr algn="l">
+              <a:spcAft>
+                <a:spcPts val="1200"/>
+              </a:spcAft>
+            </a:pPr>
+            <a:r>
+              <a:rPr sz="1700">
+                <a:solidFill>
+                  <a:srgbClr val="8A6410"/>
+                </a:solidFill>
+                <a:latin typeface="Calibri"/>
+              </a:rPr>
+              <a:t>▪  </a:t>
+            </a:r>
+            <a:r>
+              <a:rPr sz="1700" b="1">
+                <a:solidFill>
+                  <a:srgbClr val="0E4D33"/>
+                </a:solidFill>
+                <a:latin typeface="Calibri"/>
+              </a:rPr>
+              <a:t>Read:  </a:t>
+            </a:r>
+            <a:r>
+              <a:rPr sz="1700" b="0" i="0">
+                <a:solidFill>
+                  <a:srgbClr val="212A26"/>
+                </a:solidFill>
+                <a:latin typeface="Calibri"/>
+              </a:rPr>
+              <a:t>The Chapter 5 Study Guide — the full channel matrix, both cases, and the triage system.</a:t>
+            </a:r>
+          </a:p>
+          <a:p>
+            <a:pPr algn="l">
+              <a:spcAft>
+                <a:spcPts val="1200"/>
+              </a:spcAft>
+            </a:pPr>
+            <a:r>
+              <a:rPr sz="1700">
+                <a:solidFill>
+                  <a:srgbClr val="8A6410"/>
+                </a:solidFill>
+                <a:latin typeface="Calibri"/>
+              </a:rPr>
+              <a:t>▪  </a:t>
+            </a:r>
+            <a:r>
+              <a:rPr sz="1700" b="1">
+                <a:solidFill>
+                  <a:srgbClr val="0E4D33"/>
+                </a:solidFill>
+                <a:latin typeface="Calibri"/>
+              </a:rPr>
+              <a:t>Coming next:  </a:t>
+            </a:r>
+            <a:r>
+              <a:rPr sz="1700" b="0" i="0">
+                <a:solidFill>
+                  <a:srgbClr val="212A26"/>
+                </a:solidFill>
+                <a:latin typeface="Calibri"/>
+              </a:rPr>
+              <a:t>Chapter 6 — positive and neutral messages: the everyday mail that quietly builds your reputation.</a:t>
             </a:r>
           </a:p>
         </p:txBody>

--- a/slides/ch05-short-workplace-messages.pptx
+++ b/slides/ch05-short-workplace-messages.pptx
@@ -6594,7 +6594,7 @@
                 </a:solidFill>
                 <a:latin typeface="Calibri"/>
               </a:rPr>
-              <a:t>BADM 225 · Chapter 5</a:t>
+              <a:t>BADM 225 · Chapter 5  ·  © Derek D. Bussan</a:t>
             </a:r>
           </a:p>
         </p:txBody>
@@ -7340,7 +7340,7 @@
                 </a:solidFill>
                 <a:latin typeface="Calibri"/>
               </a:rPr>
-              <a:t>BADM 225 · Chapter 5</a:t>
+              <a:t>BADM 225 · Chapter 5  ·  © Derek D. Bussan</a:t>
             </a:r>
           </a:p>
         </p:txBody>
@@ -7468,7 +7468,7 @@
                 </a:solidFill>
                 <a:latin typeface="Calibri"/>
               </a:rPr>
-              <a:t>BADM 225 · Chapter 5</a:t>
+              <a:t>BADM 225 · Chapter 5  ·  © Derek D. Bussan</a:t>
             </a:r>
           </a:p>
         </p:txBody>
@@ -7755,7 +7755,7 @@
                 </a:solidFill>
                 <a:latin typeface="Calibri"/>
               </a:rPr>
-              <a:t>BADM 225 · Chapter 5</a:t>
+              <a:t>BADM 225 · Chapter 5  ·  © Derek D. Bussan</a:t>
             </a:r>
           </a:p>
         </p:txBody>
@@ -8042,7 +8042,7 @@
                 </a:solidFill>
                 <a:latin typeface="Calibri"/>
               </a:rPr>
-              <a:t>BADM 225 · Chapter 5</a:t>
+              <a:t>BADM 225 · Chapter 5  ·  © Derek D. Bussan</a:t>
             </a:r>
           </a:p>
         </p:txBody>
@@ -8407,7 +8407,7 @@
                 </a:solidFill>
                 <a:latin typeface="Calibri"/>
               </a:rPr>
-              <a:t>BADM 225 · Chapter 5</a:t>
+              <a:t>BADM 225 · Chapter 5  ·  © Derek D. Bussan</a:t>
             </a:r>
           </a:p>
         </p:txBody>
@@ -8535,7 +8535,7 @@
                 </a:solidFill>
                 <a:latin typeface="Calibri"/>
               </a:rPr>
-              <a:t>BADM 225 · Chapter 5</a:t>
+              <a:t>BADM 225 · Chapter 5  ·  © Derek D. Bussan</a:t>
             </a:r>
           </a:p>
         </p:txBody>
@@ -8822,7 +8822,7 @@
                 </a:solidFill>
                 <a:latin typeface="Calibri"/>
               </a:rPr>
-              <a:t>BADM 225 · Chapter 5</a:t>
+              <a:t>BADM 225 · Chapter 5  ·  © Derek D. Bussan</a:t>
             </a:r>
           </a:p>
         </p:txBody>
@@ -9109,7 +9109,7 @@
                 </a:solidFill>
                 <a:latin typeface="Calibri"/>
               </a:rPr>
-              <a:t>BADM 225 · Chapter 5</a:t>
+              <a:t>BADM 225 · Chapter 5  ·  © Derek D. Bussan</a:t>
             </a:r>
           </a:p>
         </p:txBody>
@@ -9579,7 +9579,7 @@
                 </a:solidFill>
                 <a:latin typeface="Calibri"/>
               </a:rPr>
-              <a:t>BADM 225 · Chapter 5</a:t>
+              <a:t>BADM 225 · Chapter 5  ·  © Derek D. Bussan</a:t>
             </a:r>
           </a:p>
         </p:txBody>
@@ -9707,7 +9707,7 @@
                 </a:solidFill>
                 <a:latin typeface="Calibri"/>
               </a:rPr>
-              <a:t>BADM 225 · Chapter 5</a:t>
+              <a:t>BADM 225 · Chapter 5  ·  © Derek D. Bussan</a:t>
             </a:r>
           </a:p>
         </p:txBody>
@@ -10028,7 +10028,7 @@
                 </a:solidFill>
                 <a:latin typeface="Calibri"/>
               </a:rPr>
-              <a:t>BADM 225 · Chapter 5</a:t>
+              <a:t>BADM 225 · Chapter 5  ·  © Derek D. Bussan</a:t>
             </a:r>
           </a:p>
         </p:txBody>
@@ -10315,7 +10315,7 @@
                 </a:solidFill>
                 <a:latin typeface="Calibri"/>
               </a:rPr>
-              <a:t>BADM 225 · Chapter 5</a:t>
+              <a:t>BADM 225 · Chapter 5  ·  © Derek D. Bussan</a:t>
             </a:r>
           </a:p>
         </p:txBody>
@@ -10875,7 +10875,7 @@
                 </a:solidFill>
                 <a:latin typeface="Calibri"/>
               </a:rPr>
-              <a:t>BADM 225 · Chapter 5</a:t>
+              <a:t>BADM 225 · Chapter 5  ·  © Derek D. Bussan</a:t>
             </a:r>
           </a:p>
         </p:txBody>
@@ -11240,7 +11240,7 @@
                 </a:solidFill>
                 <a:latin typeface="Calibri"/>
               </a:rPr>
-              <a:t>BADM 225 · Chapter 5</a:t>
+              <a:t>BADM 225 · Chapter 5  ·  © Derek D. Bussan</a:t>
             </a:r>
           </a:p>
         </p:txBody>
@@ -11368,7 +11368,7 @@
                 </a:solidFill>
                 <a:latin typeface="Calibri"/>
               </a:rPr>
-              <a:t>BADM 225 · Chapter 5</a:t>
+              <a:t>BADM 225 · Chapter 5  ·  © Derek D. Bussan</a:t>
             </a:r>
           </a:p>
         </p:txBody>
@@ -11655,7 +11655,7 @@
                 </a:solidFill>
                 <a:latin typeface="Calibri"/>
               </a:rPr>
-              <a:t>BADM 225 · Chapter 5</a:t>
+              <a:t>BADM 225 · Chapter 5  ·  © Derek D. Bussan</a:t>
             </a:r>
           </a:p>
         </p:txBody>
@@ -12215,7 +12215,7 @@
                 </a:solidFill>
                 <a:latin typeface="Calibri"/>
               </a:rPr>
-              <a:t>BADM 225 · Chapter 5</a:t>
+              <a:t>BADM 225 · Chapter 5  ·  © Derek D. Bussan</a:t>
             </a:r>
           </a:p>
         </p:txBody>
@@ -12502,7 +12502,7 @@
                 </a:solidFill>
                 <a:latin typeface="Calibri"/>
               </a:rPr>
-              <a:t>BADM 225 · Chapter 5</a:t>
+              <a:t>BADM 225 · Chapter 5  ·  © Derek D. Bussan</a:t>
             </a:r>
           </a:p>
         </p:txBody>
@@ -12867,7 +12867,7 @@
                 </a:solidFill>
                 <a:latin typeface="Calibri"/>
               </a:rPr>
-              <a:t>BADM 225 · Chapter 5</a:t>
+              <a:t>BADM 225 · Chapter 5  ·  © Derek D. Bussan</a:t>
             </a:r>
           </a:p>
         </p:txBody>
@@ -12995,7 +12995,7 @@
                 </a:solidFill>
                 <a:latin typeface="Calibri"/>
               </a:rPr>
-              <a:t>BADM 225 · Chapter 5</a:t>
+              <a:t>BADM 225 · Chapter 5  ·  © Derek D. Bussan</a:t>
             </a:r>
           </a:p>
         </p:txBody>
@@ -13316,7 +13316,7 @@
                 </a:solidFill>
                 <a:latin typeface="Calibri"/>
               </a:rPr>
-              <a:t>BADM 225 · Chapter 5</a:t>
+              <a:t>BADM 225 · Chapter 5  ·  © Derek D. Bussan</a:t>
             </a:r>
           </a:p>
         </p:txBody>
@@ -13642,7 +13642,7 @@
                 </a:solidFill>
                 <a:latin typeface="Calibri"/>
               </a:rPr>
-              <a:t>BADM 225 · Chapter 5</a:t>
+              <a:t>BADM 225 · Chapter 5  ·  © Derek D. Bussan</a:t>
             </a:r>
           </a:p>
         </p:txBody>
@@ -14084,7 +14084,7 @@
                 </a:solidFill>
                 <a:latin typeface="Calibri"/>
               </a:rPr>
-              <a:t>BADM 225 · Chapter 5</a:t>
+              <a:t>BADM 225 · Chapter 5  ·  © Derek D. Bussan</a:t>
             </a:r>
           </a:p>
         </p:txBody>
@@ -14449,7 +14449,7 @@
                 </a:solidFill>
                 <a:latin typeface="Calibri"/>
               </a:rPr>
-              <a:t>BADM 225 · Chapter 5</a:t>
+              <a:t>BADM 225 · Chapter 5  ·  © Derek D. Bussan</a:t>
             </a:r>
           </a:p>
         </p:txBody>
@@ -14577,7 +14577,7 @@
                 </a:solidFill>
                 <a:latin typeface="Calibri"/>
               </a:rPr>
-              <a:t>BADM 225 · Chapter 5</a:t>
+              <a:t>BADM 225 · Chapter 5  ·  © Derek D. Bussan</a:t>
             </a:r>
           </a:p>
         </p:txBody>
@@ -15176,7 +15176,7 @@
                 </a:solidFill>
                 <a:latin typeface="Calibri"/>
               </a:rPr>
-              <a:t>BADM 225 · Chapter 5</a:t>
+              <a:t>BADM 225 · Chapter 5  ·  © Derek D. Bussan</a:t>
             </a:r>
           </a:p>
         </p:txBody>
@@ -15463,7 +15463,7 @@
                 </a:solidFill>
                 <a:latin typeface="Calibri"/>
               </a:rPr>
-              <a:t>BADM 225 · Chapter 5</a:t>
+              <a:t>BADM 225 · Chapter 5  ·  © Derek D. Bussan</a:t>
             </a:r>
           </a:p>
         </p:txBody>
@@ -15923,7 +15923,7 @@
                 </a:solidFill>
                 <a:latin typeface="Calibri"/>
               </a:rPr>
-              <a:t>BADM 225 · Chapter 5</a:t>
+              <a:t>BADM 225 · Chapter 5  ·  © Derek D. Bussan</a:t>
             </a:r>
           </a:p>
         </p:txBody>
@@ -16210,7 +16210,7 @@
                 </a:solidFill>
                 <a:latin typeface="Calibri"/>
               </a:rPr>
-              <a:t>BADM 225 · Chapter 5</a:t>
+              <a:t>BADM 225 · Chapter 5  ·  © Derek D. Bussan</a:t>
             </a:r>
           </a:p>
         </p:txBody>
@@ -16536,7 +16536,7 @@
                 </a:solidFill>
                 <a:latin typeface="Calibri"/>
               </a:rPr>
-              <a:t>BADM 225 · Chapter 5</a:t>
+              <a:t>BADM 225 · Chapter 5  ·  © Derek D. Bussan</a:t>
             </a:r>
           </a:p>
         </p:txBody>
@@ -17351,7 +17351,7 @@
                 </a:solidFill>
                 <a:latin typeface="Calibri"/>
               </a:rPr>
-              <a:t>BADM 225 · Chapter 5</a:t>
+              <a:t>BADM 225 · Chapter 5  ·  © Derek D. Bussan</a:t>
             </a:r>
           </a:p>
         </p:txBody>
@@ -17557,7 +17557,7 @@
                 </a:solidFill>
                 <a:latin typeface="Calibri"/>
               </a:rPr>
-              <a:t>BADM 225 · Chapter 5</a:t>
+              <a:t>BADM 225 · Chapter 5  ·  © Derek D. Bussan</a:t>
             </a:r>
           </a:p>
         </p:txBody>
@@ -17833,7 +17833,7 @@
                 </a:solidFill>
                 <a:latin typeface="Calibri"/>
               </a:rPr>
-              <a:t>BADM 225 · Chapter 5</a:t>
+              <a:t>BADM 225 · Chapter 5  ·  © Derek D. Bussan</a:t>
             </a:r>
           </a:p>
         </p:txBody>
@@ -17926,7 +17926,7 @@
                 </a:solidFill>
                 <a:latin typeface="Calibri"/>
               </a:rPr>
-              <a:t>BADM 225 · Chapter 5</a:t>
+              <a:t>BADM 225 · Chapter 5  ·  © Derek D. Bussan</a:t>
             </a:r>
           </a:p>
         </p:txBody>
@@ -18247,7 +18247,7 @@
                 </a:solidFill>
                 <a:latin typeface="Calibri"/>
               </a:rPr>
-              <a:t>BADM 225 · Chapter 5</a:t>
+              <a:t>BADM 225 · Chapter 5  ·  © Derek D. Bussan</a:t>
             </a:r>
           </a:p>
         </p:txBody>
@@ -18915,7 +18915,7 @@
                 </a:solidFill>
                 <a:latin typeface="Calibri"/>
               </a:rPr>
-              <a:t>BADM 225 · Chapter 5</a:t>
+              <a:t>BADM 225 · Chapter 5  ·  © Derek D. Bussan</a:t>
             </a:r>
           </a:p>
         </p:txBody>
@@ -19377,7 +19377,7 @@
                 </a:solidFill>
                 <a:latin typeface="Calibri"/>
               </a:rPr>
-              <a:t>BADM 225 · Chapter 5</a:t>
+              <a:t>BADM 225 · Chapter 5  ·  © Derek D. Bussan</a:t>
             </a:r>
           </a:p>
         </p:txBody>
@@ -20015,7 +20015,7 @@
                 </a:solidFill>
                 <a:latin typeface="Calibri"/>
               </a:rPr>
-              <a:t>BADM 225 · Chapter 5</a:t>
+              <a:t>BADM 225 · Chapter 5  ·  © Derek D. Bussan</a:t>
             </a:r>
           </a:p>
         </p:txBody>
@@ -20143,7 +20143,7 @@
                 </a:solidFill>
                 <a:latin typeface="Calibri"/>
               </a:rPr>
-              <a:t>BADM 225 · Chapter 5</a:t>
+              <a:t>BADM 225 · Chapter 5  ·  © Derek D. Bussan</a:t>
             </a:r>
           </a:p>
         </p:txBody>

--- a/slides/ch05-short-workplace-messages.pptx
+++ b/slides/ch05-short-workplace-messages.pptx
@@ -6501,7 +6501,7 @@
                 </a:solidFill>
                 <a:latin typeface="Calibri"/>
               </a:rPr>
-              <a:t>BADM 225 · Chapter 5  ·  Original instructional material — no publisher content</a:t>
+              <a:t>BADM 225 · Chapter 5  ·  Original material © 2026 Derek D. Bussan, PhD, MBA  ·  No publisher content</a:t>
             </a:r>
           </a:p>
         </p:txBody>
